--- a/TECADI_ARMAZENS_GERAIS_LTDA_(I.pptx
+++ b/TECADI_ARMAZENS_GERAIS_LTDA_(I.pptx
@@ -162,10 +162,10 @@
                 <c:formatCode>General</c:formatCode>
                 <c:ptCount val="2"/>
                 <c:pt idx="0">
-                  <c:v>43</c:v>
+                  <c:v>4</c:v>
                 </c:pt>
                 <c:pt idx="1">
-                  <c:v>46</c:v>
+                  <c:v>43</c:v>
                 </c:pt>
               </c:numCache>
             </c:numRef>
@@ -214,7 +214,7 @@
                   <c:v>0</c:v>
                 </c:pt>
                 <c:pt idx="1">
-                  <c:v>4</c:v>
+                  <c:v>3</c:v>
                 </c:pt>
               </c:numCache>
             </c:numRef>
@@ -3688,7 +3688,7 @@
         <p:spPr>
           <a:xfrm>
             <a:off x="1005840" y="2240279"/>
-            <a:ext cx="2377439" cy="891540"/>
+            <a:ext cx="2377440" cy="868680"/>
           </a:xfrm>
           <a:prstGeom prst="rect">
             <a:avLst/>
@@ -3709,7 +3709,7 @@
                 </a:solidFill>
                 <a:latin typeface="Calibri"/>
               </a:rPr>
-              <a:t>50</a:t>
+              <a:t>46</a:t>
             </a:r>
           </a:p>
         </p:txBody>
@@ -3722,8 +3722,8 @@
         </p:nvSpPr>
         <p:spPr>
           <a:xfrm>
-            <a:off x="1005840" y="3058668"/>
-            <a:ext cx="2377439" cy="548640"/>
+            <a:off x="1005840" y="3090672"/>
+            <a:ext cx="2377440" cy="411480"/>
           </a:xfrm>
           <a:prstGeom prst="rect">
             <a:avLst/>
@@ -3803,7 +3803,7 @@
         <p:spPr>
           <a:xfrm>
             <a:off x="3931920" y="2240279"/>
-            <a:ext cx="2377439" cy="891540"/>
+            <a:ext cx="2377440" cy="868680"/>
           </a:xfrm>
           <a:prstGeom prst="rect">
             <a:avLst/>
@@ -3824,7 +3824,7 @@
                 </a:solidFill>
                 <a:latin typeface="Calibri"/>
               </a:rPr>
-              <a:t>46</a:t>
+              <a:t>43</a:t>
             </a:r>
           </a:p>
         </p:txBody>
@@ -3837,8 +3837,8 @@
         </p:nvSpPr>
         <p:spPr>
           <a:xfrm>
-            <a:off x="3931920" y="3058668"/>
-            <a:ext cx="2377439" cy="548640"/>
+            <a:off x="3931920" y="3090672"/>
+            <a:ext cx="2377440" cy="411480"/>
           </a:xfrm>
           <a:prstGeom prst="rect">
             <a:avLst/>
@@ -3918,7 +3918,7 @@
         <p:spPr>
           <a:xfrm>
             <a:off x="6858000" y="2240279"/>
-            <a:ext cx="2377439" cy="891540"/>
+            <a:ext cx="2377440" cy="868680"/>
           </a:xfrm>
           <a:prstGeom prst="rect">
             <a:avLst/>
@@ -3939,7 +3939,7 @@
                 </a:solidFill>
                 <a:latin typeface="Calibri"/>
               </a:rPr>
-              <a:t>4</a:t>
+              <a:t>3</a:t>
             </a:r>
           </a:p>
         </p:txBody>
@@ -3952,8 +3952,8 @@
         </p:nvSpPr>
         <p:spPr>
           <a:xfrm>
-            <a:off x="6858000" y="3058668"/>
-            <a:ext cx="2377439" cy="548640"/>
+            <a:off x="6858000" y="3090672"/>
+            <a:ext cx="2377440" cy="411480"/>
           </a:xfrm>
           <a:prstGeom prst="rect">
             <a:avLst/>
@@ -4033,7 +4033,7 @@
         <p:spPr>
           <a:xfrm>
             <a:off x="9784080" y="2240279"/>
-            <a:ext cx="2377439" cy="891540"/>
+            <a:ext cx="2377440" cy="868680"/>
           </a:xfrm>
           <a:prstGeom prst="rect">
             <a:avLst/>
@@ -4054,7 +4054,7 @@
                 </a:solidFill>
                 <a:latin typeface="Calibri"/>
               </a:rPr>
-              <a:t>92.0%</a:t>
+              <a:t>93.5%</a:t>
             </a:r>
           </a:p>
         </p:txBody>
@@ -4067,8 +4067,8 @@
         </p:nvSpPr>
         <p:spPr>
           <a:xfrm>
-            <a:off x="9784080" y="3058668"/>
-            <a:ext cx="2377439" cy="548640"/>
+            <a:off x="9784080" y="3090672"/>
+            <a:ext cx="2377440" cy="411480"/>
           </a:xfrm>
           <a:prstGeom prst="rect">
             <a:avLst/>
@@ -4121,7 +4121,7 @@
               <a:tr h="475488">
                 <a:tc>
                   <a:txBody>
-                    <a:bodyPr wrap="square"/>
+                    <a:bodyPr/>
                     <a:lstStyle/>
                     <a:p>
                       <a:pPr algn="ctr"/>
@@ -4144,7 +4144,7 @@
                 </a:tc>
                 <a:tc>
                   <a:txBody>
-                    <a:bodyPr wrap="square"/>
+                    <a:bodyPr/>
                     <a:lstStyle/>
                     <a:p>
                       <a:pPr algn="ctr"/>
@@ -4167,7 +4167,7 @@
                 </a:tc>
                 <a:tc>
                   <a:txBody>
-                    <a:bodyPr wrap="square"/>
+                    <a:bodyPr/>
                     <a:lstStyle/>
                     <a:p>
                       <a:pPr algn="ctr"/>
@@ -4190,7 +4190,7 @@
                 </a:tc>
                 <a:tc>
                   <a:txBody>
-                    <a:bodyPr wrap="square"/>
+                    <a:bodyPr/>
                     <a:lstStyle/>
                     <a:p>
                       <a:pPr algn="ctr"/>
@@ -4215,18 +4215,18 @@
               <a:tr h="475488">
                 <a:tc>
                   <a:txBody>
-                    <a:bodyPr wrap="square"/>
-                    <a:lstStyle/>
-                    <a:p>
-                      <a:pPr algn="l"/>
-                      <a:r>
-                        <a:rPr sz="1000" b="0">
-                          <a:solidFill>
-                            <a:srgbClr val="1D1B43"/>
-                          </a:solidFill>
-                          <a:latin typeface="Calibri"/>
-                        </a:rPr>
-                        <a:t>Total Entregas</a:t>
+                    <a:bodyPr/>
+                    <a:lstStyle/>
+                    <a:p>
+                      <a:pPr algn="l"/>
+                      <a:r>
+                        <a:rPr sz="1000" b="0">
+                          <a:solidFill>
+                            <a:srgbClr val="1D1B43"/>
+                          </a:solidFill>
+                          <a:latin typeface="Calibri"/>
+                        </a:rPr>
+                        <a:t>Total</a:t>
                       </a:r>
                     </a:p>
                   </a:txBody>
@@ -4238,18 +4238,18 @@
                 </a:tc>
                 <a:tc>
                   <a:txBody>
-                    <a:bodyPr wrap="square"/>
-                    <a:lstStyle/>
-                    <a:p>
-                      <a:pPr algn="l"/>
-                      <a:r>
-                        <a:rPr sz="1000" b="0">
-                          <a:solidFill>
-                            <a:srgbClr val="1D1B43"/>
-                          </a:solidFill>
-                          <a:latin typeface="Calibri"/>
-                        </a:rPr>
-                        <a:t>43</a:t>
+                    <a:bodyPr/>
+                    <a:lstStyle/>
+                    <a:p>
+                      <a:pPr algn="l"/>
+                      <a:r>
+                        <a:rPr sz="1000" b="0">
+                          <a:solidFill>
+                            <a:srgbClr val="1D1B43"/>
+                          </a:solidFill>
+                          <a:latin typeface="Calibri"/>
+                        </a:rPr>
+                        <a:t>4</a:t>
                       </a:r>
                     </a:p>
                   </a:txBody>
@@ -4261,18 +4261,18 @@
                 </a:tc>
                 <a:tc>
                   <a:txBody>
-                    <a:bodyPr wrap="square"/>
-                    <a:lstStyle/>
-                    <a:p>
-                      <a:pPr algn="l"/>
-                      <a:r>
-                        <a:rPr sz="1000" b="0">
-                          <a:solidFill>
-                            <a:srgbClr val="1D1B43"/>
-                          </a:solidFill>
-                          <a:latin typeface="Calibri"/>
-                        </a:rPr>
-                        <a:t>50</a:t>
+                    <a:bodyPr/>
+                    <a:lstStyle/>
+                    <a:p>
+                      <a:pPr algn="l"/>
+                      <a:r>
+                        <a:rPr sz="1000" b="0">
+                          <a:solidFill>
+                            <a:srgbClr val="1D1B43"/>
+                          </a:solidFill>
+                          <a:latin typeface="Calibri"/>
+                        </a:rPr>
+                        <a:t>46</a:t>
                       </a:r>
                     </a:p>
                   </a:txBody>
@@ -4284,18 +4284,18 @@
                 </a:tc>
                 <a:tc>
                   <a:txBody>
-                    <a:bodyPr wrap="square"/>
-                    <a:lstStyle/>
-                    <a:p>
-                      <a:pPr algn="l"/>
-                      <a:r>
-                        <a:rPr sz="1000" b="0">
-                          <a:solidFill>
-                            <a:srgbClr val="1D1B43"/>
-                          </a:solidFill>
-                          <a:latin typeface="Calibri"/>
-                        </a:rPr>
-                        <a:t>+ 7</a:t>
+                    <a:bodyPr/>
+                    <a:lstStyle/>
+                    <a:p>
+                      <a:pPr algn="l"/>
+                      <a:r>
+                        <a:rPr sz="1000" b="0">
+                          <a:solidFill>
+                            <a:srgbClr val="1D1B43"/>
+                          </a:solidFill>
+                          <a:latin typeface="Calibri"/>
+                        </a:rPr>
+                        <a:t>+ 42</a:t>
                       </a:r>
                     </a:p>
                   </a:txBody>
@@ -4309,7 +4309,7 @@
               <a:tr h="475488">
                 <a:tc>
                   <a:txBody>
-                    <a:bodyPr wrap="square"/>
+                    <a:bodyPr/>
                     <a:lstStyle/>
                     <a:p>
                       <a:pPr algn="l"/>
@@ -4332,7 +4332,30 @@
                 </a:tc>
                 <a:tc>
                   <a:txBody>
-                    <a:bodyPr wrap="square"/>
+                    <a:bodyPr/>
+                    <a:lstStyle/>
+                    <a:p>
+                      <a:pPr algn="l"/>
+                      <a:r>
+                        <a:rPr sz="1000" b="0">
+                          <a:solidFill>
+                            <a:srgbClr val="1D1B43"/>
+                          </a:solidFill>
+                          <a:latin typeface="Calibri"/>
+                        </a:rPr>
+                        <a:t>4</a:t>
+                      </a:r>
+                    </a:p>
+                  </a:txBody>
+                  <a:tcPr>
+                    <a:solidFill>
+                      <a:srgbClr val="F2F2F2"/>
+                    </a:solidFill>
+                  </a:tcPr>
+                </a:tc>
+                <a:tc>
+                  <a:txBody>
+                    <a:bodyPr/>
                     <a:lstStyle/>
                     <a:p>
                       <a:pPr algn="l"/>
@@ -4355,41 +4378,18 @@
                 </a:tc>
                 <a:tc>
                   <a:txBody>
-                    <a:bodyPr wrap="square"/>
-                    <a:lstStyle/>
-                    <a:p>
-                      <a:pPr algn="l"/>
-                      <a:r>
-                        <a:rPr sz="1000" b="0">
-                          <a:solidFill>
-                            <a:srgbClr val="1D1B43"/>
-                          </a:solidFill>
-                          <a:latin typeface="Calibri"/>
-                        </a:rPr>
-                        <a:t>46</a:t>
-                      </a:r>
-                    </a:p>
-                  </a:txBody>
-                  <a:tcPr>
-                    <a:solidFill>
-                      <a:srgbClr val="F2F2F2"/>
-                    </a:solidFill>
-                  </a:tcPr>
-                </a:tc>
-                <a:tc>
-                  <a:txBody>
-                    <a:bodyPr wrap="square"/>
-                    <a:lstStyle/>
-                    <a:p>
-                      <a:pPr algn="l"/>
-                      <a:r>
-                        <a:rPr sz="1000" b="0">
-                          <a:solidFill>
-                            <a:srgbClr val="1D1B43"/>
-                          </a:solidFill>
-                          <a:latin typeface="Calibri"/>
-                        </a:rPr>
-                        <a:t>+ 3</a:t>
+                    <a:bodyPr/>
+                    <a:lstStyle/>
+                    <a:p>
+                      <a:pPr algn="l"/>
+                      <a:r>
+                        <a:rPr sz="1000" b="0">
+                          <a:solidFill>
+                            <a:srgbClr val="1D1B43"/>
+                          </a:solidFill>
+                          <a:latin typeface="Calibri"/>
+                        </a:rPr>
+                        <a:t>+ 39</a:t>
                       </a:r>
                     </a:p>
                   </a:txBody>
@@ -4403,18 +4403,18 @@
               <a:tr h="475488">
                 <a:tc>
                   <a:txBody>
-                    <a:bodyPr wrap="square"/>
-                    <a:lstStyle/>
-                    <a:p>
-                      <a:pPr algn="l"/>
-                      <a:r>
-                        <a:rPr sz="1000" b="0">
-                          <a:solidFill>
-                            <a:srgbClr val="1D1B43"/>
-                          </a:solidFill>
-                          <a:latin typeface="Calibri"/>
-                        </a:rPr>
-                        <a:t>Fora do Prazo</a:t>
+                    <a:bodyPr/>
+                    <a:lstStyle/>
+                    <a:p>
+                      <a:pPr algn="l"/>
+                      <a:r>
+                        <a:rPr sz="1000" b="0">
+                          <a:solidFill>
+                            <a:srgbClr val="1D1B43"/>
+                          </a:solidFill>
+                          <a:latin typeface="Calibri"/>
+                        </a:rPr>
+                        <a:t>Fora Prazo</a:t>
                       </a:r>
                     </a:p>
                   </a:txBody>
@@ -4426,7 +4426,7 @@
                 </a:tc>
                 <a:tc>
                   <a:txBody>
-                    <a:bodyPr wrap="square"/>
+                    <a:bodyPr/>
                     <a:lstStyle/>
                     <a:p>
                       <a:pPr algn="l"/>
@@ -4449,18 +4449,18 @@
                 </a:tc>
                 <a:tc>
                   <a:txBody>
-                    <a:bodyPr wrap="square"/>
-                    <a:lstStyle/>
-                    <a:p>
-                      <a:pPr algn="l"/>
-                      <a:r>
-                        <a:rPr sz="1000" b="0">
-                          <a:solidFill>
-                            <a:srgbClr val="1D1B43"/>
-                          </a:solidFill>
-                          <a:latin typeface="Calibri"/>
-                        </a:rPr>
-                        <a:t>4</a:t>
+                    <a:bodyPr/>
+                    <a:lstStyle/>
+                    <a:p>
+                      <a:pPr algn="l"/>
+                      <a:r>
+                        <a:rPr sz="1000" b="0">
+                          <a:solidFill>
+                            <a:srgbClr val="1D1B43"/>
+                          </a:solidFill>
+                          <a:latin typeface="Calibri"/>
+                        </a:rPr>
+                        <a:t>3</a:t>
                       </a:r>
                     </a:p>
                   </a:txBody>
@@ -4472,18 +4472,18 @@
                 </a:tc>
                 <a:tc>
                   <a:txBody>
-                    <a:bodyPr wrap="square"/>
-                    <a:lstStyle/>
-                    <a:p>
-                      <a:pPr algn="l"/>
-                      <a:r>
-                        <a:rPr sz="1000" b="0">
-                          <a:solidFill>
-                            <a:srgbClr val="1D1B43"/>
-                          </a:solidFill>
-                          <a:latin typeface="Calibri"/>
-                        </a:rPr>
-                        <a:t>+ 4</a:t>
+                    <a:bodyPr/>
+                    <a:lstStyle/>
+                    <a:p>
+                      <a:pPr algn="l"/>
+                      <a:r>
+                        <a:rPr sz="1000" b="0">
+                          <a:solidFill>
+                            <a:srgbClr val="1D1B43"/>
+                          </a:solidFill>
+                          <a:latin typeface="Calibri"/>
+                        </a:rPr>
+                        <a:t>+ 3</a:t>
                       </a:r>
                     </a:p>
                   </a:txBody>
@@ -4497,7 +4497,7 @@
               <a:tr h="475488">
                 <a:tc>
                   <a:txBody>
-                    <a:bodyPr wrap="square"/>
+                    <a:bodyPr/>
                     <a:lstStyle/>
                     <a:p>
                       <a:pPr algn="l"/>
@@ -4520,7 +4520,7 @@
                 </a:tc>
                 <a:tc>
                   <a:txBody>
-                    <a:bodyPr wrap="square"/>
+                    <a:bodyPr/>
                     <a:lstStyle/>
                     <a:p>
                       <a:pPr algn="l"/>
@@ -4543,18 +4543,18 @@
                 </a:tc>
                 <a:tc>
                   <a:txBody>
-                    <a:bodyPr wrap="square"/>
-                    <a:lstStyle/>
-                    <a:p>
-                      <a:pPr algn="l"/>
-                      <a:r>
-                        <a:rPr sz="1000" b="0">
-                          <a:solidFill>
-                            <a:srgbClr val="1D1B43"/>
-                          </a:solidFill>
-                          <a:latin typeface="Calibri"/>
-                        </a:rPr>
-                        <a:t>92.0%</a:t>
+                    <a:bodyPr/>
+                    <a:lstStyle/>
+                    <a:p>
+                      <a:pPr algn="l"/>
+                      <a:r>
+                        <a:rPr sz="1000" b="0">
+                          <a:solidFill>
+                            <a:srgbClr val="1D1B43"/>
+                          </a:solidFill>
+                          <a:latin typeface="Calibri"/>
+                        </a:rPr>
+                        <a:t>93.5%</a:t>
                       </a:r>
                     </a:p>
                   </a:txBody>
@@ -4566,18 +4566,18 @@
                 </a:tc>
                 <a:tc>
                   <a:txBody>
-                    <a:bodyPr wrap="square"/>
-                    <a:lstStyle/>
-                    <a:p>
-                      <a:pPr algn="l"/>
-                      <a:r>
-                        <a:rPr sz="1000" b="0">
-                          <a:solidFill>
-                            <a:srgbClr val="1D1B43"/>
-                          </a:solidFill>
-                          <a:latin typeface="Calibri"/>
-                        </a:rPr>
-                        <a:t>- 8.0pp</a:t>
+                    <a:bodyPr/>
+                    <a:lstStyle/>
+                    <a:p>
+                      <a:pPr algn="l"/>
+                      <a:r>
+                        <a:rPr sz="1000" b="0">
+                          <a:solidFill>
+                            <a:srgbClr val="1D1B43"/>
+                          </a:solidFill>
+                          <a:latin typeface="Calibri"/>
+                        </a:rPr>
+                        <a:t>- 6.5pp</a:t>
                       </a:r>
                     </a:p>
                   </a:txBody>
@@ -4766,7 +4766,7 @@
               <a:tr h="438912">
                 <a:tc>
                   <a:txBody>
-                    <a:bodyPr wrap="square"/>
+                    <a:bodyPr/>
                     <a:lstStyle/>
                     <a:p>
                       <a:pPr algn="ctr"/>
@@ -4789,7 +4789,7 @@
                 </a:tc>
                 <a:tc>
                   <a:txBody>
-                    <a:bodyPr wrap="square"/>
+                    <a:bodyPr/>
                     <a:lstStyle/>
                     <a:p>
                       <a:pPr algn="ctr"/>
@@ -4812,7 +4812,7 @@
                 </a:tc>
                 <a:tc>
                   <a:txBody>
-                    <a:bodyPr wrap="square"/>
+                    <a:bodyPr/>
                     <a:lstStyle/>
                     <a:p>
                       <a:pPr algn="ctr"/>
@@ -4835,7 +4835,7 @@
                 </a:tc>
                 <a:tc>
                   <a:txBody>
-                    <a:bodyPr wrap="square"/>
+                    <a:bodyPr/>
                     <a:lstStyle/>
                     <a:p>
                       <a:pPr algn="ctr"/>
@@ -4858,7 +4858,7 @@
                 </a:tc>
                 <a:tc>
                   <a:txBody>
-                    <a:bodyPr wrap="square"/>
+                    <a:bodyPr/>
                     <a:lstStyle/>
                     <a:p>
                       <a:pPr algn="ctr"/>
@@ -4883,7 +4883,7 @@
               <a:tr h="438912">
                 <a:tc>
                   <a:txBody>
-                    <a:bodyPr wrap="square"/>
+                    <a:bodyPr/>
                     <a:lstStyle/>
                     <a:p>
                       <a:pPr algn="l"/>
@@ -4906,18 +4906,18 @@
                 </a:tc>
                 <a:tc>
                   <a:txBody>
-                    <a:bodyPr wrap="square"/>
-                    <a:lstStyle/>
-                    <a:p>
-                      <a:pPr algn="l"/>
-                      <a:r>
-                        <a:rPr sz="1000" b="0">
-                          <a:solidFill>
-                            <a:srgbClr val="1D1B43"/>
-                          </a:solidFill>
-                          <a:latin typeface="Calibri"/>
-                        </a:rPr>
-                        <a:t>43</a:t>
+                    <a:bodyPr/>
+                    <a:lstStyle/>
+                    <a:p>
+                      <a:pPr algn="l"/>
+                      <a:r>
+                        <a:rPr sz="1000" b="0">
+                          <a:solidFill>
+                            <a:srgbClr val="1D1B43"/>
+                          </a:solidFill>
+                          <a:latin typeface="Calibri"/>
+                        </a:rPr>
+                        <a:t>4</a:t>
                       </a:r>
                     </a:p>
                   </a:txBody>
@@ -4929,18 +4929,18 @@
                 </a:tc>
                 <a:tc>
                   <a:txBody>
-                    <a:bodyPr wrap="square"/>
-                    <a:lstStyle/>
-                    <a:p>
-                      <a:pPr algn="l"/>
-                      <a:r>
-                        <a:rPr sz="1000" b="0">
-                          <a:solidFill>
-                            <a:srgbClr val="1D1B43"/>
-                          </a:solidFill>
-                          <a:latin typeface="Calibri"/>
-                        </a:rPr>
-                        <a:t>43</a:t>
+                    <a:bodyPr/>
+                    <a:lstStyle/>
+                    <a:p>
+                      <a:pPr algn="l"/>
+                      <a:r>
+                        <a:rPr sz="1000" b="0">
+                          <a:solidFill>
+                            <a:srgbClr val="1D1B43"/>
+                          </a:solidFill>
+                          <a:latin typeface="Calibri"/>
+                        </a:rPr>
+                        <a:t>4</a:t>
                       </a:r>
                     </a:p>
                   </a:txBody>
@@ -4952,7 +4952,7 @@
                 </a:tc>
                 <a:tc>
                   <a:txBody>
-                    <a:bodyPr wrap="square"/>
+                    <a:bodyPr/>
                     <a:lstStyle/>
                     <a:p>
                       <a:pPr algn="l"/>
@@ -4975,7 +4975,7 @@
                 </a:tc>
                 <a:tc>
                   <a:txBody>
-                    <a:bodyPr wrap="square"/>
+                    <a:bodyPr/>
                     <a:lstStyle/>
                     <a:p>
                       <a:pPr algn="l"/>
@@ -5000,7 +5000,7 @@
               <a:tr h="438912">
                 <a:tc>
                   <a:txBody>
-                    <a:bodyPr wrap="square"/>
+                    <a:bodyPr/>
                     <a:lstStyle/>
                     <a:p>
                       <a:pPr algn="l"/>
@@ -5023,18 +5023,18 @@
                 </a:tc>
                 <a:tc>
                   <a:txBody>
-                    <a:bodyPr wrap="square"/>
-                    <a:lstStyle/>
-                    <a:p>
-                      <a:pPr algn="l"/>
-                      <a:r>
-                        <a:rPr sz="1000" b="0">
-                          <a:solidFill>
-                            <a:srgbClr val="1D1B43"/>
-                          </a:solidFill>
-                          <a:latin typeface="Calibri"/>
-                        </a:rPr>
-                        <a:t>50</a:t>
+                    <a:bodyPr/>
+                    <a:lstStyle/>
+                    <a:p>
+                      <a:pPr algn="l"/>
+                      <a:r>
+                        <a:rPr sz="1000" b="0">
+                          <a:solidFill>
+                            <a:srgbClr val="1D1B43"/>
+                          </a:solidFill>
+                          <a:latin typeface="Calibri"/>
+                        </a:rPr>
+                        <a:t>46</a:t>
                       </a:r>
                     </a:p>
                   </a:txBody>
@@ -5046,18 +5046,18 @@
                 </a:tc>
                 <a:tc>
                   <a:txBody>
-                    <a:bodyPr wrap="square"/>
-                    <a:lstStyle/>
-                    <a:p>
-                      <a:pPr algn="l"/>
-                      <a:r>
-                        <a:rPr sz="1000" b="0">
-                          <a:solidFill>
-                            <a:srgbClr val="1D1B43"/>
-                          </a:solidFill>
-                          <a:latin typeface="Calibri"/>
-                        </a:rPr>
-                        <a:t>46</a:t>
+                    <a:bodyPr/>
+                    <a:lstStyle/>
+                    <a:p>
+                      <a:pPr algn="l"/>
+                      <a:r>
+                        <a:rPr sz="1000" b="0">
+                          <a:solidFill>
+                            <a:srgbClr val="1D1B43"/>
+                          </a:solidFill>
+                          <a:latin typeface="Calibri"/>
+                        </a:rPr>
+                        <a:t>43</a:t>
                       </a:r>
                     </a:p>
                   </a:txBody>
@@ -5069,18 +5069,18 @@
                 </a:tc>
                 <a:tc>
                   <a:txBody>
-                    <a:bodyPr wrap="square"/>
-                    <a:lstStyle/>
-                    <a:p>
-                      <a:pPr algn="l"/>
-                      <a:r>
-                        <a:rPr sz="1000" b="0">
-                          <a:solidFill>
-                            <a:srgbClr val="1D1B43"/>
-                          </a:solidFill>
-                          <a:latin typeface="Calibri"/>
-                        </a:rPr>
-                        <a:t>4</a:t>
+                    <a:bodyPr/>
+                    <a:lstStyle/>
+                    <a:p>
+                      <a:pPr algn="l"/>
+                      <a:r>
+                        <a:rPr sz="1000" b="0">
+                          <a:solidFill>
+                            <a:srgbClr val="1D1B43"/>
+                          </a:solidFill>
+                          <a:latin typeface="Calibri"/>
+                        </a:rPr>
+                        <a:t>3</a:t>
                       </a:r>
                     </a:p>
                   </a:txBody>
@@ -5092,18 +5092,18 @@
                 </a:tc>
                 <a:tc>
                   <a:txBody>
-                    <a:bodyPr wrap="square"/>
-                    <a:lstStyle/>
-                    <a:p>
-                      <a:pPr algn="l"/>
-                      <a:r>
-                        <a:rPr sz="1000" b="0">
-                          <a:solidFill>
-                            <a:srgbClr val="1D1B43"/>
-                          </a:solidFill>
-                          <a:latin typeface="Calibri"/>
-                        </a:rPr>
-                        <a:t>92.0%</a:t>
+                    <a:bodyPr/>
+                    <a:lstStyle/>
+                    <a:p>
+                      <a:pPr algn="l"/>
+                      <a:r>
+                        <a:rPr sz="1000" b="0">
+                          <a:solidFill>
+                            <a:srgbClr val="1D1B43"/>
+                          </a:solidFill>
+                          <a:latin typeface="Calibri"/>
+                        </a:rPr>
+                        <a:t>93.5%</a:t>
                       </a:r>
                     </a:p>
                   </a:txBody>
@@ -5191,7 +5191,7 @@
                 </a:solidFill>
                 <a:latin typeface="Calibri"/>
               </a:rPr>
-              <a:t>PERFORMANCE: 92.0% - REGULAR</a:t>
+              <a:t>PERFORMANCE: 93.5% - REGULAR</a:t>
             </a:r>
           </a:p>
         </p:txBody>
@@ -5276,7 +5276,7 @@
                 </a:solidFill>
                 <a:latin typeface="Calibri"/>
               </a:rPr>
-              <a:t>OCORRENCIAS FORA DO PRAZO (4)</a:t>
+              <a:t>OCORRENCIAS FORA DO PRAZO (3)</a:t>
             </a:r>
           </a:p>
         </p:txBody>
@@ -5334,7 +5334,7 @@
         </p:nvGraphicFramePr>
         <p:xfrm>
           <a:off x="457200" y="1828800"/>
-          <a:ext cx="11429999" cy="1920240"/>
+          <a:ext cx="11429999" cy="1536192"/>
         </p:xfrm>
         <a:graphic>
           <a:graphicData uri="http://schemas.openxmlformats.org/drawingml/2006/table">
@@ -5352,7 +5352,7 @@
               <a:tr h="384048">
                 <a:tc>
                   <a:txBody>
-                    <a:bodyPr wrap="square"/>
+                    <a:bodyPr/>
                     <a:lstStyle/>
                     <a:p>
                       <a:pPr algn="ctr"/>
@@ -5375,7 +5375,7 @@
                 </a:tc>
                 <a:tc>
                   <a:txBody>
-                    <a:bodyPr wrap="square"/>
+                    <a:bodyPr/>
                     <a:lstStyle/>
                     <a:p>
                       <a:pPr algn="ctr"/>
@@ -5398,7 +5398,7 @@
                 </a:tc>
                 <a:tc>
                   <a:txBody>
-                    <a:bodyPr wrap="square"/>
+                    <a:bodyPr/>
                     <a:lstStyle/>
                     <a:p>
                       <a:pPr algn="ctr"/>
@@ -5421,7 +5421,7 @@
                 </a:tc>
                 <a:tc>
                   <a:txBody>
-                    <a:bodyPr wrap="square"/>
+                    <a:bodyPr/>
                     <a:lstStyle/>
                     <a:p>
                       <a:pPr algn="ctr"/>
@@ -5444,7 +5444,7 @@
                 </a:tc>
                 <a:tc>
                   <a:txBody>
-                    <a:bodyPr wrap="square"/>
+                    <a:bodyPr/>
                     <a:lstStyle/>
                     <a:p>
                       <a:pPr algn="ctr"/>
@@ -5469,18 +5469,18 @@
               <a:tr h="384048">
                 <a:tc>
                   <a:txBody>
-                    <a:bodyPr wrap="square"/>
-                    <a:lstStyle/>
-                    <a:p>
-                      <a:pPr algn="l"/>
-                      <a:r>
-                        <a:rPr sz="1000" b="0">
-                          <a:solidFill>
-                            <a:srgbClr val="1D1B43"/>
-                          </a:solidFill>
-                          <a:latin typeface="Calibri"/>
-                        </a:rPr>
-                        <a:t>276326</a:t>
+                    <a:bodyPr/>
+                    <a:lstStyle/>
+                    <a:p>
+                      <a:pPr algn="l"/>
+                      <a:r>
+                        <a:rPr sz="1000" b="0">
+                          <a:solidFill>
+                            <a:srgbClr val="1D1B43"/>
+                          </a:solidFill>
+                          <a:latin typeface="Calibri"/>
+                        </a:rPr>
+                        <a:t>277529</a:t>
                       </a:r>
                     </a:p>
                   </a:txBody>
@@ -5492,7 +5492,7 @@
                 </a:tc>
                 <a:tc>
                   <a:txBody>
-                    <a:bodyPr wrap="square"/>
+                    <a:bodyPr/>
                     <a:lstStyle/>
                     <a:p>
                       <a:pPr algn="l"/>
@@ -5515,7 +5515,7 @@
                 </a:tc>
                 <a:tc>
                   <a:txBody>
-                    <a:bodyPr wrap="square"/>
+                    <a:bodyPr/>
                     <a:lstStyle/>
                     <a:p>
                       <a:pPr algn="l"/>
@@ -5538,18 +5538,18 @@
                 </a:tc>
                 <a:tc>
                   <a:txBody>
-                    <a:bodyPr wrap="square"/>
-                    <a:lstStyle/>
-                    <a:p>
-                      <a:pPr algn="l"/>
-                      <a:r>
-                        <a:rPr sz="1000" b="0">
-                          <a:solidFill>
-                            <a:srgbClr val="1D1B43"/>
-                          </a:solidFill>
-                          <a:latin typeface="Calibri"/>
-                        </a:rPr>
-                        <a:t>02/04/2026</a:t>
+                    <a:bodyPr/>
+                    <a:lstStyle/>
+                    <a:p>
+                      <a:pPr algn="l"/>
+                      <a:r>
+                        <a:rPr sz="1000" b="0">
+                          <a:solidFill>
+                            <a:srgbClr val="1D1B43"/>
+                          </a:solidFill>
+                          <a:latin typeface="Calibri"/>
+                        </a:rPr>
+                        <a:t>10/04/2026</a:t>
                       </a:r>
                     </a:p>
                   </a:txBody>
@@ -5561,7 +5561,7 @@
                 </a:tc>
                 <a:tc>
                   <a:txBody>
-                    <a:bodyPr wrap="square"/>
+                    <a:bodyPr/>
                     <a:lstStyle/>
                     <a:p>
                       <a:pPr algn="l"/>
@@ -5586,18 +5586,18 @@
               <a:tr h="384048">
                 <a:tc>
                   <a:txBody>
-                    <a:bodyPr wrap="square"/>
-                    <a:lstStyle/>
-                    <a:p>
-                      <a:pPr algn="l"/>
-                      <a:r>
-                        <a:rPr sz="1000" b="0">
-                          <a:solidFill>
-                            <a:srgbClr val="1D1B43"/>
-                          </a:solidFill>
-                          <a:latin typeface="Calibri"/>
-                        </a:rPr>
-                        <a:t>277529</a:t>
+                    <a:bodyPr/>
+                    <a:lstStyle/>
+                    <a:p>
+                      <a:pPr algn="l"/>
+                      <a:r>
+                        <a:rPr sz="1000" b="0">
+                          <a:solidFill>
+                            <a:srgbClr val="1D1B43"/>
+                          </a:solidFill>
+                          <a:latin typeface="Calibri"/>
+                        </a:rPr>
+                        <a:t>278711</a:t>
                       </a:r>
                     </a:p>
                   </a:txBody>
@@ -5609,18 +5609,18 @@
                 </a:tc>
                 <a:tc>
                   <a:txBody>
-                    <a:bodyPr wrap="square"/>
-                    <a:lstStyle/>
-                    <a:p>
-                      <a:pPr algn="l"/>
-                      <a:r>
-                        <a:rPr sz="1000" b="0">
-                          <a:solidFill>
-                            <a:srgbClr val="1D1B43"/>
-                          </a:solidFill>
-                          <a:latin typeface="Calibri"/>
-                        </a:rPr>
-                        <a:t>MINASFAST TECNOLOGIA - CONTAGEM / MG</a:t>
+                    <a:bodyPr/>
+                    <a:lstStyle/>
+                    <a:p>
+                      <a:pPr algn="l"/>
+                      <a:r>
+                        <a:rPr sz="1000" b="0">
+                          <a:solidFill>
+                            <a:srgbClr val="1D1B43"/>
+                          </a:solidFill>
+                          <a:latin typeface="Calibri"/>
+                        </a:rPr>
+                        <a:t>FIX IT ASSISTENCIA E - PORTO ALEGRE / RS</a:t>
                       </a:r>
                     </a:p>
                   </a:txBody>
@@ -5632,18 +5632,18 @@
                 </a:tc>
                 <a:tc>
                   <a:txBody>
-                    <a:bodyPr wrap="square"/>
-                    <a:lstStyle/>
-                    <a:p>
-                      <a:pPr algn="l"/>
-                      <a:r>
-                        <a:rPr sz="1000" b="0">
-                          <a:solidFill>
-                            <a:srgbClr val="1D1B43"/>
-                          </a:solidFill>
-                          <a:latin typeface="Calibri"/>
-                        </a:rPr>
-                        <a:t>CONTAGEM/MG</a:t>
+                    <a:bodyPr/>
+                    <a:lstStyle/>
+                    <a:p>
+                      <a:pPr algn="l"/>
+                      <a:r>
+                        <a:rPr sz="1000" b="0">
+                          <a:solidFill>
+                            <a:srgbClr val="1D1B43"/>
+                          </a:solidFill>
+                          <a:latin typeface="Calibri"/>
+                        </a:rPr>
+                        <a:t>PORTO ALEGRE/RS</a:t>
                       </a:r>
                     </a:p>
                   </a:txBody>
@@ -5655,18 +5655,18 @@
                 </a:tc>
                 <a:tc>
                   <a:txBody>
-                    <a:bodyPr wrap="square"/>
-                    <a:lstStyle/>
-                    <a:p>
-                      <a:pPr algn="l"/>
-                      <a:r>
-                        <a:rPr sz="1000" b="0">
-                          <a:solidFill>
-                            <a:srgbClr val="1D1B43"/>
-                          </a:solidFill>
-                          <a:latin typeface="Calibri"/>
-                        </a:rPr>
-                        <a:t>10/04/2026</a:t>
+                    <a:bodyPr/>
+                    <a:lstStyle/>
+                    <a:p>
+                      <a:pPr algn="l"/>
+                      <a:r>
+                        <a:rPr sz="1000" b="0">
+                          <a:solidFill>
+                            <a:srgbClr val="1D1B43"/>
+                          </a:solidFill>
+                          <a:latin typeface="Calibri"/>
+                        </a:rPr>
+                        <a:t>14/04/2026</a:t>
                       </a:r>
                     </a:p>
                   </a:txBody>
@@ -5678,7 +5678,7 @@
                 </a:tc>
                 <a:tc>
                   <a:txBody>
-                    <a:bodyPr wrap="square"/>
+                    <a:bodyPr/>
                     <a:lstStyle/>
                     <a:p>
                       <a:pPr algn="l"/>
@@ -5703,18 +5703,18 @@
               <a:tr h="384048">
                 <a:tc>
                   <a:txBody>
-                    <a:bodyPr wrap="square"/>
-                    <a:lstStyle/>
-                    <a:p>
-                      <a:pPr algn="l"/>
-                      <a:r>
-                        <a:rPr sz="1000" b="0">
-                          <a:solidFill>
-                            <a:srgbClr val="1D1B43"/>
-                          </a:solidFill>
-                          <a:latin typeface="Calibri"/>
-                        </a:rPr>
-                        <a:t>278711</a:t>
+                    <a:bodyPr/>
+                    <a:lstStyle/>
+                    <a:p>
+                      <a:pPr algn="l"/>
+                      <a:r>
+                        <a:rPr sz="1000" b="0">
+                          <a:solidFill>
+                            <a:srgbClr val="1D1B43"/>
+                          </a:solidFill>
+                          <a:latin typeface="Calibri"/>
+                        </a:rPr>
+                        <a:t>279835</a:t>
                       </a:r>
                     </a:p>
                   </a:txBody>
@@ -5726,18 +5726,18 @@
                 </a:tc>
                 <a:tc>
                   <a:txBody>
-                    <a:bodyPr wrap="square"/>
-                    <a:lstStyle/>
-                    <a:p>
-                      <a:pPr algn="l"/>
-                      <a:r>
-                        <a:rPr sz="1000" b="0">
-                          <a:solidFill>
-                            <a:srgbClr val="1D1B43"/>
-                          </a:solidFill>
-                          <a:latin typeface="Calibri"/>
-                        </a:rPr>
-                        <a:t>FIX IT ASSISTENCIA E - PORTO ALEGRE / RS</a:t>
+                    <a:bodyPr/>
+                    <a:lstStyle/>
+                    <a:p>
+                      <a:pPr algn="l"/>
+                      <a:r>
+                        <a:rPr sz="1000" b="0">
+                          <a:solidFill>
+                            <a:srgbClr val="1D1B43"/>
+                          </a:solidFill>
+                          <a:latin typeface="Calibri"/>
+                        </a:rPr>
+                        <a:t>ELETRORARO COM DE EL - BELO HORIZONTE / MG</a:t>
                       </a:r>
                     </a:p>
                   </a:txBody>
@@ -5749,18 +5749,18 @@
                 </a:tc>
                 <a:tc>
                   <a:txBody>
-                    <a:bodyPr wrap="square"/>
-                    <a:lstStyle/>
-                    <a:p>
-                      <a:pPr algn="l"/>
-                      <a:r>
-                        <a:rPr sz="1000" b="0">
-                          <a:solidFill>
-                            <a:srgbClr val="1D1B43"/>
-                          </a:solidFill>
-                          <a:latin typeface="Calibri"/>
-                        </a:rPr>
-                        <a:t>PORTO ALEGRE/RS</a:t>
+                    <a:bodyPr/>
+                    <a:lstStyle/>
+                    <a:p>
+                      <a:pPr algn="l"/>
+                      <a:r>
+                        <a:rPr sz="1000" b="0">
+                          <a:solidFill>
+                            <a:srgbClr val="1D1B43"/>
+                          </a:solidFill>
+                          <a:latin typeface="Calibri"/>
+                        </a:rPr>
+                        <a:t>BELO HORIZONTE/MG</a:t>
                       </a:r>
                     </a:p>
                   </a:txBody>
@@ -5772,18 +5772,18 @@
                 </a:tc>
                 <a:tc>
                   <a:txBody>
-                    <a:bodyPr wrap="square"/>
-                    <a:lstStyle/>
-                    <a:p>
-                      <a:pPr algn="l"/>
-                      <a:r>
-                        <a:rPr sz="1000" b="0">
-                          <a:solidFill>
-                            <a:srgbClr val="1D1B43"/>
-                          </a:solidFill>
-                          <a:latin typeface="Calibri"/>
-                        </a:rPr>
-                        <a:t>14/04/2026</a:t>
+                    <a:bodyPr/>
+                    <a:lstStyle/>
+                    <a:p>
+                      <a:pPr algn="l"/>
+                      <a:r>
+                        <a:rPr sz="1000" b="0">
+                          <a:solidFill>
+                            <a:srgbClr val="1D1B43"/>
+                          </a:solidFill>
+                          <a:latin typeface="Calibri"/>
+                        </a:rPr>
+                        <a:t>27/04/2026</a:t>
                       </a:r>
                     </a:p>
                   </a:txBody>
@@ -5795,7 +5795,7 @@
                 </a:tc>
                 <a:tc>
                   <a:txBody>
-                    <a:bodyPr wrap="square"/>
+                    <a:bodyPr/>
                     <a:lstStyle/>
                     <a:p>
                       <a:pPr algn="l"/>
@@ -5813,123 +5813,6 @@
                   <a:tcPr>
                     <a:solidFill>
                       <a:srgbClr val="FFFFFF"/>
-                    </a:solidFill>
-                  </a:tcPr>
-                </a:tc>
-              </a:tr>
-              <a:tr h="384048">
-                <a:tc>
-                  <a:txBody>
-                    <a:bodyPr wrap="square"/>
-                    <a:lstStyle/>
-                    <a:p>
-                      <a:pPr algn="l"/>
-                      <a:r>
-                        <a:rPr sz="1000" b="0">
-                          <a:solidFill>
-                            <a:srgbClr val="1D1B43"/>
-                          </a:solidFill>
-                          <a:latin typeface="Calibri"/>
-                        </a:rPr>
-                        <a:t>279835</a:t>
-                      </a:r>
-                    </a:p>
-                  </a:txBody>
-                  <a:tcPr>
-                    <a:solidFill>
-                      <a:srgbClr val="F2F2F2"/>
-                    </a:solidFill>
-                  </a:tcPr>
-                </a:tc>
-                <a:tc>
-                  <a:txBody>
-                    <a:bodyPr wrap="square"/>
-                    <a:lstStyle/>
-                    <a:p>
-                      <a:pPr algn="l"/>
-                      <a:r>
-                        <a:rPr sz="1000" b="0">
-                          <a:solidFill>
-                            <a:srgbClr val="1D1B43"/>
-                          </a:solidFill>
-                          <a:latin typeface="Calibri"/>
-                        </a:rPr>
-                        <a:t>ELETRORARO COM DE EL - BELO HORIZONTE / MG</a:t>
-                      </a:r>
-                    </a:p>
-                  </a:txBody>
-                  <a:tcPr>
-                    <a:solidFill>
-                      <a:srgbClr val="F2F2F2"/>
-                    </a:solidFill>
-                  </a:tcPr>
-                </a:tc>
-                <a:tc>
-                  <a:txBody>
-                    <a:bodyPr wrap="square"/>
-                    <a:lstStyle/>
-                    <a:p>
-                      <a:pPr algn="l"/>
-                      <a:r>
-                        <a:rPr sz="1000" b="0">
-                          <a:solidFill>
-                            <a:srgbClr val="1D1B43"/>
-                          </a:solidFill>
-                          <a:latin typeface="Calibri"/>
-                        </a:rPr>
-                        <a:t>BELO HORIZONTE/MG</a:t>
-                      </a:r>
-                    </a:p>
-                  </a:txBody>
-                  <a:tcPr>
-                    <a:solidFill>
-                      <a:srgbClr val="F2F2F2"/>
-                    </a:solidFill>
-                  </a:tcPr>
-                </a:tc>
-                <a:tc>
-                  <a:txBody>
-                    <a:bodyPr wrap="square"/>
-                    <a:lstStyle/>
-                    <a:p>
-                      <a:pPr algn="l"/>
-                      <a:r>
-                        <a:rPr sz="1000" b="0">
-                          <a:solidFill>
-                            <a:srgbClr val="1D1B43"/>
-                          </a:solidFill>
-                          <a:latin typeface="Calibri"/>
-                        </a:rPr>
-                        <a:t>27/04/2026</a:t>
-                      </a:r>
-                    </a:p>
-                  </a:txBody>
-                  <a:tcPr>
-                    <a:solidFill>
-                      <a:srgbClr val="F2F2F2"/>
-                    </a:solidFill>
-                  </a:tcPr>
-                </a:tc>
-                <a:tc>
-                  <a:txBody>
-                    <a:bodyPr wrap="square"/>
-                    <a:lstStyle/>
-                    <a:p>
-                      <a:pPr algn="l"/>
-                      <a:r>
-                        <a:rPr sz="1000" b="0">
-                          <a:solidFill>
-                            <a:srgbClr val="1D1B43"/>
-                          </a:solidFill>
-                          <a:latin typeface="Calibri"/>
-                        </a:rPr>
-                        <a:t>ENTREGUE FORA DO PRAZO</a:t>
-                      </a:r>
-                    </a:p>
-                  </a:txBody>
-                  <a:tcPr>
-                    <a:solidFill>
-                      <a:srgbClr val="F2F2F2"/>
                     </a:solidFill>
                   </a:tcPr>
                 </a:tc>
@@ -6095,7 +5978,7 @@
               <a:tr h="457200">
                 <a:tc>
                   <a:txBody>
-                    <a:bodyPr wrap="square"/>
+                    <a:bodyPr/>
                     <a:lstStyle/>
                     <a:p>
                       <a:pPr algn="ctr"/>
@@ -6118,7 +6001,7 @@
                 </a:tc>
                 <a:tc>
                   <a:txBody>
-                    <a:bodyPr wrap="square"/>
+                    <a:bodyPr/>
                     <a:lstStyle/>
                     <a:p>
                       <a:pPr algn="ctr"/>
@@ -6141,7 +6024,7 @@
                 </a:tc>
                 <a:tc>
                   <a:txBody>
-                    <a:bodyPr wrap="square"/>
+                    <a:bodyPr/>
                     <a:lstStyle/>
                     <a:p>
                       <a:pPr algn="ctr"/>
@@ -6164,7 +6047,7 @@
                 </a:tc>
                 <a:tc>
                   <a:txBody>
-                    <a:bodyPr wrap="square"/>
+                    <a:bodyPr/>
                     <a:lstStyle/>
                     <a:p>
                       <a:pPr algn="ctr"/>
@@ -6187,7 +6070,7 @@
                 </a:tc>
                 <a:tc>
                   <a:txBody>
-                    <a:bodyPr wrap="square"/>
+                    <a:bodyPr/>
                     <a:lstStyle/>
                     <a:p>
                       <a:pPr algn="ctr"/>
@@ -6210,7 +6093,7 @@
                 </a:tc>
                 <a:tc>
                   <a:txBody>
-                    <a:bodyPr wrap="square"/>
+                    <a:bodyPr/>
                     <a:lstStyle/>
                     <a:p>
                       <a:pPr algn="ctr"/>
@@ -6235,7 +6118,7 @@
               <a:tr h="457200">
                 <a:tc>
                   <a:txBody>
-                    <a:bodyPr wrap="square"/>
+                    <a:bodyPr/>
                     <a:lstStyle/>
                     <a:p>
                       <a:pPr algn="l"/>
@@ -6258,18 +6141,18 @@
                 </a:tc>
                 <a:tc>
                   <a:txBody>
-                    <a:bodyPr wrap="square"/>
-                    <a:lstStyle/>
-                    <a:p>
-                      <a:pPr algn="l"/>
-                      <a:r>
-                        <a:rPr sz="1000" b="0">
-                          <a:solidFill>
-                            <a:srgbClr val="1D1B43"/>
-                          </a:solidFill>
-                          <a:latin typeface="Calibri"/>
-                        </a:rPr>
-                        <a:t>16</a:t>
+                    <a:bodyPr/>
+                    <a:lstStyle/>
+                    <a:p>
+                      <a:pPr algn="l"/>
+                      <a:r>
+                        <a:rPr sz="1000" b="0">
+                          <a:solidFill>
+                            <a:srgbClr val="1D1B43"/>
+                          </a:solidFill>
+                          <a:latin typeface="Calibri"/>
+                        </a:rPr>
+                        <a:t>14</a:t>
                       </a:r>
                     </a:p>
                   </a:txBody>
@@ -6281,18 +6164,18 @@
                 </a:tc>
                 <a:tc>
                   <a:txBody>
-                    <a:bodyPr wrap="square"/>
-                    <a:lstStyle/>
-                    <a:p>
-                      <a:pPr algn="l"/>
-                      <a:r>
-                        <a:rPr sz="1000" b="0">
-                          <a:solidFill>
-                            <a:srgbClr val="1D1B43"/>
-                          </a:solidFill>
-                          <a:latin typeface="Calibri"/>
-                        </a:rPr>
-                        <a:t>13</a:t>
+                    <a:bodyPr/>
+                    <a:lstStyle/>
+                    <a:p>
+                      <a:pPr algn="l"/>
+                      <a:r>
+                        <a:rPr sz="1000" b="0">
+                          <a:solidFill>
+                            <a:srgbClr val="1D1B43"/>
+                          </a:solidFill>
+                          <a:latin typeface="Calibri"/>
+                        </a:rPr>
+                        <a:t>12</a:t>
                       </a:r>
                     </a:p>
                   </a:txBody>
@@ -6304,18 +6187,18 @@
                 </a:tc>
                 <a:tc>
                   <a:txBody>
-                    <a:bodyPr wrap="square"/>
-                    <a:lstStyle/>
-                    <a:p>
-                      <a:pPr algn="l"/>
-                      <a:r>
-                        <a:rPr sz="1000" b="0">
-                          <a:solidFill>
-                            <a:srgbClr val="1D1B43"/>
-                          </a:solidFill>
-                          <a:latin typeface="Calibri"/>
-                        </a:rPr>
-                        <a:t>3</a:t>
+                    <a:bodyPr/>
+                    <a:lstStyle/>
+                    <a:p>
+                      <a:pPr algn="l"/>
+                      <a:r>
+                        <a:rPr sz="1000" b="0">
+                          <a:solidFill>
+                            <a:srgbClr val="1D1B43"/>
+                          </a:solidFill>
+                          <a:latin typeface="Calibri"/>
+                        </a:rPr>
+                        <a:t>2</a:t>
                       </a:r>
                     </a:p>
                   </a:txBody>
@@ -6327,18 +6210,18 @@
                 </a:tc>
                 <a:tc>
                   <a:txBody>
-                    <a:bodyPr wrap="square"/>
-                    <a:lstStyle/>
-                    <a:p>
-                      <a:pPr algn="l"/>
-                      <a:r>
-                        <a:rPr sz="1000" b="0">
-                          <a:solidFill>
-                            <a:srgbClr val="1D1B43"/>
-                          </a:solidFill>
-                          <a:latin typeface="Calibri"/>
-                        </a:rPr>
-                        <a:t>81.2%</a:t>
+                    <a:bodyPr/>
+                    <a:lstStyle/>
+                    <a:p>
+                      <a:pPr algn="l"/>
+                      <a:r>
+                        <a:rPr sz="1000" b="0">
+                          <a:solidFill>
+                            <a:srgbClr val="1D1B43"/>
+                          </a:solidFill>
+                          <a:latin typeface="Calibri"/>
+                        </a:rPr>
+                        <a:t>85.7%</a:t>
                       </a:r>
                     </a:p>
                   </a:txBody>
@@ -6350,18 +6233,18 @@
                 </a:tc>
                 <a:tc>
                   <a:txBody>
-                    <a:bodyPr wrap="square"/>
-                    <a:lstStyle/>
-                    <a:p>
-                      <a:pPr algn="l"/>
-                      <a:r>
-                        <a:rPr sz="1000" b="0">
-                          <a:solidFill>
-                            <a:srgbClr val="1D1B43"/>
-                          </a:solidFill>
-                          <a:latin typeface="Calibri"/>
-                        </a:rPr>
-                        <a:t>Atencao</a:t>
+                    <a:bodyPr/>
+                    <a:lstStyle/>
+                    <a:p>
+                      <a:pPr algn="l"/>
+                      <a:r>
+                        <a:rPr sz="1000" b="0">
+                          <a:solidFill>
+                            <a:srgbClr val="1D1B43"/>
+                          </a:solidFill>
+                          <a:latin typeface="Calibri"/>
+                        </a:rPr>
+                        <a:t>Regular</a:t>
                       </a:r>
                     </a:p>
                   </a:txBody>
@@ -6375,7 +6258,7 @@
               <a:tr h="457200">
                 <a:tc>
                   <a:txBody>
-                    <a:bodyPr wrap="square"/>
+                    <a:bodyPr/>
                     <a:lstStyle/>
                     <a:p>
                       <a:pPr algn="l"/>
@@ -6398,7 +6281,7 @@
                 </a:tc>
                 <a:tc>
                   <a:txBody>
-                    <a:bodyPr wrap="square"/>
+                    <a:bodyPr/>
                     <a:lstStyle/>
                     <a:p>
                       <a:pPr algn="l"/>
@@ -6421,7 +6304,7 @@
                 </a:tc>
                 <a:tc>
                   <a:txBody>
-                    <a:bodyPr wrap="square"/>
+                    <a:bodyPr/>
                     <a:lstStyle/>
                     <a:p>
                       <a:pPr algn="l"/>
@@ -6444,7 +6327,7 @@
                 </a:tc>
                 <a:tc>
                   <a:txBody>
-                    <a:bodyPr wrap="square"/>
+                    <a:bodyPr/>
                     <a:lstStyle/>
                     <a:p>
                       <a:pPr algn="l"/>
@@ -6467,7 +6350,7 @@
                 </a:tc>
                 <a:tc>
                   <a:txBody>
-                    <a:bodyPr wrap="square"/>
+                    <a:bodyPr/>
                     <a:lstStyle/>
                     <a:p>
                       <a:pPr algn="l"/>
@@ -6490,7 +6373,7 @@
                 </a:tc>
                 <a:tc>
                   <a:txBody>
-                    <a:bodyPr wrap="square"/>
+                    <a:bodyPr/>
                     <a:lstStyle/>
                     <a:p>
                       <a:pPr algn="l"/>
@@ -6515,7 +6398,7 @@
               <a:tr h="457200">
                 <a:tc>
                   <a:txBody>
-                    <a:bodyPr wrap="square"/>
+                    <a:bodyPr/>
                     <a:lstStyle/>
                     <a:p>
                       <a:pPr algn="l"/>
@@ -6538,18 +6421,18 @@
                 </a:tc>
                 <a:tc>
                   <a:txBody>
-                    <a:bodyPr wrap="square"/>
-                    <a:lstStyle/>
-                    <a:p>
-                      <a:pPr algn="l"/>
-                      <a:r>
-                        <a:rPr sz="1000" b="0">
-                          <a:solidFill>
-                            <a:srgbClr val="1D1B43"/>
-                          </a:solidFill>
-                          <a:latin typeface="Calibri"/>
-                        </a:rPr>
-                        <a:t>8</a:t>
+                    <a:bodyPr/>
+                    <a:lstStyle/>
+                    <a:p>
+                      <a:pPr algn="l"/>
+                      <a:r>
+                        <a:rPr sz="1000" b="0">
+                          <a:solidFill>
+                            <a:srgbClr val="1D1B43"/>
+                          </a:solidFill>
+                          <a:latin typeface="Calibri"/>
+                        </a:rPr>
+                        <a:t>7</a:t>
                       </a:r>
                     </a:p>
                   </a:txBody>
@@ -6561,18 +6444,18 @@
                 </a:tc>
                 <a:tc>
                   <a:txBody>
-                    <a:bodyPr wrap="square"/>
-                    <a:lstStyle/>
-                    <a:p>
-                      <a:pPr algn="l"/>
-                      <a:r>
-                        <a:rPr sz="1000" b="0">
-                          <a:solidFill>
-                            <a:srgbClr val="1D1B43"/>
-                          </a:solidFill>
-                          <a:latin typeface="Calibri"/>
-                        </a:rPr>
-                        <a:t>8</a:t>
+                    <a:bodyPr/>
+                    <a:lstStyle/>
+                    <a:p>
+                      <a:pPr algn="l"/>
+                      <a:r>
+                        <a:rPr sz="1000" b="0">
+                          <a:solidFill>
+                            <a:srgbClr val="1D1B43"/>
+                          </a:solidFill>
+                          <a:latin typeface="Calibri"/>
+                        </a:rPr>
+                        <a:t>7</a:t>
                       </a:r>
                     </a:p>
                   </a:txBody>
@@ -6584,7 +6467,7 @@
                 </a:tc>
                 <a:tc>
                   <a:txBody>
-                    <a:bodyPr wrap="square"/>
+                    <a:bodyPr/>
                     <a:lstStyle/>
                     <a:p>
                       <a:pPr algn="l"/>
@@ -6607,7 +6490,7 @@
                 </a:tc>
                 <a:tc>
                   <a:txBody>
-                    <a:bodyPr wrap="square"/>
+                    <a:bodyPr/>
                     <a:lstStyle/>
                     <a:p>
                       <a:pPr algn="l"/>
@@ -6630,7 +6513,7 @@
                 </a:tc>
                 <a:tc>
                   <a:txBody>
-                    <a:bodyPr wrap="square"/>
+                    <a:bodyPr/>
                     <a:lstStyle/>
                     <a:p>
                       <a:pPr algn="l"/>
@@ -6655,18 +6538,18 @@
               <a:tr h="457200">
                 <a:tc>
                   <a:txBody>
-                    <a:bodyPr wrap="square"/>
-                    <a:lstStyle/>
-                    <a:p>
-                      <a:pPr algn="l"/>
-                      <a:r>
-                        <a:rPr sz="1000" b="0">
-                          <a:solidFill>
-                            <a:srgbClr val="1D1B43"/>
-                          </a:solidFill>
-                          <a:latin typeface="Calibri"/>
-                        </a:rPr>
-                        <a:t>SC</a:t>
+                    <a:bodyPr/>
+                    <a:lstStyle/>
+                    <a:p>
+                      <a:pPr algn="l"/>
+                      <a:r>
+                        <a:rPr sz="1000" b="0">
+                          <a:solidFill>
+                            <a:srgbClr val="1D1B43"/>
+                          </a:solidFill>
+                          <a:latin typeface="Calibri"/>
+                        </a:rPr>
+                        <a:t>RS</a:t>
                       </a:r>
                     </a:p>
                   </a:txBody>
@@ -6678,18 +6561,18 @@
                 </a:tc>
                 <a:tc>
                   <a:txBody>
-                    <a:bodyPr wrap="square"/>
-                    <a:lstStyle/>
-                    <a:p>
-                      <a:pPr algn="l"/>
-                      <a:r>
-                        <a:rPr sz="1000" b="0">
-                          <a:solidFill>
-                            <a:srgbClr val="1D1B43"/>
-                          </a:solidFill>
-                          <a:latin typeface="Calibri"/>
-                        </a:rPr>
-                        <a:t>6</a:t>
+                    <a:bodyPr/>
+                    <a:lstStyle/>
+                    <a:p>
+                      <a:pPr algn="l"/>
+                      <a:r>
+                        <a:rPr sz="1000" b="0">
+                          <a:solidFill>
+                            <a:srgbClr val="1D1B43"/>
+                          </a:solidFill>
+                          <a:latin typeface="Calibri"/>
+                        </a:rPr>
+                        <a:t>5</a:t>
                       </a:r>
                     </a:p>
                   </a:txBody>
@@ -6701,18 +6584,18 @@
                 </a:tc>
                 <a:tc>
                   <a:txBody>
-                    <a:bodyPr wrap="square"/>
-                    <a:lstStyle/>
-                    <a:p>
-                      <a:pPr algn="l"/>
-                      <a:r>
-                        <a:rPr sz="1000" b="0">
-                          <a:solidFill>
-                            <a:srgbClr val="1D1B43"/>
-                          </a:solidFill>
-                          <a:latin typeface="Calibri"/>
-                        </a:rPr>
-                        <a:t>6</a:t>
+                    <a:bodyPr/>
+                    <a:lstStyle/>
+                    <a:p>
+                      <a:pPr algn="l"/>
+                      <a:r>
+                        <a:rPr sz="1000" b="0">
+                          <a:solidFill>
+                            <a:srgbClr val="1D1B43"/>
+                          </a:solidFill>
+                          <a:latin typeface="Calibri"/>
+                        </a:rPr>
+                        <a:t>4</a:t>
                       </a:r>
                     </a:p>
                   </a:txBody>
@@ -6724,18 +6607,18 @@
                 </a:tc>
                 <a:tc>
                   <a:txBody>
-                    <a:bodyPr wrap="square"/>
-                    <a:lstStyle/>
-                    <a:p>
-                      <a:pPr algn="l"/>
-                      <a:r>
-                        <a:rPr sz="1000" b="0">
-                          <a:solidFill>
-                            <a:srgbClr val="1D1B43"/>
-                          </a:solidFill>
-                          <a:latin typeface="Calibri"/>
-                        </a:rPr>
-                        <a:t>0</a:t>
+                    <a:bodyPr/>
+                    <a:lstStyle/>
+                    <a:p>
+                      <a:pPr algn="l"/>
+                      <a:r>
+                        <a:rPr sz="1000" b="0">
+                          <a:solidFill>
+                            <a:srgbClr val="1D1B43"/>
+                          </a:solidFill>
+                          <a:latin typeface="Calibri"/>
+                        </a:rPr>
+                        <a:t>1</a:t>
                       </a:r>
                     </a:p>
                   </a:txBody>
@@ -6747,18 +6630,18 @@
                 </a:tc>
                 <a:tc>
                   <a:txBody>
-                    <a:bodyPr wrap="square"/>
-                    <a:lstStyle/>
-                    <a:p>
-                      <a:pPr algn="l"/>
-                      <a:r>
-                        <a:rPr sz="1000" b="0">
-                          <a:solidFill>
-                            <a:srgbClr val="1D1B43"/>
-                          </a:solidFill>
-                          <a:latin typeface="Calibri"/>
-                        </a:rPr>
-                        <a:t>100.0%</a:t>
+                    <a:bodyPr/>
+                    <a:lstStyle/>
+                    <a:p>
+                      <a:pPr algn="l"/>
+                      <a:r>
+                        <a:rPr sz="1000" b="0">
+                          <a:solidFill>
+                            <a:srgbClr val="1D1B43"/>
+                          </a:solidFill>
+                          <a:latin typeface="Calibri"/>
+                        </a:rPr>
+                        <a:t>80.0%</a:t>
                       </a:r>
                     </a:p>
                   </a:txBody>
@@ -6770,18 +6653,18 @@
                 </a:tc>
                 <a:tc>
                   <a:txBody>
-                    <a:bodyPr wrap="square"/>
-                    <a:lstStyle/>
-                    <a:p>
-                      <a:pPr algn="l"/>
-                      <a:r>
-                        <a:rPr sz="1000" b="0">
-                          <a:solidFill>
-                            <a:srgbClr val="1D1B43"/>
-                          </a:solidFill>
-                          <a:latin typeface="Calibri"/>
-                        </a:rPr>
-                        <a:t>Excelente</a:t>
+                    <a:bodyPr/>
+                    <a:lstStyle/>
+                    <a:p>
+                      <a:pPr algn="l"/>
+                      <a:r>
+                        <a:rPr sz="1000" b="0">
+                          <a:solidFill>
+                            <a:srgbClr val="1D1B43"/>
+                          </a:solidFill>
+                          <a:latin typeface="Calibri"/>
+                        </a:rPr>
+                        <a:t>Atencao</a:t>
                       </a:r>
                     </a:p>
                   </a:txBody>
@@ -6795,18 +6678,18 @@
               <a:tr h="457200">
                 <a:tc>
                   <a:txBody>
-                    <a:bodyPr wrap="square"/>
-                    <a:lstStyle/>
-                    <a:p>
-                      <a:pPr algn="l"/>
-                      <a:r>
-                        <a:rPr sz="1000" b="0">
-                          <a:solidFill>
-                            <a:srgbClr val="1D1B43"/>
-                          </a:solidFill>
-                          <a:latin typeface="Calibri"/>
-                        </a:rPr>
-                        <a:t>RS</a:t>
+                    <a:bodyPr/>
+                    <a:lstStyle/>
+                    <a:p>
+                      <a:pPr algn="l"/>
+                      <a:r>
+                        <a:rPr sz="1000" b="0">
+                          <a:solidFill>
+                            <a:srgbClr val="1D1B43"/>
+                          </a:solidFill>
+                          <a:latin typeface="Calibri"/>
+                        </a:rPr>
+                        <a:t>SC</a:t>
                       </a:r>
                     </a:p>
                   </a:txBody>
@@ -6818,7 +6701,7 @@
                 </a:tc>
                 <a:tc>
                   <a:txBody>
-                    <a:bodyPr wrap="square"/>
+                    <a:bodyPr/>
                     <a:lstStyle/>
                     <a:p>
                       <a:pPr algn="l"/>
@@ -6841,18 +6724,18 @@
                 </a:tc>
                 <a:tc>
                   <a:txBody>
-                    <a:bodyPr wrap="square"/>
-                    <a:lstStyle/>
-                    <a:p>
-                      <a:pPr algn="l"/>
-                      <a:r>
-                        <a:rPr sz="1000" b="0">
-                          <a:solidFill>
-                            <a:srgbClr val="1D1B43"/>
-                          </a:solidFill>
-                          <a:latin typeface="Calibri"/>
-                        </a:rPr>
-                        <a:t>4</a:t>
+                    <a:bodyPr/>
+                    <a:lstStyle/>
+                    <a:p>
+                      <a:pPr algn="l"/>
+                      <a:r>
+                        <a:rPr sz="1000" b="0">
+                          <a:solidFill>
+                            <a:srgbClr val="1D1B43"/>
+                          </a:solidFill>
+                          <a:latin typeface="Calibri"/>
+                        </a:rPr>
+                        <a:t>5</a:t>
                       </a:r>
                     </a:p>
                   </a:txBody>
@@ -6864,18 +6747,18 @@
                 </a:tc>
                 <a:tc>
                   <a:txBody>
-                    <a:bodyPr wrap="square"/>
-                    <a:lstStyle/>
-                    <a:p>
-                      <a:pPr algn="l"/>
-                      <a:r>
-                        <a:rPr sz="1000" b="0">
-                          <a:solidFill>
-                            <a:srgbClr val="1D1B43"/>
-                          </a:solidFill>
-                          <a:latin typeface="Calibri"/>
-                        </a:rPr>
-                        <a:t>1</a:t>
+                    <a:bodyPr/>
+                    <a:lstStyle/>
+                    <a:p>
+                      <a:pPr algn="l"/>
+                      <a:r>
+                        <a:rPr sz="1000" b="0">
+                          <a:solidFill>
+                            <a:srgbClr val="1D1B43"/>
+                          </a:solidFill>
+                          <a:latin typeface="Calibri"/>
+                        </a:rPr>
+                        <a:t>0</a:t>
                       </a:r>
                     </a:p>
                   </a:txBody>
@@ -6887,18 +6770,18 @@
                 </a:tc>
                 <a:tc>
                   <a:txBody>
-                    <a:bodyPr wrap="square"/>
-                    <a:lstStyle/>
-                    <a:p>
-                      <a:pPr algn="l"/>
-                      <a:r>
-                        <a:rPr sz="1000" b="0">
-                          <a:solidFill>
-                            <a:srgbClr val="1D1B43"/>
-                          </a:solidFill>
-                          <a:latin typeface="Calibri"/>
-                        </a:rPr>
-                        <a:t>80.0%</a:t>
+                    <a:bodyPr/>
+                    <a:lstStyle/>
+                    <a:p>
+                      <a:pPr algn="l"/>
+                      <a:r>
+                        <a:rPr sz="1000" b="0">
+                          <a:solidFill>
+                            <a:srgbClr val="1D1B43"/>
+                          </a:solidFill>
+                          <a:latin typeface="Calibri"/>
+                        </a:rPr>
+                        <a:t>100.0%</a:t>
                       </a:r>
                     </a:p>
                   </a:txBody>
@@ -6910,18 +6793,18 @@
                 </a:tc>
                 <a:tc>
                   <a:txBody>
-                    <a:bodyPr wrap="square"/>
-                    <a:lstStyle/>
-                    <a:p>
-                      <a:pPr algn="l"/>
-                      <a:r>
-                        <a:rPr sz="1000" b="0">
-                          <a:solidFill>
-                            <a:srgbClr val="1D1B43"/>
-                          </a:solidFill>
-                          <a:latin typeface="Calibri"/>
-                        </a:rPr>
-                        <a:t>Atencao</a:t>
+                    <a:bodyPr/>
+                    <a:lstStyle/>
+                    <a:p>
+                      <a:pPr algn="l"/>
+                      <a:r>
+                        <a:rPr sz="1000" b="0">
+                          <a:solidFill>
+                            <a:srgbClr val="1D1B43"/>
+                          </a:solidFill>
+                          <a:latin typeface="Calibri"/>
+                        </a:rPr>
+                        <a:t>Excelente</a:t>
                       </a:r>
                     </a:p>
                   </a:txBody>
@@ -6935,7 +6818,7 @@
               <a:tr h="457200">
                 <a:tc>
                   <a:txBody>
-                    <a:bodyPr wrap="square"/>
+                    <a:bodyPr/>
                     <a:lstStyle/>
                     <a:p>
                       <a:pPr algn="l"/>
@@ -6958,7 +6841,7 @@
                 </a:tc>
                 <a:tc>
                   <a:txBody>
-                    <a:bodyPr wrap="square"/>
+                    <a:bodyPr/>
                     <a:lstStyle/>
                     <a:p>
                       <a:pPr algn="l"/>
@@ -6981,7 +6864,7 @@
                 </a:tc>
                 <a:tc>
                   <a:txBody>
-                    <a:bodyPr wrap="square"/>
+                    <a:bodyPr/>
                     <a:lstStyle/>
                     <a:p>
                       <a:pPr algn="l"/>
@@ -7004,7 +6887,7 @@
                 </a:tc>
                 <a:tc>
                   <a:txBody>
-                    <a:bodyPr wrap="square"/>
+                    <a:bodyPr/>
                     <a:lstStyle/>
                     <a:p>
                       <a:pPr algn="l"/>
@@ -7027,7 +6910,7 @@
                 </a:tc>
                 <a:tc>
                   <a:txBody>
-                    <a:bodyPr wrap="square"/>
+                    <a:bodyPr/>
                     <a:lstStyle/>
                     <a:p>
                       <a:pPr algn="l"/>
@@ -7050,7 +6933,7 @@
                 </a:tc>
                 <a:tc>
                   <a:txBody>
-                    <a:bodyPr wrap="square"/>
+                    <a:bodyPr/>
                     <a:lstStyle/>
                     <a:p>
                       <a:pPr algn="l"/>
@@ -7234,7 +7117,7 @@
               <a:tr h="292608">
                 <a:tc>
                   <a:txBody>
-                    <a:bodyPr wrap="square"/>
+                    <a:bodyPr/>
                     <a:lstStyle/>
                     <a:p>
                       <a:pPr algn="ctr"/>
@@ -7257,7 +7140,7 @@
                 </a:tc>
                 <a:tc>
                   <a:txBody>
-                    <a:bodyPr wrap="square"/>
+                    <a:bodyPr/>
                     <a:lstStyle/>
                     <a:p>
                       <a:pPr algn="ctr"/>
@@ -7280,7 +7163,7 @@
                 </a:tc>
                 <a:tc>
                   <a:txBody>
-                    <a:bodyPr wrap="square"/>
+                    <a:bodyPr/>
                     <a:lstStyle/>
                     <a:p>
                       <a:pPr algn="ctr"/>
@@ -7303,7 +7186,7 @@
                 </a:tc>
                 <a:tc>
                   <a:txBody>
-                    <a:bodyPr wrap="square"/>
+                    <a:bodyPr/>
                     <a:lstStyle/>
                     <a:p>
                       <a:pPr algn="ctr"/>
@@ -7326,7 +7209,7 @@
                 </a:tc>
                 <a:tc>
                   <a:txBody>
-                    <a:bodyPr wrap="square"/>
+                    <a:bodyPr/>
                     <a:lstStyle/>
                     <a:p>
                       <a:pPr algn="ctr"/>
@@ -7349,7 +7232,7 @@
                 </a:tc>
                 <a:tc>
                   <a:txBody>
-                    <a:bodyPr wrap="square"/>
+                    <a:bodyPr/>
                     <a:lstStyle/>
                     <a:p>
                       <a:pPr algn="ctr"/>
@@ -7372,7 +7255,7 @@
                 </a:tc>
                 <a:tc>
                   <a:txBody>
-                    <a:bodyPr wrap="square"/>
+                    <a:bodyPr/>
                     <a:lstStyle/>
                     <a:p>
                       <a:pPr algn="ctr"/>
@@ -7397,7 +7280,7 @@
               <a:tr h="292608">
                 <a:tc>
                   <a:txBody>
-                    <a:bodyPr wrap="square"/>
+                    <a:bodyPr/>
                     <a:lstStyle/>
                     <a:p>
                       <a:pPr algn="l"/>
@@ -7420,18 +7303,18 @@
                 </a:tc>
                 <a:tc>
                   <a:txBody>
-                    <a:bodyPr wrap="square"/>
-                    <a:lstStyle/>
-                    <a:p>
-                      <a:pPr algn="l"/>
-                      <a:r>
-                        <a:rPr sz="1000" b="0">
-                          <a:solidFill>
-                            <a:srgbClr val="1D1B43"/>
-                          </a:solidFill>
-                          <a:latin typeface="Calibri"/>
-                        </a:rPr>
-                        <a:t>MINASFAST TECNOLOGIA - CONTAGEM / MG</a:t>
+                    <a:bodyPr/>
+                    <a:lstStyle/>
+                    <a:p>
+                      <a:pPr algn="l"/>
+                      <a:r>
+                        <a:rPr sz="1000" b="0">
+                          <a:solidFill>
+                            <a:srgbClr val="1D1B43"/>
+                          </a:solidFill>
+                          <a:latin typeface="Calibri"/>
+                        </a:rPr>
+                        <a:t>BEM ESTAR LONDRINA L - LONDRINA / PR</a:t>
                       </a:r>
                     </a:p>
                   </a:txBody>
@@ -7443,18 +7326,18 @@
                 </a:tc>
                 <a:tc>
                   <a:txBody>
-                    <a:bodyPr wrap="square"/>
-                    <a:lstStyle/>
-                    <a:p>
-                      <a:pPr algn="l"/>
-                      <a:r>
-                        <a:rPr sz="1000" b="0">
-                          <a:solidFill>
-                            <a:srgbClr val="1D1B43"/>
-                          </a:solidFill>
-                          <a:latin typeface="Calibri"/>
-                        </a:rPr>
-                        <a:t>6</a:t>
+                    <a:bodyPr/>
+                    <a:lstStyle/>
+                    <a:p>
+                      <a:pPr algn="l"/>
+                      <a:r>
+                        <a:rPr sz="1000" b="0">
+                          <a:solidFill>
+                            <a:srgbClr val="1D1B43"/>
+                          </a:solidFill>
+                          <a:latin typeface="Calibri"/>
+                        </a:rPr>
+                        <a:t>5</a:t>
                       </a:r>
                     </a:p>
                   </a:txBody>
@@ -7466,18 +7349,18 @@
                 </a:tc>
                 <a:tc>
                   <a:txBody>
-                    <a:bodyPr wrap="square"/>
-                    <a:lstStyle/>
-                    <a:p>
-                      <a:pPr algn="l"/>
-                      <a:r>
-                        <a:rPr sz="1000" b="0">
-                          <a:solidFill>
-                            <a:srgbClr val="1D1B43"/>
-                          </a:solidFill>
-                          <a:latin typeface="Calibri"/>
-                        </a:rPr>
-                        <a:t>4</a:t>
+                    <a:bodyPr/>
+                    <a:lstStyle/>
+                    <a:p>
+                      <a:pPr algn="l"/>
+                      <a:r>
+                        <a:rPr sz="1000" b="0">
+                          <a:solidFill>
+                            <a:srgbClr val="1D1B43"/>
+                          </a:solidFill>
+                          <a:latin typeface="Calibri"/>
+                        </a:rPr>
+                        <a:t>5</a:t>
                       </a:r>
                     </a:p>
                   </a:txBody>
@@ -7489,18 +7372,18 @@
                 </a:tc>
                 <a:tc>
                   <a:txBody>
-                    <a:bodyPr wrap="square"/>
-                    <a:lstStyle/>
-                    <a:p>
-                      <a:pPr algn="l"/>
-                      <a:r>
-                        <a:rPr sz="1000" b="0">
-                          <a:solidFill>
-                            <a:srgbClr val="1D1B43"/>
-                          </a:solidFill>
-                          <a:latin typeface="Calibri"/>
-                        </a:rPr>
-                        <a:t>2</a:t>
+                    <a:bodyPr/>
+                    <a:lstStyle/>
+                    <a:p>
+                      <a:pPr algn="l"/>
+                      <a:r>
+                        <a:rPr sz="1000" b="0">
+                          <a:solidFill>
+                            <a:srgbClr val="1D1B43"/>
+                          </a:solidFill>
+                          <a:latin typeface="Calibri"/>
+                        </a:rPr>
+                        <a:t>0</a:t>
                       </a:r>
                     </a:p>
                   </a:txBody>
@@ -7512,18 +7395,18 @@
                 </a:tc>
                 <a:tc>
                   <a:txBody>
-                    <a:bodyPr wrap="square"/>
-                    <a:lstStyle/>
-                    <a:p>
-                      <a:pPr algn="l"/>
-                      <a:r>
-                        <a:rPr sz="1000" b="0">
-                          <a:solidFill>
-                            <a:srgbClr val="1D1B43"/>
-                          </a:solidFill>
-                          <a:latin typeface="Calibri"/>
-                        </a:rPr>
-                        <a:t>66.7%</a:t>
+                    <a:bodyPr/>
+                    <a:lstStyle/>
+                    <a:p>
+                      <a:pPr algn="l"/>
+                      <a:r>
+                        <a:rPr sz="1000" b="0">
+                          <a:solidFill>
+                            <a:srgbClr val="1D1B43"/>
+                          </a:solidFill>
+                          <a:latin typeface="Calibri"/>
+                        </a:rPr>
+                        <a:t>100.0%</a:t>
                       </a:r>
                     </a:p>
                   </a:txBody>
@@ -7535,18 +7418,18 @@
                 </a:tc>
                 <a:tc>
                   <a:txBody>
-                    <a:bodyPr wrap="square"/>
-                    <a:lstStyle/>
-                    <a:p>
-                      <a:pPr algn="l"/>
-                      <a:r>
-                        <a:rPr sz="1000" b="0">
-                          <a:solidFill>
-                            <a:srgbClr val="1D1B43"/>
-                          </a:solidFill>
-                          <a:latin typeface="Calibri"/>
-                        </a:rPr>
-                        <a:t>Atencao</a:t>
+                    <a:bodyPr/>
+                    <a:lstStyle/>
+                    <a:p>
+                      <a:pPr algn="l"/>
+                      <a:r>
+                        <a:rPr sz="1000" b="0">
+                          <a:solidFill>
+                            <a:srgbClr val="1D1B43"/>
+                          </a:solidFill>
+                          <a:latin typeface="Calibri"/>
+                        </a:rPr>
+                        <a:t>Excelente</a:t>
                       </a:r>
                     </a:p>
                   </a:txBody>
@@ -7560,7 +7443,7 @@
               <a:tr h="292608">
                 <a:tc>
                   <a:txBody>
-                    <a:bodyPr wrap="square"/>
+                    <a:bodyPr/>
                     <a:lstStyle/>
                     <a:p>
                       <a:pPr algn="l"/>
@@ -7583,18 +7466,18 @@
                 </a:tc>
                 <a:tc>
                   <a:txBody>
-                    <a:bodyPr wrap="square"/>
-                    <a:lstStyle/>
-                    <a:p>
-                      <a:pPr algn="l"/>
-                      <a:r>
-                        <a:rPr sz="1000" b="0">
-                          <a:solidFill>
-                            <a:srgbClr val="1D1B43"/>
-                          </a:solidFill>
-                          <a:latin typeface="Calibri"/>
-                        </a:rPr>
-                        <a:t>BEM ESTAR LONDRINA L - LONDRINA / PR</a:t>
+                    <a:bodyPr/>
+                    <a:lstStyle/>
+                    <a:p>
+                      <a:pPr algn="l"/>
+                      <a:r>
+                        <a:rPr sz="1000" b="0">
+                          <a:solidFill>
+                            <a:srgbClr val="1D1B43"/>
+                          </a:solidFill>
+                          <a:latin typeface="Calibri"/>
+                        </a:rPr>
+                        <a:t>MINASFAST TECNOLOGIA - CONTAGEM / MG</a:t>
                       </a:r>
                     </a:p>
                   </a:txBody>
@@ -7606,7 +7489,7 @@
                 </a:tc>
                 <a:tc>
                   <a:txBody>
-                    <a:bodyPr wrap="square"/>
+                    <a:bodyPr/>
                     <a:lstStyle/>
                     <a:p>
                       <a:pPr algn="l"/>
@@ -7629,18 +7512,18 @@
                 </a:tc>
                 <a:tc>
                   <a:txBody>
-                    <a:bodyPr wrap="square"/>
-                    <a:lstStyle/>
-                    <a:p>
-                      <a:pPr algn="l"/>
-                      <a:r>
-                        <a:rPr sz="1000" b="0">
-                          <a:solidFill>
-                            <a:srgbClr val="1D1B43"/>
-                          </a:solidFill>
-                          <a:latin typeface="Calibri"/>
-                        </a:rPr>
-                        <a:t>5</a:t>
+                    <a:bodyPr/>
+                    <a:lstStyle/>
+                    <a:p>
+                      <a:pPr algn="l"/>
+                      <a:r>
+                        <a:rPr sz="1000" b="0">
+                          <a:solidFill>
+                            <a:srgbClr val="1D1B43"/>
+                          </a:solidFill>
+                          <a:latin typeface="Calibri"/>
+                        </a:rPr>
+                        <a:t>4</a:t>
                       </a:r>
                     </a:p>
                   </a:txBody>
@@ -7652,18 +7535,18 @@
                 </a:tc>
                 <a:tc>
                   <a:txBody>
-                    <a:bodyPr wrap="square"/>
-                    <a:lstStyle/>
-                    <a:p>
-                      <a:pPr algn="l"/>
-                      <a:r>
-                        <a:rPr sz="1000" b="0">
-                          <a:solidFill>
-                            <a:srgbClr val="1D1B43"/>
-                          </a:solidFill>
-                          <a:latin typeface="Calibri"/>
-                        </a:rPr>
-                        <a:t>0</a:t>
+                    <a:bodyPr/>
+                    <a:lstStyle/>
+                    <a:p>
+                      <a:pPr algn="l"/>
+                      <a:r>
+                        <a:rPr sz="1000" b="0">
+                          <a:solidFill>
+                            <a:srgbClr val="1D1B43"/>
+                          </a:solidFill>
+                          <a:latin typeface="Calibri"/>
+                        </a:rPr>
+                        <a:t>1</a:t>
                       </a:r>
                     </a:p>
                   </a:txBody>
@@ -7675,18 +7558,18 @@
                 </a:tc>
                 <a:tc>
                   <a:txBody>
-                    <a:bodyPr wrap="square"/>
-                    <a:lstStyle/>
-                    <a:p>
-                      <a:pPr algn="l"/>
-                      <a:r>
-                        <a:rPr sz="1000" b="0">
-                          <a:solidFill>
-                            <a:srgbClr val="1D1B43"/>
-                          </a:solidFill>
-                          <a:latin typeface="Calibri"/>
-                        </a:rPr>
-                        <a:t>100.0%</a:t>
+                    <a:bodyPr/>
+                    <a:lstStyle/>
+                    <a:p>
+                      <a:pPr algn="l"/>
+                      <a:r>
+                        <a:rPr sz="1000" b="0">
+                          <a:solidFill>
+                            <a:srgbClr val="1D1B43"/>
+                          </a:solidFill>
+                          <a:latin typeface="Calibri"/>
+                        </a:rPr>
+                        <a:t>80.0%</a:t>
                       </a:r>
                     </a:p>
                   </a:txBody>
@@ -7698,18 +7581,18 @@
                 </a:tc>
                 <a:tc>
                   <a:txBody>
-                    <a:bodyPr wrap="square"/>
-                    <a:lstStyle/>
-                    <a:p>
-                      <a:pPr algn="l"/>
-                      <a:r>
-                        <a:rPr sz="1000" b="0">
-                          <a:solidFill>
-                            <a:srgbClr val="1D1B43"/>
-                          </a:solidFill>
-                          <a:latin typeface="Calibri"/>
-                        </a:rPr>
-                        <a:t>Excelente</a:t>
+                    <a:bodyPr/>
+                    <a:lstStyle/>
+                    <a:p>
+                      <a:pPr algn="l"/>
+                      <a:r>
+                        <a:rPr sz="1000" b="0">
+                          <a:solidFill>
+                            <a:srgbClr val="1D1B43"/>
+                          </a:solidFill>
+                          <a:latin typeface="Calibri"/>
+                        </a:rPr>
+                        <a:t>Atencao</a:t>
                       </a:r>
                     </a:p>
                   </a:txBody>
@@ -7723,7 +7606,7 @@
               <a:tr h="292608">
                 <a:tc>
                   <a:txBody>
-                    <a:bodyPr wrap="square"/>
+                    <a:bodyPr/>
                     <a:lstStyle/>
                     <a:p>
                       <a:pPr algn="l"/>
@@ -7746,18 +7629,18 @@
                 </a:tc>
                 <a:tc>
                   <a:txBody>
-                    <a:bodyPr wrap="square"/>
-                    <a:lstStyle/>
-                    <a:p>
-                      <a:pPr algn="l"/>
-                      <a:r>
-                        <a:rPr sz="1000" b="0">
-                          <a:solidFill>
-                            <a:srgbClr val="1D1B43"/>
-                          </a:solidFill>
-                          <a:latin typeface="Calibri"/>
-                        </a:rPr>
-                        <a:t>GMX TECNOLOGIA E SER - RIO DE JANEIRO / RJ</a:t>
+                    <a:bodyPr/>
+                    <a:lstStyle/>
+                    <a:p>
+                      <a:pPr algn="l"/>
+                      <a:r>
+                        <a:rPr sz="1000" b="0">
+                          <a:solidFill>
+                            <a:srgbClr val="1D1B43"/>
+                          </a:solidFill>
+                          <a:latin typeface="Calibri"/>
+                        </a:rPr>
+                        <a:t>VIP REPAIR CENTER AS - CURITIBA / PR</a:t>
                       </a:r>
                     </a:p>
                   </a:txBody>
@@ -7769,18 +7652,18 @@
                 </a:tc>
                 <a:tc>
                   <a:txBody>
-                    <a:bodyPr wrap="square"/>
-                    <a:lstStyle/>
-                    <a:p>
-                      <a:pPr algn="l"/>
-                      <a:r>
-                        <a:rPr sz="1000" b="0">
-                          <a:solidFill>
-                            <a:srgbClr val="1D1B43"/>
-                          </a:solidFill>
-                          <a:latin typeface="Calibri"/>
-                        </a:rPr>
-                        <a:t>5</a:t>
+                    <a:bodyPr/>
+                    <a:lstStyle/>
+                    <a:p>
+                      <a:pPr algn="l"/>
+                      <a:r>
+                        <a:rPr sz="1000" b="0">
+                          <a:solidFill>
+                            <a:srgbClr val="1D1B43"/>
+                          </a:solidFill>
+                          <a:latin typeface="Calibri"/>
+                        </a:rPr>
+                        <a:t>4</a:t>
                       </a:r>
                     </a:p>
                   </a:txBody>
@@ -7792,18 +7675,18 @@
                 </a:tc>
                 <a:tc>
                   <a:txBody>
-                    <a:bodyPr wrap="square"/>
-                    <a:lstStyle/>
-                    <a:p>
-                      <a:pPr algn="l"/>
-                      <a:r>
-                        <a:rPr sz="1000" b="0">
-                          <a:solidFill>
-                            <a:srgbClr val="1D1B43"/>
-                          </a:solidFill>
-                          <a:latin typeface="Calibri"/>
-                        </a:rPr>
-                        <a:t>5</a:t>
+                    <a:bodyPr/>
+                    <a:lstStyle/>
+                    <a:p>
+                      <a:pPr algn="l"/>
+                      <a:r>
+                        <a:rPr sz="1000" b="0">
+                          <a:solidFill>
+                            <a:srgbClr val="1D1B43"/>
+                          </a:solidFill>
+                          <a:latin typeface="Calibri"/>
+                        </a:rPr>
+                        <a:t>4</a:t>
                       </a:r>
                     </a:p>
                   </a:txBody>
@@ -7815,7 +7698,7 @@
                 </a:tc>
                 <a:tc>
                   <a:txBody>
-                    <a:bodyPr wrap="square"/>
+                    <a:bodyPr/>
                     <a:lstStyle/>
                     <a:p>
                       <a:pPr algn="l"/>
@@ -7838,7 +7721,7 @@
                 </a:tc>
                 <a:tc>
                   <a:txBody>
-                    <a:bodyPr wrap="square"/>
+                    <a:bodyPr/>
                     <a:lstStyle/>
                     <a:p>
                       <a:pPr algn="l"/>
@@ -7861,7 +7744,7 @@
                 </a:tc>
                 <a:tc>
                   <a:txBody>
-                    <a:bodyPr wrap="square"/>
+                    <a:bodyPr/>
                     <a:lstStyle/>
                     <a:p>
                       <a:pPr algn="l"/>
@@ -7886,7 +7769,7 @@
               <a:tr h="292608">
                 <a:tc>
                   <a:txBody>
-                    <a:bodyPr wrap="square"/>
+                    <a:bodyPr/>
                     <a:lstStyle/>
                     <a:p>
                       <a:pPr algn="l"/>
@@ -7909,18 +7792,18 @@
                 </a:tc>
                 <a:tc>
                   <a:txBody>
-                    <a:bodyPr wrap="square"/>
-                    <a:lstStyle/>
-                    <a:p>
-                      <a:pPr algn="l"/>
-                      <a:r>
-                        <a:rPr sz="1000" b="0">
-                          <a:solidFill>
-                            <a:srgbClr val="1D1B43"/>
-                          </a:solidFill>
-                          <a:latin typeface="Calibri"/>
-                        </a:rPr>
-                        <a:t>KNOLL REPARACAO E MA - FLORIANOPOLIS / SC</a:t>
+                    <a:bodyPr/>
+                    <a:lstStyle/>
+                    <a:p>
+                      <a:pPr algn="l"/>
+                      <a:r>
+                        <a:rPr sz="1000" b="0">
+                          <a:solidFill>
+                            <a:srgbClr val="1D1B43"/>
+                          </a:solidFill>
+                          <a:latin typeface="Calibri"/>
+                        </a:rPr>
+                        <a:t>EXCELLENCE ELETRODOM - ARAPONGAS / PR</a:t>
                       </a:r>
                     </a:p>
                   </a:txBody>
@@ -7932,7 +7815,7 @@
                 </a:tc>
                 <a:tc>
                   <a:txBody>
-                    <a:bodyPr wrap="square"/>
+                    <a:bodyPr/>
                     <a:lstStyle/>
                     <a:p>
                       <a:pPr algn="l"/>
@@ -7955,7 +7838,7 @@
                 </a:tc>
                 <a:tc>
                   <a:txBody>
-                    <a:bodyPr wrap="square"/>
+                    <a:bodyPr/>
                     <a:lstStyle/>
                     <a:p>
                       <a:pPr algn="l"/>
@@ -7978,7 +7861,7 @@
                 </a:tc>
                 <a:tc>
                   <a:txBody>
-                    <a:bodyPr wrap="square"/>
+                    <a:bodyPr/>
                     <a:lstStyle/>
                     <a:p>
                       <a:pPr algn="l"/>
@@ -8001,7 +7884,7 @@
                 </a:tc>
                 <a:tc>
                   <a:txBody>
-                    <a:bodyPr wrap="square"/>
+                    <a:bodyPr/>
                     <a:lstStyle/>
                     <a:p>
                       <a:pPr algn="l"/>
@@ -8024,7 +7907,7 @@
                 </a:tc>
                 <a:tc>
                   <a:txBody>
-                    <a:bodyPr wrap="square"/>
+                    <a:bodyPr/>
                     <a:lstStyle/>
                     <a:p>
                       <a:pPr algn="l"/>
@@ -8049,7 +7932,7 @@
               <a:tr h="292608">
                 <a:tc>
                   <a:txBody>
-                    <a:bodyPr wrap="square"/>
+                    <a:bodyPr/>
                     <a:lstStyle/>
                     <a:p>
                       <a:pPr algn="l"/>
@@ -8072,18 +7955,18 @@
                 </a:tc>
                 <a:tc>
                   <a:txBody>
-                    <a:bodyPr wrap="square"/>
-                    <a:lstStyle/>
-                    <a:p>
-                      <a:pPr algn="l"/>
-                      <a:r>
-                        <a:rPr sz="1000" b="0">
-                          <a:solidFill>
-                            <a:srgbClr val="1D1B43"/>
-                          </a:solidFill>
-                          <a:latin typeface="Calibri"/>
-                        </a:rPr>
-                        <a:t>EXCELLENCE ELETRODOM - ARAPONGAS / PR</a:t>
+                    <a:bodyPr/>
+                    <a:lstStyle/>
+                    <a:p>
+                      <a:pPr algn="l"/>
+                      <a:r>
+                        <a:rPr sz="1000" b="0">
+                          <a:solidFill>
+                            <a:srgbClr val="1D1B43"/>
+                          </a:solidFill>
+                          <a:latin typeface="Calibri"/>
+                        </a:rPr>
+                        <a:t>GMX TECNOLOGIA E SER - RIO DE JANEIRO / RJ</a:t>
                       </a:r>
                     </a:p>
                   </a:txBody>
@@ -8095,7 +7978,7 @@
                 </a:tc>
                 <a:tc>
                   <a:txBody>
-                    <a:bodyPr wrap="square"/>
+                    <a:bodyPr/>
                     <a:lstStyle/>
                     <a:p>
                       <a:pPr algn="l"/>
@@ -8118,7 +8001,7 @@
                 </a:tc>
                 <a:tc>
                   <a:txBody>
-                    <a:bodyPr wrap="square"/>
+                    <a:bodyPr/>
                     <a:lstStyle/>
                     <a:p>
                       <a:pPr algn="l"/>
@@ -8141,7 +8024,7 @@
                 </a:tc>
                 <a:tc>
                   <a:txBody>
-                    <a:bodyPr wrap="square"/>
+                    <a:bodyPr/>
                     <a:lstStyle/>
                     <a:p>
                       <a:pPr algn="l"/>
@@ -8164,7 +8047,7 @@
                 </a:tc>
                 <a:tc>
                   <a:txBody>
-                    <a:bodyPr wrap="square"/>
+                    <a:bodyPr/>
                     <a:lstStyle/>
                     <a:p>
                       <a:pPr algn="l"/>
@@ -8187,7 +8070,7 @@
                 </a:tc>
                 <a:tc>
                   <a:txBody>
-                    <a:bodyPr wrap="square"/>
+                    <a:bodyPr/>
                     <a:lstStyle/>
                     <a:p>
                       <a:pPr algn="l"/>
@@ -8212,7 +8095,7 @@
               <a:tr h="292608">
                 <a:tc>
                   <a:txBody>
-                    <a:bodyPr wrap="square"/>
+                    <a:bodyPr/>
                     <a:lstStyle/>
                     <a:p>
                       <a:pPr algn="l"/>
@@ -8235,18 +8118,18 @@
                 </a:tc>
                 <a:tc>
                   <a:txBody>
-                    <a:bodyPr wrap="square"/>
-                    <a:lstStyle/>
-                    <a:p>
-                      <a:pPr algn="l"/>
-                      <a:r>
-                        <a:rPr sz="1000" b="0">
-                          <a:solidFill>
-                            <a:srgbClr val="1D1B43"/>
-                          </a:solidFill>
-                          <a:latin typeface="Calibri"/>
-                        </a:rPr>
-                        <a:t>ELETRORARO COM DE EL - BELO HORIZONTE / MG</a:t>
+                    <a:bodyPr/>
+                    <a:lstStyle/>
+                    <a:p>
+                      <a:pPr algn="l"/>
+                      <a:r>
+                        <a:rPr sz="1000" b="0">
+                          <a:solidFill>
+                            <a:srgbClr val="1D1B43"/>
+                          </a:solidFill>
+                          <a:latin typeface="Calibri"/>
+                        </a:rPr>
+                        <a:t>GLOBAL EXPRESS ASSIS - UBERLANDIA / MG</a:t>
                       </a:r>
                     </a:p>
                   </a:txBody>
@@ -8258,18 +8141,18 @@
                 </a:tc>
                 <a:tc>
                   <a:txBody>
-                    <a:bodyPr wrap="square"/>
-                    <a:lstStyle/>
-                    <a:p>
-                      <a:pPr algn="l"/>
-                      <a:r>
-                        <a:rPr sz="1000" b="0">
-                          <a:solidFill>
-                            <a:srgbClr val="1D1B43"/>
-                          </a:solidFill>
-                          <a:latin typeface="Calibri"/>
-                        </a:rPr>
-                        <a:t>4</a:t>
+                    <a:bodyPr/>
+                    <a:lstStyle/>
+                    <a:p>
+                      <a:pPr algn="l"/>
+                      <a:r>
+                        <a:rPr sz="1000" b="0">
+                          <a:solidFill>
+                            <a:srgbClr val="1D1B43"/>
+                          </a:solidFill>
+                          <a:latin typeface="Calibri"/>
+                        </a:rPr>
+                        <a:t>3</a:t>
                       </a:r>
                     </a:p>
                   </a:txBody>
@@ -8281,7 +8164,7 @@
                 </a:tc>
                 <a:tc>
                   <a:txBody>
-                    <a:bodyPr wrap="square"/>
+                    <a:bodyPr/>
                     <a:lstStyle/>
                     <a:p>
                       <a:pPr algn="l"/>
@@ -8304,18 +8187,18 @@
                 </a:tc>
                 <a:tc>
                   <a:txBody>
-                    <a:bodyPr wrap="square"/>
-                    <a:lstStyle/>
-                    <a:p>
-                      <a:pPr algn="l"/>
-                      <a:r>
-                        <a:rPr sz="1000" b="0">
-                          <a:solidFill>
-                            <a:srgbClr val="1D1B43"/>
-                          </a:solidFill>
-                          <a:latin typeface="Calibri"/>
-                        </a:rPr>
-                        <a:t>1</a:t>
+                    <a:bodyPr/>
+                    <a:lstStyle/>
+                    <a:p>
+                      <a:pPr algn="l"/>
+                      <a:r>
+                        <a:rPr sz="1000" b="0">
+                          <a:solidFill>
+                            <a:srgbClr val="1D1B43"/>
+                          </a:solidFill>
+                          <a:latin typeface="Calibri"/>
+                        </a:rPr>
+                        <a:t>0</a:t>
                       </a:r>
                     </a:p>
                   </a:txBody>
@@ -8327,18 +8210,18 @@
                 </a:tc>
                 <a:tc>
                   <a:txBody>
-                    <a:bodyPr wrap="square"/>
-                    <a:lstStyle/>
-                    <a:p>
-                      <a:pPr algn="l"/>
-                      <a:r>
-                        <a:rPr sz="1000" b="0">
-                          <a:solidFill>
-                            <a:srgbClr val="1D1B43"/>
-                          </a:solidFill>
-                          <a:latin typeface="Calibri"/>
-                        </a:rPr>
-                        <a:t>75.0%</a:t>
+                    <a:bodyPr/>
+                    <a:lstStyle/>
+                    <a:p>
+                      <a:pPr algn="l"/>
+                      <a:r>
+                        <a:rPr sz="1000" b="0">
+                          <a:solidFill>
+                            <a:srgbClr val="1D1B43"/>
+                          </a:solidFill>
+                          <a:latin typeface="Calibri"/>
+                        </a:rPr>
+                        <a:t>100.0%</a:t>
                       </a:r>
                     </a:p>
                   </a:txBody>
@@ -8350,18 +8233,18 @@
                 </a:tc>
                 <a:tc>
                   <a:txBody>
-                    <a:bodyPr wrap="square"/>
-                    <a:lstStyle/>
-                    <a:p>
-                      <a:pPr algn="l"/>
-                      <a:r>
-                        <a:rPr sz="1000" b="0">
-                          <a:solidFill>
-                            <a:srgbClr val="1D1B43"/>
-                          </a:solidFill>
-                          <a:latin typeface="Calibri"/>
-                        </a:rPr>
-                        <a:t>Atencao</a:t>
+                    <a:bodyPr/>
+                    <a:lstStyle/>
+                    <a:p>
+                      <a:pPr algn="l"/>
+                      <a:r>
+                        <a:rPr sz="1000" b="0">
+                          <a:solidFill>
+                            <a:srgbClr val="1D1B43"/>
+                          </a:solidFill>
+                          <a:latin typeface="Calibri"/>
+                        </a:rPr>
+                        <a:t>Excelente</a:t>
                       </a:r>
                     </a:p>
                   </a:txBody>
@@ -8375,7 +8258,7 @@
               <a:tr h="292608">
                 <a:tc>
                   <a:txBody>
-                    <a:bodyPr wrap="square"/>
+                    <a:bodyPr/>
                     <a:lstStyle/>
                     <a:p>
                       <a:pPr algn="l"/>
@@ -8398,18 +8281,18 @@
                 </a:tc>
                 <a:tc>
                   <a:txBody>
-                    <a:bodyPr wrap="square"/>
-                    <a:lstStyle/>
-                    <a:p>
-                      <a:pPr algn="l"/>
-                      <a:r>
-                        <a:rPr sz="1000" b="0">
-                          <a:solidFill>
-                            <a:srgbClr val="1D1B43"/>
-                          </a:solidFill>
-                          <a:latin typeface="Calibri"/>
-                        </a:rPr>
-                        <a:t>VIP REPAIR CENTER AS - CURITIBA / PR</a:t>
+                    <a:bodyPr/>
+                    <a:lstStyle/>
+                    <a:p>
+                      <a:pPr algn="l"/>
+                      <a:r>
+                        <a:rPr sz="1000" b="0">
+                          <a:solidFill>
+                            <a:srgbClr val="1D1B43"/>
+                          </a:solidFill>
+                          <a:latin typeface="Calibri"/>
+                        </a:rPr>
+                        <a:t>FIX IT ASSISTENCIA E - PORTO ALEGRE / RS</a:t>
                       </a:r>
                     </a:p>
                   </a:txBody>
@@ -8421,18 +8304,18 @@
                 </a:tc>
                 <a:tc>
                   <a:txBody>
-                    <a:bodyPr wrap="square"/>
-                    <a:lstStyle/>
-                    <a:p>
-                      <a:pPr algn="l"/>
-                      <a:r>
-                        <a:rPr sz="1000" b="0">
-                          <a:solidFill>
-                            <a:srgbClr val="1D1B43"/>
-                          </a:solidFill>
-                          <a:latin typeface="Calibri"/>
-                        </a:rPr>
-                        <a:t>4</a:t>
+                    <a:bodyPr/>
+                    <a:lstStyle/>
+                    <a:p>
+                      <a:pPr algn="l"/>
+                      <a:r>
+                        <a:rPr sz="1000" b="0">
+                          <a:solidFill>
+                            <a:srgbClr val="1D1B43"/>
+                          </a:solidFill>
+                          <a:latin typeface="Calibri"/>
+                        </a:rPr>
+                        <a:t>3</a:t>
                       </a:r>
                     </a:p>
                   </a:txBody>
@@ -8444,18 +8327,18 @@
                 </a:tc>
                 <a:tc>
                   <a:txBody>
-                    <a:bodyPr wrap="square"/>
-                    <a:lstStyle/>
-                    <a:p>
-                      <a:pPr algn="l"/>
-                      <a:r>
-                        <a:rPr sz="1000" b="0">
-                          <a:solidFill>
-                            <a:srgbClr val="1D1B43"/>
-                          </a:solidFill>
-                          <a:latin typeface="Calibri"/>
-                        </a:rPr>
-                        <a:t>4</a:t>
+                    <a:bodyPr/>
+                    <a:lstStyle/>
+                    <a:p>
+                      <a:pPr algn="l"/>
+                      <a:r>
+                        <a:rPr sz="1000" b="0">
+                          <a:solidFill>
+                            <a:srgbClr val="1D1B43"/>
+                          </a:solidFill>
+                          <a:latin typeface="Calibri"/>
+                        </a:rPr>
+                        <a:t>2</a:t>
                       </a:r>
                     </a:p>
                   </a:txBody>
@@ -8467,18 +8350,18 @@
                 </a:tc>
                 <a:tc>
                   <a:txBody>
-                    <a:bodyPr wrap="square"/>
-                    <a:lstStyle/>
-                    <a:p>
-                      <a:pPr algn="l"/>
-                      <a:r>
-                        <a:rPr sz="1000" b="0">
-                          <a:solidFill>
-                            <a:srgbClr val="1D1B43"/>
-                          </a:solidFill>
-                          <a:latin typeface="Calibri"/>
-                        </a:rPr>
-                        <a:t>0</a:t>
+                    <a:bodyPr/>
+                    <a:lstStyle/>
+                    <a:p>
+                      <a:pPr algn="l"/>
+                      <a:r>
+                        <a:rPr sz="1000" b="0">
+                          <a:solidFill>
+                            <a:srgbClr val="1D1B43"/>
+                          </a:solidFill>
+                          <a:latin typeface="Calibri"/>
+                        </a:rPr>
+                        <a:t>1</a:t>
                       </a:r>
                     </a:p>
                   </a:txBody>
@@ -8490,18 +8373,18 @@
                 </a:tc>
                 <a:tc>
                   <a:txBody>
-                    <a:bodyPr wrap="square"/>
-                    <a:lstStyle/>
-                    <a:p>
-                      <a:pPr algn="l"/>
-                      <a:r>
-                        <a:rPr sz="1000" b="0">
-                          <a:solidFill>
-                            <a:srgbClr val="1D1B43"/>
-                          </a:solidFill>
-                          <a:latin typeface="Calibri"/>
-                        </a:rPr>
-                        <a:t>100.0%</a:t>
+                    <a:bodyPr/>
+                    <a:lstStyle/>
+                    <a:p>
+                      <a:pPr algn="l"/>
+                      <a:r>
+                        <a:rPr sz="1000" b="0">
+                          <a:solidFill>
+                            <a:srgbClr val="1D1B43"/>
+                          </a:solidFill>
+                          <a:latin typeface="Calibri"/>
+                        </a:rPr>
+                        <a:t>66.7%</a:t>
                       </a:r>
                     </a:p>
                   </a:txBody>
@@ -8513,18 +8396,18 @@
                 </a:tc>
                 <a:tc>
                   <a:txBody>
-                    <a:bodyPr wrap="square"/>
-                    <a:lstStyle/>
-                    <a:p>
-                      <a:pPr algn="l"/>
-                      <a:r>
-                        <a:rPr sz="1000" b="0">
-                          <a:solidFill>
-                            <a:srgbClr val="1D1B43"/>
-                          </a:solidFill>
-                          <a:latin typeface="Calibri"/>
-                        </a:rPr>
-                        <a:t>Excelente</a:t>
+                    <a:bodyPr/>
+                    <a:lstStyle/>
+                    <a:p>
+                      <a:pPr algn="l"/>
+                      <a:r>
+                        <a:rPr sz="1000" b="0">
+                          <a:solidFill>
+                            <a:srgbClr val="1D1B43"/>
+                          </a:solidFill>
+                          <a:latin typeface="Calibri"/>
+                        </a:rPr>
+                        <a:t>Atencao</a:t>
                       </a:r>
                     </a:p>
                   </a:txBody>
@@ -8538,7 +8421,7 @@
               <a:tr h="292608">
                 <a:tc>
                   <a:txBody>
-                    <a:bodyPr wrap="square"/>
+                    <a:bodyPr/>
                     <a:lstStyle/>
                     <a:p>
                       <a:pPr algn="l"/>
@@ -8561,18 +8444,18 @@
                 </a:tc>
                 <a:tc>
                   <a:txBody>
-                    <a:bodyPr wrap="square"/>
-                    <a:lstStyle/>
-                    <a:p>
-                      <a:pPr algn="l"/>
-                      <a:r>
-                        <a:rPr sz="1000" b="0">
-                          <a:solidFill>
-                            <a:srgbClr val="1D1B43"/>
-                          </a:solidFill>
-                          <a:latin typeface="Calibri"/>
-                        </a:rPr>
-                        <a:t>GLOBAL EXPRESS ASSIS - UBERLANDIA / MG</a:t>
+                    <a:bodyPr/>
+                    <a:lstStyle/>
+                    <a:p>
+                      <a:pPr algn="l"/>
+                      <a:r>
+                        <a:rPr sz="1000" b="0">
+                          <a:solidFill>
+                            <a:srgbClr val="1D1B43"/>
+                          </a:solidFill>
+                          <a:latin typeface="Calibri"/>
+                        </a:rPr>
+                        <a:t>KNOLL REPARACAO E MA - FLORIANOPOLIS / SC</a:t>
                       </a:r>
                     </a:p>
                   </a:txBody>
@@ -8584,7 +8467,7 @@
                 </a:tc>
                 <a:tc>
                   <a:txBody>
-                    <a:bodyPr wrap="square"/>
+                    <a:bodyPr/>
                     <a:lstStyle/>
                     <a:p>
                       <a:pPr algn="l"/>
@@ -8607,7 +8490,7 @@
                 </a:tc>
                 <a:tc>
                   <a:txBody>
-                    <a:bodyPr wrap="square"/>
+                    <a:bodyPr/>
                     <a:lstStyle/>
                     <a:p>
                       <a:pPr algn="l"/>
@@ -8630,7 +8513,7 @@
                 </a:tc>
                 <a:tc>
                   <a:txBody>
-                    <a:bodyPr wrap="square"/>
+                    <a:bodyPr/>
                     <a:lstStyle/>
                     <a:p>
                       <a:pPr algn="l"/>
@@ -8653,7 +8536,7 @@
                 </a:tc>
                 <a:tc>
                   <a:txBody>
-                    <a:bodyPr wrap="square"/>
+                    <a:bodyPr/>
                     <a:lstStyle/>
                     <a:p>
                       <a:pPr algn="l"/>
@@ -8676,7 +8559,7 @@
                 </a:tc>
                 <a:tc>
                   <a:txBody>
-                    <a:bodyPr wrap="square"/>
+                    <a:bodyPr/>
                     <a:lstStyle/>
                     <a:p>
                       <a:pPr algn="l"/>
@@ -8701,7 +8584,7 @@
               <a:tr h="292608">
                 <a:tc>
                   <a:txBody>
-                    <a:bodyPr wrap="square"/>
+                    <a:bodyPr/>
                     <a:lstStyle/>
                     <a:p>
                       <a:pPr algn="l"/>
@@ -8724,18 +8607,18 @@
                 </a:tc>
                 <a:tc>
                   <a:txBody>
-                    <a:bodyPr wrap="square"/>
-                    <a:lstStyle/>
-                    <a:p>
-                      <a:pPr algn="l"/>
-                      <a:r>
-                        <a:rPr sz="1000" b="0">
-                          <a:solidFill>
-                            <a:srgbClr val="1D1B43"/>
-                          </a:solidFill>
-                          <a:latin typeface="Calibri"/>
-                        </a:rPr>
-                        <a:t>FIX IT ASSISTENCIA E - PORTO ALEGRE / RS</a:t>
+                    <a:bodyPr/>
+                    <a:lstStyle/>
+                    <a:p>
+                      <a:pPr algn="l"/>
+                      <a:r>
+                        <a:rPr sz="1000" b="0">
+                          <a:solidFill>
+                            <a:srgbClr val="1D1B43"/>
+                          </a:solidFill>
+                          <a:latin typeface="Calibri"/>
+                        </a:rPr>
+                        <a:t>ELETRORARO COM DE EL - BELO HORIZONTE / MG</a:t>
                       </a:r>
                     </a:p>
                   </a:txBody>
@@ -8747,7 +8630,7 @@
                 </a:tc>
                 <a:tc>
                   <a:txBody>
-                    <a:bodyPr wrap="square"/>
+                    <a:bodyPr/>
                     <a:lstStyle/>
                     <a:p>
                       <a:pPr algn="l"/>
@@ -8770,7 +8653,7 @@
                 </a:tc>
                 <a:tc>
                   <a:txBody>
-                    <a:bodyPr wrap="square"/>
+                    <a:bodyPr/>
                     <a:lstStyle/>
                     <a:p>
                       <a:pPr algn="l"/>
@@ -8793,7 +8676,7 @@
                 </a:tc>
                 <a:tc>
                   <a:txBody>
-                    <a:bodyPr wrap="square"/>
+                    <a:bodyPr/>
                     <a:lstStyle/>
                     <a:p>
                       <a:pPr algn="l"/>
@@ -8816,7 +8699,7 @@
                 </a:tc>
                 <a:tc>
                   <a:txBody>
-                    <a:bodyPr wrap="square"/>
+                    <a:bodyPr/>
                     <a:lstStyle/>
                     <a:p>
                       <a:pPr algn="l"/>
@@ -8839,7 +8722,7 @@
                 </a:tc>
                 <a:tc>
                   <a:txBody>
-                    <a:bodyPr wrap="square"/>
+                    <a:bodyPr/>
                     <a:lstStyle/>
                     <a:p>
                       <a:pPr algn="l"/>
@@ -8864,7 +8747,7 @@
               <a:tr h="292608">
                 <a:tc>
                   <a:txBody>
-                    <a:bodyPr wrap="square"/>
+                    <a:bodyPr/>
                     <a:lstStyle/>
                     <a:p>
                       <a:pPr algn="l"/>
@@ -8887,7 +8770,7 @@
                 </a:tc>
                 <a:tc>
                   <a:txBody>
-                    <a:bodyPr wrap="square"/>
+                    <a:bodyPr/>
                     <a:lstStyle/>
                     <a:p>
                       <a:pPr algn="l"/>
@@ -8910,7 +8793,7 @@
                 </a:tc>
                 <a:tc>
                   <a:txBody>
-                    <a:bodyPr wrap="square"/>
+                    <a:bodyPr/>
                     <a:lstStyle/>
                     <a:p>
                       <a:pPr algn="l"/>
@@ -8933,7 +8816,7 @@
                 </a:tc>
                 <a:tc>
                   <a:txBody>
-                    <a:bodyPr wrap="square"/>
+                    <a:bodyPr/>
                     <a:lstStyle/>
                     <a:p>
                       <a:pPr algn="l"/>
@@ -8956,7 +8839,7 @@
                 </a:tc>
                 <a:tc>
                   <a:txBody>
-                    <a:bodyPr wrap="square"/>
+                    <a:bodyPr/>
                     <a:lstStyle/>
                     <a:p>
                       <a:pPr algn="l"/>
@@ -8979,7 +8862,7 @@
                 </a:tc>
                 <a:tc>
                   <a:txBody>
-                    <a:bodyPr wrap="square"/>
+                    <a:bodyPr/>
                     <a:lstStyle/>
                     <a:p>
                       <a:pPr algn="l"/>
@@ -9002,7 +8885,7 @@
                 </a:tc>
                 <a:tc>
                   <a:txBody>
-                    <a:bodyPr wrap="square"/>
+                    <a:bodyPr/>
                     <a:lstStyle/>
                     <a:p>
                       <a:pPr algn="l"/>
@@ -9027,7 +8910,7 @@
               <a:tr h="292608">
                 <a:tc>
                   <a:txBody>
-                    <a:bodyPr wrap="square"/>
+                    <a:bodyPr/>
                     <a:lstStyle/>
                     <a:p>
                       <a:pPr algn="l"/>
@@ -9050,7 +8933,7 @@
                 </a:tc>
                 <a:tc>
                   <a:txBody>
-                    <a:bodyPr wrap="square"/>
+                    <a:bodyPr/>
                     <a:lstStyle/>
                     <a:p>
                       <a:pPr algn="l"/>
@@ -9073,7 +8956,7 @@
                 </a:tc>
                 <a:tc>
                   <a:txBody>
-                    <a:bodyPr wrap="square"/>
+                    <a:bodyPr/>
                     <a:lstStyle/>
                     <a:p>
                       <a:pPr algn="l"/>
@@ -9096,7 +8979,7 @@
                 </a:tc>
                 <a:tc>
                   <a:txBody>
-                    <a:bodyPr wrap="square"/>
+                    <a:bodyPr/>
                     <a:lstStyle/>
                     <a:p>
                       <a:pPr algn="l"/>
@@ -9119,7 +9002,7 @@
                 </a:tc>
                 <a:tc>
                   <a:txBody>
-                    <a:bodyPr wrap="square"/>
+                    <a:bodyPr/>
                     <a:lstStyle/>
                     <a:p>
                       <a:pPr algn="l"/>
@@ -9142,7 +9025,7 @@
                 </a:tc>
                 <a:tc>
                   <a:txBody>
-                    <a:bodyPr wrap="square"/>
+                    <a:bodyPr/>
                     <a:lstStyle/>
                     <a:p>
                       <a:pPr algn="l"/>
@@ -9165,7 +9048,7 @@
                 </a:tc>
                 <a:tc>
                   <a:txBody>
-                    <a:bodyPr wrap="square"/>
+                    <a:bodyPr/>
                     <a:lstStyle/>
                     <a:p>
                       <a:pPr algn="l"/>
@@ -9190,7 +9073,7 @@
               <a:tr h="292608">
                 <a:tc>
                   <a:txBody>
-                    <a:bodyPr wrap="square"/>
+                    <a:bodyPr/>
                     <a:lstStyle/>
                     <a:p>
                       <a:pPr algn="l"/>
@@ -9213,7 +9096,7 @@
                 </a:tc>
                 <a:tc>
                   <a:txBody>
-                    <a:bodyPr wrap="square"/>
+                    <a:bodyPr/>
                     <a:lstStyle/>
                     <a:p>
                       <a:pPr algn="l"/>
@@ -9236,7 +9119,7 @@
                 </a:tc>
                 <a:tc>
                   <a:txBody>
-                    <a:bodyPr wrap="square"/>
+                    <a:bodyPr/>
                     <a:lstStyle/>
                     <a:p>
                       <a:pPr algn="l"/>
@@ -9259,7 +9142,7 @@
                 </a:tc>
                 <a:tc>
                   <a:txBody>
-                    <a:bodyPr wrap="square"/>
+                    <a:bodyPr/>
                     <a:lstStyle/>
                     <a:p>
                       <a:pPr algn="l"/>
@@ -9282,7 +9165,7 @@
                 </a:tc>
                 <a:tc>
                   <a:txBody>
-                    <a:bodyPr wrap="square"/>
+                    <a:bodyPr/>
                     <a:lstStyle/>
                     <a:p>
                       <a:pPr algn="l"/>
@@ -9305,7 +9188,7 @@
                 </a:tc>
                 <a:tc>
                   <a:txBody>
-                    <a:bodyPr wrap="square"/>
+                    <a:bodyPr/>
                     <a:lstStyle/>
                     <a:p>
                       <a:pPr algn="l"/>
@@ -9328,7 +9211,7 @@
                 </a:tc>
                 <a:tc>
                   <a:txBody>
-                    <a:bodyPr wrap="square"/>
+                    <a:bodyPr/>
                     <a:lstStyle/>
                     <a:p>
                       <a:pPr algn="l"/>
@@ -9353,7 +9236,7 @@
               <a:tr h="292608">
                 <a:tc>
                   <a:txBody>
-                    <a:bodyPr wrap="square"/>
+                    <a:bodyPr/>
                     <a:lstStyle/>
                     <a:p>
                       <a:pPr algn="l"/>
@@ -9376,7 +9259,7 @@
                 </a:tc>
                 <a:tc>
                   <a:txBody>
-                    <a:bodyPr wrap="square"/>
+                    <a:bodyPr/>
                     <a:lstStyle/>
                     <a:p>
                       <a:pPr algn="l"/>
@@ -9399,7 +9282,7 @@
                 </a:tc>
                 <a:tc>
                   <a:txBody>
-                    <a:bodyPr wrap="square"/>
+                    <a:bodyPr/>
                     <a:lstStyle/>
                     <a:p>
                       <a:pPr algn="l"/>
@@ -9422,7 +9305,7 @@
                 </a:tc>
                 <a:tc>
                   <a:txBody>
-                    <a:bodyPr wrap="square"/>
+                    <a:bodyPr/>
                     <a:lstStyle/>
                     <a:p>
                       <a:pPr algn="l"/>
@@ -9445,7 +9328,7 @@
                 </a:tc>
                 <a:tc>
                   <a:txBody>
-                    <a:bodyPr wrap="square"/>
+                    <a:bodyPr/>
                     <a:lstStyle/>
                     <a:p>
                       <a:pPr algn="l"/>
@@ -9468,7 +9351,7 @@
                 </a:tc>
                 <a:tc>
                   <a:txBody>
-                    <a:bodyPr wrap="square"/>
+                    <a:bodyPr/>
                     <a:lstStyle/>
                     <a:p>
                       <a:pPr algn="l"/>
@@ -9491,7 +9374,7 @@
                 </a:tc>
                 <a:tc>
                   <a:txBody>
-                    <a:bodyPr wrap="square"/>
+                    <a:bodyPr/>
                     <a:lstStyle/>
                     <a:p>
                       <a:pPr algn="l"/>
@@ -9516,7 +9399,7 @@
               <a:tr h="292608">
                 <a:tc>
                   <a:txBody>
-                    <a:bodyPr wrap="square"/>
+                    <a:bodyPr/>
                     <a:lstStyle/>
                     <a:p>
                       <a:pPr algn="l"/>
@@ -9539,7 +9422,7 @@
                 </a:tc>
                 <a:tc>
                   <a:txBody>
-                    <a:bodyPr wrap="square"/>
+                    <a:bodyPr/>
                     <a:lstStyle/>
                     <a:p>
                       <a:pPr algn="l"/>
@@ -9562,7 +9445,7 @@
                 </a:tc>
                 <a:tc>
                   <a:txBody>
-                    <a:bodyPr wrap="square"/>
+                    <a:bodyPr/>
                     <a:lstStyle/>
                     <a:p>
                       <a:pPr algn="l"/>
@@ -9585,7 +9468,7 @@
                 </a:tc>
                 <a:tc>
                   <a:txBody>
-                    <a:bodyPr wrap="square"/>
+                    <a:bodyPr/>
                     <a:lstStyle/>
                     <a:p>
                       <a:pPr algn="l"/>
@@ -9608,7 +9491,7 @@
                 </a:tc>
                 <a:tc>
                   <a:txBody>
-                    <a:bodyPr wrap="square"/>
+                    <a:bodyPr/>
                     <a:lstStyle/>
                     <a:p>
                       <a:pPr algn="l"/>
@@ -9631,7 +9514,7 @@
                 </a:tc>
                 <a:tc>
                   <a:txBody>
-                    <a:bodyPr wrap="square"/>
+                    <a:bodyPr/>
                     <a:lstStyle/>
                     <a:p>
                       <a:pPr algn="l"/>
@@ -9654,7 +9537,7 @@
                 </a:tc>
                 <a:tc>
                   <a:txBody>
-                    <a:bodyPr wrap="square"/>
+                    <a:bodyPr/>
                     <a:lstStyle/>
                     <a:p>
                       <a:pPr algn="l"/>

--- a/TECADI_ARMAZENS_GERAIS_LTDA_(I.pptx
+++ b/TECADI_ARMAZENS_GERAIS_LTDA_(I.pptx
@@ -147,10 +147,10 @@
               <c:strCache>
                 <c:ptCount val="2"/>
                 <c:pt idx="0">
-                  <c:v>Marco 2026</c:v>
+                  <c:v>Abril 2026</c:v>
                 </c:pt>
                 <c:pt idx="1">
-                  <c:v>Abril 2026</c:v>
+                  <c:v>Maio 2026</c:v>
                 </c:pt>
               </c:strCache>
             </c:strRef>
@@ -162,10 +162,10 @@
                 <c:formatCode>General</c:formatCode>
                 <c:ptCount val="2"/>
                 <c:pt idx="0">
-                  <c:v>4</c:v>
+                  <c:v>47</c:v>
                 </c:pt>
                 <c:pt idx="1">
-                  <c:v>43</c:v>
+                  <c:v>89</c:v>
                 </c:pt>
               </c:numCache>
             </c:numRef>
@@ -196,10 +196,10 @@
               <c:strCache>
                 <c:ptCount val="2"/>
                 <c:pt idx="0">
-                  <c:v>Marco 2026</c:v>
+                  <c:v>Abril 2026</c:v>
                 </c:pt>
                 <c:pt idx="1">
-                  <c:v>Abril 2026</c:v>
+                  <c:v>Maio 2026</c:v>
                 </c:pt>
               </c:strCache>
             </c:strRef>
@@ -214,7 +214,7 @@
                   <c:v>0</c:v>
                 </c:pt>
                 <c:pt idx="1">
-                  <c:v>3</c:v>
+                  <c:v>5</c:v>
                 </c:pt>
               </c:numCache>
             </c:numRef>
@@ -3387,7 +3387,7 @@
                 </a:solidFill>
                 <a:latin typeface="Calibri"/>
               </a:rPr>
-              <a:t>INDICADORES ABRIL 2026</a:t>
+              <a:t>INDICADORES MAIO 2026</a:t>
             </a:r>
           </a:p>
         </p:txBody>
@@ -3709,7 +3709,7 @@
                 </a:solidFill>
                 <a:latin typeface="Calibri"/>
               </a:rPr>
-              <a:t>46</a:t>
+              <a:t>94</a:t>
             </a:r>
           </a:p>
         </p:txBody>
@@ -3824,7 +3824,7 @@
                 </a:solidFill>
                 <a:latin typeface="Calibri"/>
               </a:rPr>
-              <a:t>43</a:t>
+              <a:t>89</a:t>
             </a:r>
           </a:p>
         </p:txBody>
@@ -3939,7 +3939,7 @@
                 </a:solidFill>
                 <a:latin typeface="Calibri"/>
               </a:rPr>
-              <a:t>3</a:t>
+              <a:t>5</a:t>
             </a:r>
           </a:p>
         </p:txBody>
@@ -4054,7 +4054,7 @@
                 </a:solidFill>
                 <a:latin typeface="Calibri"/>
               </a:rPr>
-              <a:t>93.5%</a:t>
+              <a:t>94.7%</a:t>
             </a:r>
           </a:p>
         </p:txBody>
@@ -4155,7 +4155,7 @@
                           </a:solidFill>
                           <a:latin typeface="Calibri"/>
                         </a:rPr>
-                        <a:t>Marco 2026</a:t>
+                        <a:t>Abril 2026</a:t>
                       </a:r>
                     </a:p>
                   </a:txBody>
@@ -4178,7 +4178,7 @@
                           </a:solidFill>
                           <a:latin typeface="Calibri"/>
                         </a:rPr>
-                        <a:t>Abril 2026</a:t>
+                        <a:t>Maio 2026</a:t>
                       </a:r>
                     </a:p>
                   </a:txBody>
@@ -4249,7 +4249,7 @@
                           </a:solidFill>
                           <a:latin typeface="Calibri"/>
                         </a:rPr>
-                        <a:t>4</a:t>
+                        <a:t>47</a:t>
                       </a:r>
                     </a:p>
                   </a:txBody>
@@ -4272,7 +4272,7 @@
                           </a:solidFill>
                           <a:latin typeface="Calibri"/>
                         </a:rPr>
-                        <a:t>46</a:t>
+                        <a:t>94</a:t>
                       </a:r>
                     </a:p>
                   </a:txBody>
@@ -4295,7 +4295,7 @@
                           </a:solidFill>
                           <a:latin typeface="Calibri"/>
                         </a:rPr>
-                        <a:t>+ 42</a:t>
+                        <a:t>+ 47</a:t>
                       </a:r>
                     </a:p>
                   </a:txBody>
@@ -4343,7 +4343,7 @@
                           </a:solidFill>
                           <a:latin typeface="Calibri"/>
                         </a:rPr>
-                        <a:t>4</a:t>
+                        <a:t>47</a:t>
                       </a:r>
                     </a:p>
                   </a:txBody>
@@ -4366,7 +4366,7 @@
                           </a:solidFill>
                           <a:latin typeface="Calibri"/>
                         </a:rPr>
-                        <a:t>43</a:t>
+                        <a:t>89</a:t>
                       </a:r>
                     </a:p>
                   </a:txBody>
@@ -4389,7 +4389,7 @@
                           </a:solidFill>
                           <a:latin typeface="Calibri"/>
                         </a:rPr>
-                        <a:t>+ 39</a:t>
+                        <a:t>+ 42</a:t>
                       </a:r>
                     </a:p>
                   </a:txBody>
@@ -4460,7 +4460,7 @@
                           </a:solidFill>
                           <a:latin typeface="Calibri"/>
                         </a:rPr>
-                        <a:t>3</a:t>
+                        <a:t>5</a:t>
                       </a:r>
                     </a:p>
                   </a:txBody>
@@ -4483,7 +4483,7 @@
                           </a:solidFill>
                           <a:latin typeface="Calibri"/>
                         </a:rPr>
-                        <a:t>+ 3</a:t>
+                        <a:t>+ 5</a:t>
                       </a:r>
                     </a:p>
                   </a:txBody>
@@ -4554,7 +4554,7 @@
                           </a:solidFill>
                           <a:latin typeface="Calibri"/>
                         </a:rPr>
-                        <a:t>93.5%</a:t>
+                        <a:t>94.7%</a:t>
                       </a:r>
                     </a:p>
                   </a:txBody>
@@ -4577,7 +4577,7 @@
                           </a:solidFill>
                           <a:latin typeface="Calibri"/>
                         </a:rPr>
-                        <a:t>- 6.5pp</a:t>
+                        <a:t>- 5.3pp</a:t>
                       </a:r>
                     </a:p>
                   </a:txBody>
@@ -4894,7 +4894,7 @@
                           </a:solidFill>
                           <a:latin typeface="Calibri"/>
                         </a:rPr>
-                        <a:t>Marco 2026</a:t>
+                        <a:t>Abril 2026</a:t>
                       </a:r>
                     </a:p>
                   </a:txBody>
@@ -4917,7 +4917,7 @@
                           </a:solidFill>
                           <a:latin typeface="Calibri"/>
                         </a:rPr>
-                        <a:t>4</a:t>
+                        <a:t>47</a:t>
                       </a:r>
                     </a:p>
                   </a:txBody>
@@ -4940,7 +4940,7 @@
                           </a:solidFill>
                           <a:latin typeface="Calibri"/>
                         </a:rPr>
-                        <a:t>4</a:t>
+                        <a:t>47</a:t>
                       </a:r>
                     </a:p>
                   </a:txBody>
@@ -5011,7 +5011,7 @@
                           </a:solidFill>
                           <a:latin typeface="Calibri"/>
                         </a:rPr>
-                        <a:t>Abril 2026</a:t>
+                        <a:t>Maio 2026</a:t>
                       </a:r>
                     </a:p>
                   </a:txBody>
@@ -5034,7 +5034,7 @@
                           </a:solidFill>
                           <a:latin typeface="Calibri"/>
                         </a:rPr>
-                        <a:t>46</a:t>
+                        <a:t>94</a:t>
                       </a:r>
                     </a:p>
                   </a:txBody>
@@ -5057,7 +5057,7 @@
                           </a:solidFill>
                           <a:latin typeface="Calibri"/>
                         </a:rPr>
-                        <a:t>43</a:t>
+                        <a:t>89</a:t>
                       </a:r>
                     </a:p>
                   </a:txBody>
@@ -5080,7 +5080,7 @@
                           </a:solidFill>
                           <a:latin typeface="Calibri"/>
                         </a:rPr>
-                        <a:t>3</a:t>
+                        <a:t>5</a:t>
                       </a:r>
                     </a:p>
                   </a:txBody>
@@ -5103,7 +5103,7 @@
                           </a:solidFill>
                           <a:latin typeface="Calibri"/>
                         </a:rPr>
-                        <a:t>93.5%</a:t>
+                        <a:t>94.7%</a:t>
                       </a:r>
                     </a:p>
                   </a:txBody>
@@ -5191,7 +5191,7 @@
                 </a:solidFill>
                 <a:latin typeface="Calibri"/>
               </a:rPr>
-              <a:t>PERFORMANCE: 93.5% - REGULAR</a:t>
+              <a:t>PERFORMANCE: 94.7% - REGULAR</a:t>
             </a:r>
           </a:p>
         </p:txBody>
@@ -5276,7 +5276,7 @@
                 </a:solidFill>
                 <a:latin typeface="Calibri"/>
               </a:rPr>
-              <a:t>OCORRENCIAS FORA DO PRAZO (3)</a:t>
+              <a:t>OCORRENCIAS FORA DO PRAZO (5)</a:t>
             </a:r>
           </a:p>
         </p:txBody>
@@ -5334,7 +5334,7 @@
         </p:nvGraphicFramePr>
         <p:xfrm>
           <a:off x="457200" y="1828800"/>
-          <a:ext cx="11429999" cy="1536192"/>
+          <a:ext cx="11429999" cy="2304288"/>
         </p:xfrm>
         <a:graphic>
           <a:graphicData uri="http://schemas.openxmlformats.org/drawingml/2006/table">
@@ -5480,7 +5480,7 @@
                           </a:solidFill>
                           <a:latin typeface="Calibri"/>
                         </a:rPr>
-                        <a:t>277529</a:t>
+                        <a:t>280853</a:t>
                       </a:r>
                     </a:p>
                   </a:txBody>
@@ -5503,7 +5503,7 @@
                           </a:solidFill>
                           <a:latin typeface="Calibri"/>
                         </a:rPr>
-                        <a:t>MINASFAST TECNOLOGIA - CONTAGEM / MG</a:t>
+                        <a:t>INFINITY ASSISTENCIA - JUIZ DE FORA / MG</a:t>
                       </a:r>
                     </a:p>
                   </a:txBody>
@@ -5526,7 +5526,7 @@
                           </a:solidFill>
                           <a:latin typeface="Calibri"/>
                         </a:rPr>
-                        <a:t>CONTAGEM/MG</a:t>
+                        <a:t>JUIZ DE FORA/MG</a:t>
                       </a:r>
                     </a:p>
                   </a:txBody>
@@ -5549,7 +5549,7 @@
                           </a:solidFill>
                           <a:latin typeface="Calibri"/>
                         </a:rPr>
-                        <a:t>10/04/2026</a:t>
+                        <a:t>11/05/2026</a:t>
                       </a:r>
                     </a:p>
                   </a:txBody>
@@ -5572,7 +5572,7 @@
                           </a:solidFill>
                           <a:latin typeface="Calibri"/>
                         </a:rPr>
-                        <a:t>ENTREGUE FORA DO PRAZO</a:t>
+                        <a:t>FORA DO PRAZO</a:t>
                       </a:r>
                     </a:p>
                   </a:txBody>
@@ -5597,7 +5597,7 @@
                           </a:solidFill>
                           <a:latin typeface="Calibri"/>
                         </a:rPr>
-                        <a:t>278711</a:t>
+                        <a:t>282649</a:t>
                       </a:r>
                     </a:p>
                   </a:txBody>
@@ -5620,7 +5620,7 @@
                           </a:solidFill>
                           <a:latin typeface="Calibri"/>
                         </a:rPr>
-                        <a:t>FIX IT ASSISTENCIA E - PORTO ALEGRE / RS</a:t>
+                        <a:t>ABECOM ROLAMENTOS E - SAO PAULO / SP</a:t>
                       </a:r>
                     </a:p>
                   </a:txBody>
@@ -5643,7 +5643,7 @@
                           </a:solidFill>
                           <a:latin typeface="Calibri"/>
                         </a:rPr>
-                        <a:t>PORTO ALEGRE/RS</a:t>
+                        <a:t>SAO PAULO/SP</a:t>
                       </a:r>
                     </a:p>
                   </a:txBody>
@@ -5666,7 +5666,7 @@
                           </a:solidFill>
                           <a:latin typeface="Calibri"/>
                         </a:rPr>
-                        <a:t>14/04/2026</a:t>
+                        <a:t>13/05/2026</a:t>
                       </a:r>
                     </a:p>
                   </a:txBody>
@@ -5714,7 +5714,7 @@
                           </a:solidFill>
                           <a:latin typeface="Calibri"/>
                         </a:rPr>
-                        <a:t>279835</a:t>
+                        <a:t>282680</a:t>
                       </a:r>
                     </a:p>
                   </a:txBody>
@@ -5737,7 +5737,7 @@
                           </a:solidFill>
                           <a:latin typeface="Calibri"/>
                         </a:rPr>
-                        <a:t>ELETRORARO COM DE EL - BELO HORIZONTE / MG</a:t>
+                        <a:t>IRSA ROLAMENTOS S/A - SANTO ANDRE / SP</a:t>
                       </a:r>
                     </a:p>
                   </a:txBody>
@@ -5760,7 +5760,7 @@
                           </a:solidFill>
                           <a:latin typeface="Calibri"/>
                         </a:rPr>
-                        <a:t>BELO HORIZONTE/MG</a:t>
+                        <a:t>SANTO ANDRE/SP</a:t>
                       </a:r>
                     </a:p>
                   </a:txBody>
@@ -5783,7 +5783,241 @@
                           </a:solidFill>
                           <a:latin typeface="Calibri"/>
                         </a:rPr>
-                        <a:t>27/04/2026</a:t>
+                        <a:t>13/05/2026</a:t>
+                      </a:r>
+                    </a:p>
+                  </a:txBody>
+                  <a:tcPr>
+                    <a:solidFill>
+                      <a:srgbClr val="FFFFFF"/>
+                    </a:solidFill>
+                  </a:tcPr>
+                </a:tc>
+                <a:tc>
+                  <a:txBody>
+                    <a:bodyPr/>
+                    <a:lstStyle/>
+                    <a:p>
+                      <a:pPr algn="l"/>
+                      <a:r>
+                        <a:rPr sz="1000" b="0">
+                          <a:solidFill>
+                            <a:srgbClr val="1D1B43"/>
+                          </a:solidFill>
+                          <a:latin typeface="Calibri"/>
+                        </a:rPr>
+                        <a:t>ENTREGUE FORA DO PRAZO</a:t>
+                      </a:r>
+                    </a:p>
+                  </a:txBody>
+                  <a:tcPr>
+                    <a:solidFill>
+                      <a:srgbClr val="FFFFFF"/>
+                    </a:solidFill>
+                  </a:tcPr>
+                </a:tc>
+              </a:tr>
+              <a:tr h="384048">
+                <a:tc>
+                  <a:txBody>
+                    <a:bodyPr/>
+                    <a:lstStyle/>
+                    <a:p>
+                      <a:pPr algn="l"/>
+                      <a:r>
+                        <a:rPr sz="1000" b="0">
+                          <a:solidFill>
+                            <a:srgbClr val="1D1B43"/>
+                          </a:solidFill>
+                          <a:latin typeface="Calibri"/>
+                        </a:rPr>
+                        <a:t>282683</a:t>
+                      </a:r>
+                    </a:p>
+                  </a:txBody>
+                  <a:tcPr>
+                    <a:solidFill>
+                      <a:srgbClr val="F2F2F2"/>
+                    </a:solidFill>
+                  </a:tcPr>
+                </a:tc>
+                <a:tc>
+                  <a:txBody>
+                    <a:bodyPr/>
+                    <a:lstStyle/>
+                    <a:p>
+                      <a:pPr algn="l"/>
+                      <a:r>
+                        <a:rPr sz="1000" b="0">
+                          <a:solidFill>
+                            <a:srgbClr val="1D1B43"/>
+                          </a:solidFill>
+                          <a:latin typeface="Calibri"/>
+                        </a:rPr>
+                        <a:t>ENCOPEL COMERCIO DE - SAO PAULO / SP</a:t>
+                      </a:r>
+                    </a:p>
+                  </a:txBody>
+                  <a:tcPr>
+                    <a:solidFill>
+                      <a:srgbClr val="F2F2F2"/>
+                    </a:solidFill>
+                  </a:tcPr>
+                </a:tc>
+                <a:tc>
+                  <a:txBody>
+                    <a:bodyPr/>
+                    <a:lstStyle/>
+                    <a:p>
+                      <a:pPr algn="l"/>
+                      <a:r>
+                        <a:rPr sz="1000" b="0">
+                          <a:solidFill>
+                            <a:srgbClr val="1D1B43"/>
+                          </a:solidFill>
+                          <a:latin typeface="Calibri"/>
+                        </a:rPr>
+                        <a:t>SAO PAULO/SP</a:t>
+                      </a:r>
+                    </a:p>
+                  </a:txBody>
+                  <a:tcPr>
+                    <a:solidFill>
+                      <a:srgbClr val="F2F2F2"/>
+                    </a:solidFill>
+                  </a:tcPr>
+                </a:tc>
+                <a:tc>
+                  <a:txBody>
+                    <a:bodyPr/>
+                    <a:lstStyle/>
+                    <a:p>
+                      <a:pPr algn="l"/>
+                      <a:r>
+                        <a:rPr sz="1000" b="0">
+                          <a:solidFill>
+                            <a:srgbClr val="1D1B43"/>
+                          </a:solidFill>
+                          <a:latin typeface="Calibri"/>
+                        </a:rPr>
+                        <a:t>13/05/2026</a:t>
+                      </a:r>
+                    </a:p>
+                  </a:txBody>
+                  <a:tcPr>
+                    <a:solidFill>
+                      <a:srgbClr val="F2F2F2"/>
+                    </a:solidFill>
+                  </a:tcPr>
+                </a:tc>
+                <a:tc>
+                  <a:txBody>
+                    <a:bodyPr/>
+                    <a:lstStyle/>
+                    <a:p>
+                      <a:pPr algn="l"/>
+                      <a:r>
+                        <a:rPr sz="1000" b="0">
+                          <a:solidFill>
+                            <a:srgbClr val="1D1B43"/>
+                          </a:solidFill>
+                          <a:latin typeface="Calibri"/>
+                        </a:rPr>
+                        <a:t>FORA DO PRAZO</a:t>
+                      </a:r>
+                    </a:p>
+                  </a:txBody>
+                  <a:tcPr>
+                    <a:solidFill>
+                      <a:srgbClr val="F2F2F2"/>
+                    </a:solidFill>
+                  </a:tcPr>
+                </a:tc>
+              </a:tr>
+              <a:tr h="384048">
+                <a:tc>
+                  <a:txBody>
+                    <a:bodyPr/>
+                    <a:lstStyle/>
+                    <a:p>
+                      <a:pPr algn="l"/>
+                      <a:r>
+                        <a:rPr sz="1000" b="0">
+                          <a:solidFill>
+                            <a:srgbClr val="1D1B43"/>
+                          </a:solidFill>
+                          <a:latin typeface="Calibri"/>
+                        </a:rPr>
+                        <a:t>282987</a:t>
+                      </a:r>
+                    </a:p>
+                  </a:txBody>
+                  <a:tcPr>
+                    <a:solidFill>
+                      <a:srgbClr val="FFFFFF"/>
+                    </a:solidFill>
+                  </a:tcPr>
+                </a:tc>
+                <a:tc>
+                  <a:txBody>
+                    <a:bodyPr/>
+                    <a:lstStyle/>
+                    <a:p>
+                      <a:pPr algn="l"/>
+                      <a:r>
+                        <a:rPr sz="1000" b="0">
+                          <a:solidFill>
+                            <a:srgbClr val="1D1B43"/>
+                          </a:solidFill>
+                          <a:latin typeface="Calibri"/>
+                        </a:rPr>
+                        <a:t>ENCOPEL COMERCIO DE - SAO PAULO / SP</a:t>
+                      </a:r>
+                    </a:p>
+                  </a:txBody>
+                  <a:tcPr>
+                    <a:solidFill>
+                      <a:srgbClr val="FFFFFF"/>
+                    </a:solidFill>
+                  </a:tcPr>
+                </a:tc>
+                <a:tc>
+                  <a:txBody>
+                    <a:bodyPr/>
+                    <a:lstStyle/>
+                    <a:p>
+                      <a:pPr algn="l"/>
+                      <a:r>
+                        <a:rPr sz="1000" b="0">
+                          <a:solidFill>
+                            <a:srgbClr val="1D1B43"/>
+                          </a:solidFill>
+                          <a:latin typeface="Calibri"/>
+                        </a:rPr>
+                        <a:t>SAO PAULO/SP</a:t>
+                      </a:r>
+                    </a:p>
+                  </a:txBody>
+                  <a:tcPr>
+                    <a:solidFill>
+                      <a:srgbClr val="FFFFFF"/>
+                    </a:solidFill>
+                  </a:tcPr>
+                </a:tc>
+                <a:tc>
+                  <a:txBody>
+                    <a:bodyPr/>
+                    <a:lstStyle/>
+                    <a:p>
+                      <a:pPr algn="l"/>
+                      <a:r>
+                        <a:rPr sz="1000" b="0">
+                          <a:solidFill>
+                            <a:srgbClr val="1D1B43"/>
+                          </a:solidFill>
+                          <a:latin typeface="Calibri"/>
+                        </a:rPr>
+                        <a:t>15/05/2026</a:t>
                       </a:r>
                     </a:p>
                   </a:txBody>
@@ -5959,7 +6193,7 @@
         </p:nvGraphicFramePr>
         <p:xfrm>
           <a:off x="731520" y="1920240"/>
-          <a:ext cx="10698480" cy="3200400"/>
+          <a:ext cx="10698480" cy="3657600"/>
         </p:xfrm>
         <a:graphic>
           <a:graphicData uri="http://schemas.openxmlformats.org/drawingml/2006/table">
@@ -6129,7 +6363,7 @@
                           </a:solidFill>
                           <a:latin typeface="Calibri"/>
                         </a:rPr>
-                        <a:t>MG</a:t>
+                        <a:t>SP</a:t>
                       </a:r>
                     </a:p>
                   </a:txBody>
@@ -6152,7 +6386,7 @@
                           </a:solidFill>
                           <a:latin typeface="Calibri"/>
                         </a:rPr>
-                        <a:t>14</a:t>
+                        <a:t>66</a:t>
                       </a:r>
                     </a:p>
                   </a:txBody>
@@ -6175,7 +6409,7 @@
                           </a:solidFill>
                           <a:latin typeface="Calibri"/>
                         </a:rPr>
-                        <a:t>12</a:t>
+                        <a:t>62</a:t>
                       </a:r>
                     </a:p>
                   </a:txBody>
@@ -6198,7 +6432,7 @@
                           </a:solidFill>
                           <a:latin typeface="Calibri"/>
                         </a:rPr>
-                        <a:t>2</a:t>
+                        <a:t>4</a:t>
                       </a:r>
                     </a:p>
                   </a:txBody>
@@ -6221,7 +6455,7 @@
                           </a:solidFill>
                           <a:latin typeface="Calibri"/>
                         </a:rPr>
-                        <a:t>85.7%</a:t>
+                        <a:t>93.9%</a:t>
                       </a:r>
                     </a:p>
                   </a:txBody>
@@ -6292,7 +6526,7 @@
                           </a:solidFill>
                           <a:latin typeface="Calibri"/>
                         </a:rPr>
-                        <a:t>13</a:t>
+                        <a:t>9</a:t>
                       </a:r>
                     </a:p>
                   </a:txBody>
@@ -6315,7 +6549,7 @@
                           </a:solidFill>
                           <a:latin typeface="Calibri"/>
                         </a:rPr>
-                        <a:t>13</a:t>
+                        <a:t>9</a:t>
                       </a:r>
                     </a:p>
                   </a:txBody>
@@ -6409,7 +6643,7 @@
                           </a:solidFill>
                           <a:latin typeface="Calibri"/>
                         </a:rPr>
-                        <a:t>RJ</a:t>
+                        <a:t>MG</a:t>
                       </a:r>
                     </a:p>
                   </a:txBody>
@@ -6432,6 +6666,29 @@
                           </a:solidFill>
                           <a:latin typeface="Calibri"/>
                         </a:rPr>
+                        <a:t>8</a:t>
+                      </a:r>
+                    </a:p>
+                  </a:txBody>
+                  <a:tcPr>
+                    <a:solidFill>
+                      <a:srgbClr val="FFFFFF"/>
+                    </a:solidFill>
+                  </a:tcPr>
+                </a:tc>
+                <a:tc>
+                  <a:txBody>
+                    <a:bodyPr/>
+                    <a:lstStyle/>
+                    <a:p>
+                      <a:pPr algn="l"/>
+                      <a:r>
+                        <a:rPr sz="1000" b="0">
+                          <a:solidFill>
+                            <a:srgbClr val="1D1B43"/>
+                          </a:solidFill>
+                          <a:latin typeface="Calibri"/>
+                        </a:rPr>
                         <a:t>7</a:t>
                       </a:r>
                     </a:p>
@@ -6455,7 +6712,7 @@
                           </a:solidFill>
                           <a:latin typeface="Calibri"/>
                         </a:rPr>
-                        <a:t>7</a:t>
+                        <a:t>1</a:t>
                       </a:r>
                     </a:p>
                   </a:txBody>
@@ -6478,7 +6735,7 @@
                           </a:solidFill>
                           <a:latin typeface="Calibri"/>
                         </a:rPr>
-                        <a:t>0</a:t>
+                        <a:t>87.5%</a:t>
                       </a:r>
                     </a:p>
                   </a:txBody>
@@ -6501,30 +6758,7 @@
                           </a:solidFill>
                           <a:latin typeface="Calibri"/>
                         </a:rPr>
-                        <a:t>100.0%</a:t>
-                      </a:r>
-                    </a:p>
-                  </a:txBody>
-                  <a:tcPr>
-                    <a:solidFill>
-                      <a:srgbClr val="FFFFFF"/>
-                    </a:solidFill>
-                  </a:tcPr>
-                </a:tc>
-                <a:tc>
-                  <a:txBody>
-                    <a:bodyPr/>
-                    <a:lstStyle/>
-                    <a:p>
-                      <a:pPr algn="l"/>
-                      <a:r>
-                        <a:rPr sz="1000" b="0">
-                          <a:solidFill>
-                            <a:srgbClr val="1D1B43"/>
-                          </a:solidFill>
-                          <a:latin typeface="Calibri"/>
-                        </a:rPr>
-                        <a:t>Excelente</a:t>
+                        <a:t>Regular</a:t>
                       </a:r>
                     </a:p>
                   </a:txBody>
@@ -6572,7 +6806,7 @@
                           </a:solidFill>
                           <a:latin typeface="Calibri"/>
                         </a:rPr>
-                        <a:t>5</a:t>
+                        <a:t>4</a:t>
                       </a:r>
                     </a:p>
                   </a:txBody>
@@ -6618,7 +6852,7 @@
                           </a:solidFill>
                           <a:latin typeface="Calibri"/>
                         </a:rPr>
-                        <a:t>1</a:t>
+                        <a:t>0</a:t>
                       </a:r>
                     </a:p>
                   </a:txBody>
@@ -6641,7 +6875,7 @@
                           </a:solidFill>
                           <a:latin typeface="Calibri"/>
                         </a:rPr>
-                        <a:t>80.0%</a:t>
+                        <a:t>100.0%</a:t>
                       </a:r>
                     </a:p>
                   </a:txBody>
@@ -6664,7 +6898,7 @@
                           </a:solidFill>
                           <a:latin typeface="Calibri"/>
                         </a:rPr>
-                        <a:t>Atencao</a:t>
+                        <a:t>Excelente</a:t>
                       </a:r>
                     </a:p>
                   </a:txBody>
@@ -6689,7 +6923,7 @@
                           </a:solidFill>
                           <a:latin typeface="Calibri"/>
                         </a:rPr>
-                        <a:t>SC</a:t>
+                        <a:t>RJ</a:t>
                       </a:r>
                     </a:p>
                   </a:txBody>
@@ -6712,7 +6946,7 @@
                           </a:solidFill>
                           <a:latin typeface="Calibri"/>
                         </a:rPr>
-                        <a:t>5</a:t>
+                        <a:t>3</a:t>
                       </a:r>
                     </a:p>
                   </a:txBody>
@@ -6735,7 +6969,7 @@
                           </a:solidFill>
                           <a:latin typeface="Calibri"/>
                         </a:rPr>
-                        <a:t>5</a:t>
+                        <a:t>3</a:t>
                       </a:r>
                     </a:p>
                   </a:txBody>
@@ -6951,6 +7185,146 @@
                   <a:tcPr>
                     <a:solidFill>
                       <a:srgbClr val="F2F2F2"/>
+                    </a:solidFill>
+                  </a:tcPr>
+                </a:tc>
+              </a:tr>
+              <a:tr h="457200">
+                <a:tc>
+                  <a:txBody>
+                    <a:bodyPr/>
+                    <a:lstStyle/>
+                    <a:p>
+                      <a:pPr algn="l"/>
+                      <a:r>
+                        <a:rPr sz="1000" b="0">
+                          <a:solidFill>
+                            <a:srgbClr val="1D1B43"/>
+                          </a:solidFill>
+                          <a:latin typeface="Calibri"/>
+                        </a:rPr>
+                        <a:t>SC</a:t>
+                      </a:r>
+                    </a:p>
+                  </a:txBody>
+                  <a:tcPr>
+                    <a:solidFill>
+                      <a:srgbClr val="FFFFFF"/>
+                    </a:solidFill>
+                  </a:tcPr>
+                </a:tc>
+                <a:tc>
+                  <a:txBody>
+                    <a:bodyPr/>
+                    <a:lstStyle/>
+                    <a:p>
+                      <a:pPr algn="l"/>
+                      <a:r>
+                        <a:rPr sz="1000" b="0">
+                          <a:solidFill>
+                            <a:srgbClr val="1D1B43"/>
+                          </a:solidFill>
+                          <a:latin typeface="Calibri"/>
+                        </a:rPr>
+                        <a:t>2</a:t>
+                      </a:r>
+                    </a:p>
+                  </a:txBody>
+                  <a:tcPr>
+                    <a:solidFill>
+                      <a:srgbClr val="FFFFFF"/>
+                    </a:solidFill>
+                  </a:tcPr>
+                </a:tc>
+                <a:tc>
+                  <a:txBody>
+                    <a:bodyPr/>
+                    <a:lstStyle/>
+                    <a:p>
+                      <a:pPr algn="l"/>
+                      <a:r>
+                        <a:rPr sz="1000" b="0">
+                          <a:solidFill>
+                            <a:srgbClr val="1D1B43"/>
+                          </a:solidFill>
+                          <a:latin typeface="Calibri"/>
+                        </a:rPr>
+                        <a:t>2</a:t>
+                      </a:r>
+                    </a:p>
+                  </a:txBody>
+                  <a:tcPr>
+                    <a:solidFill>
+                      <a:srgbClr val="FFFFFF"/>
+                    </a:solidFill>
+                  </a:tcPr>
+                </a:tc>
+                <a:tc>
+                  <a:txBody>
+                    <a:bodyPr/>
+                    <a:lstStyle/>
+                    <a:p>
+                      <a:pPr algn="l"/>
+                      <a:r>
+                        <a:rPr sz="1000" b="0">
+                          <a:solidFill>
+                            <a:srgbClr val="1D1B43"/>
+                          </a:solidFill>
+                          <a:latin typeface="Calibri"/>
+                        </a:rPr>
+                        <a:t>0</a:t>
+                      </a:r>
+                    </a:p>
+                  </a:txBody>
+                  <a:tcPr>
+                    <a:solidFill>
+                      <a:srgbClr val="FFFFFF"/>
+                    </a:solidFill>
+                  </a:tcPr>
+                </a:tc>
+                <a:tc>
+                  <a:txBody>
+                    <a:bodyPr/>
+                    <a:lstStyle/>
+                    <a:p>
+                      <a:pPr algn="l"/>
+                      <a:r>
+                        <a:rPr sz="1000" b="0">
+                          <a:solidFill>
+                            <a:srgbClr val="1D1B43"/>
+                          </a:solidFill>
+                          <a:latin typeface="Calibri"/>
+                        </a:rPr>
+                        <a:t>100.0%</a:t>
+                      </a:r>
+                    </a:p>
+                  </a:txBody>
+                  <a:tcPr>
+                    <a:solidFill>
+                      <a:srgbClr val="FFFFFF"/>
+                    </a:solidFill>
+                  </a:tcPr>
+                </a:tc>
+                <a:tc>
+                  <a:txBody>
+                    <a:bodyPr/>
+                    <a:lstStyle/>
+                    <a:p>
+                      <a:pPr algn="l"/>
+                      <a:r>
+                        <a:rPr sz="1000" b="0">
+                          <a:solidFill>
+                            <a:srgbClr val="1D1B43"/>
+                          </a:solidFill>
+                          <a:latin typeface="Calibri"/>
+                        </a:rPr>
+                        <a:t>Excelente</a:t>
+                      </a:r>
+                    </a:p>
+                  </a:txBody>
+                  <a:tcPr>
+                    <a:solidFill>
+                      <a:srgbClr val="FFFFFF"/>
                     </a:solidFill>
                   </a:tcPr>
                 </a:tc>
@@ -7039,7 +7413,7 @@
                 </a:solidFill>
                 <a:latin typeface="Calibri"/>
               </a:rPr>
-              <a:t>TOP DESTINATARIOS (18 pontos)</a:t>
+              <a:t>TOP DESTINATARIOS (19 pontos)</a:t>
             </a:r>
           </a:p>
         </p:txBody>
@@ -7314,7 +7688,7 @@
                           </a:solidFill>
                           <a:latin typeface="Calibri"/>
                         </a:rPr>
-                        <a:t>BEM ESTAR LONDRINA L - LONDRINA / PR</a:t>
+                        <a:t>ABECOM ROLAMENTOS E - SAO PAULO / SP</a:t>
                       </a:r>
                     </a:p>
                   </a:txBody>
@@ -7337,7 +7711,7 @@
                           </a:solidFill>
                           <a:latin typeface="Calibri"/>
                         </a:rPr>
-                        <a:t>5</a:t>
+                        <a:t>25</a:t>
                       </a:r>
                     </a:p>
                   </a:txBody>
@@ -7360,7 +7734,7 @@
                           </a:solidFill>
                           <a:latin typeface="Calibri"/>
                         </a:rPr>
-                        <a:t>5</a:t>
+                        <a:t>24</a:t>
                       </a:r>
                     </a:p>
                   </a:txBody>
@@ -7383,7 +7757,7 @@
                           </a:solidFill>
                           <a:latin typeface="Calibri"/>
                         </a:rPr>
-                        <a:t>0</a:t>
+                        <a:t>1</a:t>
                       </a:r>
                     </a:p>
                   </a:txBody>
@@ -7406,7 +7780,7 @@
                           </a:solidFill>
                           <a:latin typeface="Calibri"/>
                         </a:rPr>
-                        <a:t>100.0%</a:t>
+                        <a:t>96.0%</a:t>
                       </a:r>
                     </a:p>
                   </a:txBody>
@@ -7477,7 +7851,7 @@
                           </a:solidFill>
                           <a:latin typeface="Calibri"/>
                         </a:rPr>
-                        <a:t>MINASFAST TECNOLOGIA - CONTAGEM / MG</a:t>
+                        <a:t>ENCOPEL COMERCIO DE - SAO PAULO / SP</a:t>
                       </a:r>
                     </a:p>
                   </a:txBody>
@@ -7500,7 +7874,7 @@
                           </a:solidFill>
                           <a:latin typeface="Calibri"/>
                         </a:rPr>
-                        <a:t>5</a:t>
+                        <a:t>21</a:t>
                       </a:r>
                     </a:p>
                   </a:txBody>
@@ -7523,7 +7897,7 @@
                           </a:solidFill>
                           <a:latin typeface="Calibri"/>
                         </a:rPr>
-                        <a:t>4</a:t>
+                        <a:t>19</a:t>
                       </a:r>
                     </a:p>
                   </a:txBody>
@@ -7546,7 +7920,7 @@
                           </a:solidFill>
                           <a:latin typeface="Calibri"/>
                         </a:rPr>
-                        <a:t>1</a:t>
+                        <a:t>2</a:t>
                       </a:r>
                     </a:p>
                   </a:txBody>
@@ -7569,7 +7943,7 @@
                           </a:solidFill>
                           <a:latin typeface="Calibri"/>
                         </a:rPr>
-                        <a:t>80.0%</a:t>
+                        <a:t>90.5%</a:t>
                       </a:r>
                     </a:p>
                   </a:txBody>
@@ -7592,7 +7966,7 @@
                           </a:solidFill>
                           <a:latin typeface="Calibri"/>
                         </a:rPr>
-                        <a:t>Atencao</a:t>
+                        <a:t>Regular</a:t>
                       </a:r>
                     </a:p>
                   </a:txBody>
@@ -7640,7 +8014,7 @@
                           </a:solidFill>
                           <a:latin typeface="Calibri"/>
                         </a:rPr>
-                        <a:t>VIP REPAIR CENTER AS - CURITIBA / PR</a:t>
+                        <a:t>IRSA ROLAMENTOS S/A - SANTO ANDRE / SP</a:t>
                       </a:r>
                     </a:p>
                   </a:txBody>
@@ -7663,7 +8037,7 @@
                           </a:solidFill>
                           <a:latin typeface="Calibri"/>
                         </a:rPr>
-                        <a:t>4</a:t>
+                        <a:t>14</a:t>
                       </a:r>
                     </a:p>
                   </a:txBody>
@@ -7686,7 +8060,7 @@
                           </a:solidFill>
                           <a:latin typeface="Calibri"/>
                         </a:rPr>
-                        <a:t>4</a:t>
+                        <a:t>13</a:t>
                       </a:r>
                     </a:p>
                   </a:txBody>
@@ -7709,7 +8083,7 @@
                           </a:solidFill>
                           <a:latin typeface="Calibri"/>
                         </a:rPr>
-                        <a:t>0</a:t>
+                        <a:t>1</a:t>
                       </a:r>
                     </a:p>
                   </a:txBody>
@@ -7732,7 +8106,7 @@
                           </a:solidFill>
                           <a:latin typeface="Calibri"/>
                         </a:rPr>
-                        <a:t>100.0%</a:t>
+                        <a:t>92.9%</a:t>
                       </a:r>
                     </a:p>
                   </a:txBody>
@@ -7755,7 +8129,7 @@
                           </a:solidFill>
                           <a:latin typeface="Calibri"/>
                         </a:rPr>
-                        <a:t>Excelente</a:t>
+                        <a:t>Regular</a:t>
                       </a:r>
                     </a:p>
                   </a:txBody>
@@ -7803,7 +8177,7 @@
                           </a:solidFill>
                           <a:latin typeface="Calibri"/>
                         </a:rPr>
-                        <a:t>EXCELLENCE ELETRODOM - ARAPONGAS / PR</a:t>
+                        <a:t>NORPEM COMERCIAL LTD - SAO PAULO / SP</a:t>
                       </a:r>
                     </a:p>
                   </a:txBody>
@@ -7826,7 +8200,7 @@
                           </a:solidFill>
                           <a:latin typeface="Calibri"/>
                         </a:rPr>
-                        <a:t>4</a:t>
+                        <a:t>6</a:t>
                       </a:r>
                     </a:p>
                   </a:txBody>
@@ -7849,7 +8223,7 @@
                           </a:solidFill>
                           <a:latin typeface="Calibri"/>
                         </a:rPr>
-                        <a:t>4</a:t>
+                        <a:t>6</a:t>
                       </a:r>
                     </a:p>
                   </a:txBody>
@@ -7966,7 +8340,7 @@
                           </a:solidFill>
                           <a:latin typeface="Calibri"/>
                         </a:rPr>
-                        <a:t>GMX TECNOLOGIA E SER - RIO DE JANEIRO / RJ</a:t>
+                        <a:t>BEM ESTAR LONDRINA L - LONDRINA / PR</a:t>
                       </a:r>
                     </a:p>
                   </a:txBody>
@@ -7989,7 +8363,7 @@
                           </a:solidFill>
                           <a:latin typeface="Calibri"/>
                         </a:rPr>
-                        <a:t>4</a:t>
+                        <a:t>5</a:t>
                       </a:r>
                     </a:p>
                   </a:txBody>
@@ -8012,7 +8386,7 @@
                           </a:solidFill>
                           <a:latin typeface="Calibri"/>
                         </a:rPr>
-                        <a:t>4</a:t>
+                        <a:t>5</a:t>
                       </a:r>
                     </a:p>
                   </a:txBody>
@@ -8129,7 +8503,7 @@
                           </a:solidFill>
                           <a:latin typeface="Calibri"/>
                         </a:rPr>
-                        <a:t>GLOBAL EXPRESS ASSIS - UBERLANDIA / MG</a:t>
+                        <a:t>VIP REPAIR CENTER AS - CURITIBA / PR</a:t>
                       </a:r>
                     </a:p>
                   </a:txBody>
@@ -8292,7 +8666,7 @@
                           </a:solidFill>
                           <a:latin typeface="Calibri"/>
                         </a:rPr>
-                        <a:t>FIX IT ASSISTENCIA E - PORTO ALEGRE / RS</a:t>
+                        <a:t>ELETRORARO COM DE EL - BELO HORIZONTE / MG</a:t>
                       </a:r>
                     </a:p>
                   </a:txBody>
@@ -8338,7 +8712,7 @@
                           </a:solidFill>
                           <a:latin typeface="Calibri"/>
                         </a:rPr>
-                        <a:t>2</a:t>
+                        <a:t>3</a:t>
                       </a:r>
                     </a:p>
                   </a:txBody>
@@ -8361,7 +8735,7 @@
                           </a:solidFill>
                           <a:latin typeface="Calibri"/>
                         </a:rPr>
-                        <a:t>1</a:t>
+                        <a:t>0</a:t>
                       </a:r>
                     </a:p>
                   </a:txBody>
@@ -8384,7 +8758,7 @@
                           </a:solidFill>
                           <a:latin typeface="Calibri"/>
                         </a:rPr>
-                        <a:t>66.7%</a:t>
+                        <a:t>100.0%</a:t>
                       </a:r>
                     </a:p>
                   </a:txBody>
@@ -8407,7 +8781,7 @@
                           </a:solidFill>
                           <a:latin typeface="Calibri"/>
                         </a:rPr>
-                        <a:t>Atencao</a:t>
+                        <a:t>Excelente</a:t>
                       </a:r>
                     </a:p>
                   </a:txBody>
@@ -8455,7 +8829,7 @@
                           </a:solidFill>
                           <a:latin typeface="Calibri"/>
                         </a:rPr>
-                        <a:t>KNOLL REPARACAO E MA - FLORIANOPOLIS / SC</a:t>
+                        <a:t>TXM VITORIA LTDA - VITORIA / ES</a:t>
                       </a:r>
                     </a:p>
                   </a:txBody>
@@ -8478,7 +8852,7 @@
                           </a:solidFill>
                           <a:latin typeface="Calibri"/>
                         </a:rPr>
-                        <a:t>3</a:t>
+                        <a:t>2</a:t>
                       </a:r>
                     </a:p>
                   </a:txBody>
@@ -8501,7 +8875,7 @@
                           </a:solidFill>
                           <a:latin typeface="Calibri"/>
                         </a:rPr>
-                        <a:t>3</a:t>
+                        <a:t>2</a:t>
                       </a:r>
                     </a:p>
                   </a:txBody>
@@ -8618,7 +8992,7 @@
                           </a:solidFill>
                           <a:latin typeface="Calibri"/>
                         </a:rPr>
-                        <a:t>ELETRORARO COM DE EL - BELO HORIZONTE / MG</a:t>
+                        <a:t>GLOBAL EXPRESS ASSIS - UBERLANDIA / MG</a:t>
                       </a:r>
                     </a:p>
                   </a:txBody>
@@ -8641,7 +9015,7 @@
                           </a:solidFill>
                           <a:latin typeface="Calibri"/>
                         </a:rPr>
-                        <a:t>3</a:t>
+                        <a:t>2</a:t>
                       </a:r>
                     </a:p>
                   </a:txBody>
@@ -8687,7 +9061,7 @@
                           </a:solidFill>
                           <a:latin typeface="Calibri"/>
                         </a:rPr>
-                        <a:t>1</a:t>
+                        <a:t>0</a:t>
                       </a:r>
                     </a:p>
                   </a:txBody>
@@ -8710,7 +9084,7 @@
                           </a:solidFill>
                           <a:latin typeface="Calibri"/>
                         </a:rPr>
-                        <a:t>66.7%</a:t>
+                        <a:t>100.0%</a:t>
                       </a:r>
                     </a:p>
                   </a:txBody>
@@ -8733,7 +9107,7 @@
                           </a:solidFill>
                           <a:latin typeface="Calibri"/>
                         </a:rPr>
-                        <a:t>Atencao</a:t>
+                        <a:t>Excelente</a:t>
                       </a:r>
                     </a:p>
                   </a:txBody>
@@ -8781,7 +9155,7 @@
                           </a:solidFill>
                           <a:latin typeface="Calibri"/>
                         </a:rPr>
-                        <a:t>V CELL COMERCIO E SE - DUQUE DE CAXIAS / RJ</a:t>
+                        <a:t>INFINITY ASSISTENCIA - JUIZ DE FORA / MG</a:t>
                       </a:r>
                     </a:p>
                   </a:txBody>
@@ -8827,7 +9201,7 @@
                           </a:solidFill>
                           <a:latin typeface="Calibri"/>
                         </a:rPr>
-                        <a:t>2</a:t>
+                        <a:t>1</a:t>
                       </a:r>
                     </a:p>
                   </a:txBody>
@@ -8850,7 +9224,7 @@
                           </a:solidFill>
                           <a:latin typeface="Calibri"/>
                         </a:rPr>
-                        <a:t>0</a:t>
+                        <a:t>1</a:t>
                       </a:r>
                     </a:p>
                   </a:txBody>
@@ -8873,7 +9247,7 @@
                           </a:solidFill>
                           <a:latin typeface="Calibri"/>
                         </a:rPr>
-                        <a:t>100.0%</a:t>
+                        <a:t>50.0%</a:t>
                       </a:r>
                     </a:p>
                   </a:txBody>
@@ -8896,7 +9270,7 @@
                           </a:solidFill>
                           <a:latin typeface="Calibri"/>
                         </a:rPr>
-                        <a:t>Excelente</a:t>
+                        <a:t>Atencao</a:t>
                       </a:r>
                     </a:p>
                   </a:txBody>
@@ -8944,7 +9318,7 @@
                           </a:solidFill>
                           <a:latin typeface="Calibri"/>
                         </a:rPr>
-                        <a:t>INFINITY ASSISTENCIA - JUIZ DE FORA / MG</a:t>
+                        <a:t>FIX IT ASSISTENCIA E - PORTO ALEGRE / RS</a:t>
                       </a:r>
                     </a:p>
                   </a:txBody>
@@ -9433,7 +9807,7 @@
                           </a:solidFill>
                           <a:latin typeface="Calibri"/>
                         </a:rPr>
-                        <a:t>GROUP GLOBAL LTDA - MONTES CLAROS / MG</a:t>
+                        <a:t>GMX TECNOLOGIA E SER - RIO DE JANEIRO / RJ</a:t>
                       </a:r>
                     </a:p>
                   </a:txBody>

--- a/TECADI_ARMAZENS_GERAIS_LTDA_(I.pptx
+++ b/TECADI_ARMAZENS_GERAIS_LTDA_(I.pptx
@@ -11,7 +11,6 @@
     <p:sldId id="259" r:id="rId10"/>
     <p:sldId id="260" r:id="rId11"/>
     <p:sldId id="261" r:id="rId12"/>
-    <p:sldId id="262" r:id="rId13"/>
   </p:sldIdLst>
   <p:sldSz cx="12188952" cy="6858000" type="screen4x3"/>
   <p:notesSz cx="6858000" cy="9144000"/>
@@ -143,29 +142,23 @@
           </c:spPr>
           <c:cat>
             <c:strRef>
-              <c:f>Sheet1!$A$2:$A$3</c:f>
+              <c:f>Sheet1!$A$2:$A$2</c:f>
               <c:strCache>
-                <c:ptCount val="2"/>
+                <c:ptCount val="1"/>
                 <c:pt idx="0">
                   <c:v>Abril 2026</c:v>
-                </c:pt>
-                <c:pt idx="1">
-                  <c:v>Maio 2026</c:v>
                 </c:pt>
               </c:strCache>
             </c:strRef>
           </c:cat>
           <c:val>
             <c:numRef>
-              <c:f>Sheet1!$B$2:$B$3</c:f>
+              <c:f>Sheet1!$B$2:$B$2</c:f>
               <c:numCache>
                 <c:formatCode>General</c:formatCode>
-                <c:ptCount val="2"/>
+                <c:ptCount val="1"/>
                 <c:pt idx="0">
-                  <c:v>47</c:v>
-                </c:pt>
-                <c:pt idx="1">
-                  <c:v>89</c:v>
+                  <c:v>51</c:v>
                 </c:pt>
               </c:numCache>
             </c:numRef>
@@ -192,29 +185,23 @@
           </c:spPr>
           <c:cat>
             <c:strRef>
-              <c:f>Sheet1!$A$2:$A$3</c:f>
+              <c:f>Sheet1!$A$2:$A$2</c:f>
               <c:strCache>
-                <c:ptCount val="2"/>
+                <c:ptCount val="1"/>
                 <c:pt idx="0">
                   <c:v>Abril 2026</c:v>
-                </c:pt>
-                <c:pt idx="1">
-                  <c:v>Maio 2026</c:v>
                 </c:pt>
               </c:strCache>
             </c:strRef>
           </c:cat>
           <c:val>
             <c:numRef>
-              <c:f>Sheet1!$C$2:$C$3</c:f>
+              <c:f>Sheet1!$C$2:$C$2</c:f>
               <c:numCache>
                 <c:formatCode>General</c:formatCode>
-                <c:ptCount val="2"/>
+                <c:ptCount val="1"/>
                 <c:pt idx="0">
                   <c:v>0</c:v>
-                </c:pt>
-                <c:pt idx="1">
-                  <c:v>5</c:v>
                 </c:pt>
               </c:numCache>
             </c:numRef>
@@ -3387,7 +3374,7 @@
                 </a:solidFill>
                 <a:latin typeface="Calibri"/>
               </a:rPr>
-              <a:t>INDICADORES MAIO 2026</a:t>
+              <a:t>INDICADORES ABRIL 2026</a:t>
             </a:r>
           </a:p>
         </p:txBody>
@@ -3494,14 +3481,13 @@
           <a:p>
             <a:pPr algn="ctr"/>
             <a:r>
-              <a:rPr sz="1600" b="1">
+              <a:rPr sz="1400" b="1">
                 <a:solidFill>
                   <a:srgbClr val="FFFFFF"/>
                 </a:solidFill>
                 <a:latin typeface="Calibri"/>
               </a:rPr>
-              <a:t>Nossa rota e ir alem das
-entregas!</a:t>
+              <a:t>Nossa rota e ir alem das entregas!</a:t>
             </a:r>
           </a:p>
         </p:txBody>
@@ -3709,7 +3695,7 @@
                 </a:solidFill>
                 <a:latin typeface="Calibri"/>
               </a:rPr>
-              <a:t>94</a:t>
+              <a:t>51</a:t>
             </a:r>
           </a:p>
         </p:txBody>
@@ -3824,7 +3810,7 @@
                 </a:solidFill>
                 <a:latin typeface="Calibri"/>
               </a:rPr>
-              <a:t>89</a:t>
+              <a:t>51</a:t>
             </a:r>
           </a:p>
         </p:txBody>
@@ -3935,11 +3921,11 @@
             <a:r>
               <a:rPr sz="2800" b="1">
                 <a:solidFill>
-                  <a:srgbClr val="EF4444"/>
+                  <a:srgbClr val="10B981"/>
                 </a:solidFill>
                 <a:latin typeface="Calibri"/>
               </a:rPr>
-              <a:t>5</a:t>
+              <a:t>0</a:t>
             </a:r>
           </a:p>
         </p:txBody>
@@ -4050,11 +4036,11 @@
             <a:r>
               <a:rPr sz="2800" b="1">
                 <a:solidFill>
-                  <a:srgbClr val="F59E0B"/>
+                  <a:srgbClr val="10B981"/>
                 </a:solidFill>
                 <a:latin typeface="Calibri"/>
               </a:rPr>
-              <a:t>94.7%</a:t>
+              <a:t>100.0%</a:t>
             </a:r>
           </a:p>
         </p:txBody>
@@ -4155,30 +4141,30 @@
                           </a:solidFill>
                           <a:latin typeface="Calibri"/>
                         </a:rPr>
+                        <a:t>Marco 2026</a:t>
+                      </a:r>
+                    </a:p>
+                  </a:txBody>
+                  <a:tcPr>
+                    <a:solidFill>
+                      <a:srgbClr val="1D1B43"/>
+                    </a:solidFill>
+                  </a:tcPr>
+                </a:tc>
+                <a:tc>
+                  <a:txBody>
+                    <a:bodyPr/>
+                    <a:lstStyle/>
+                    <a:p>
+                      <a:pPr algn="ctr"/>
+                      <a:r>
+                        <a:rPr sz="1100" b="1">
+                          <a:solidFill>
+                            <a:srgbClr val="FFFFFF"/>
+                          </a:solidFill>
+                          <a:latin typeface="Calibri"/>
+                        </a:rPr>
                         <a:t>Abril 2026</a:t>
-                      </a:r>
-                    </a:p>
-                  </a:txBody>
-                  <a:tcPr>
-                    <a:solidFill>
-                      <a:srgbClr val="1D1B43"/>
-                    </a:solidFill>
-                  </a:tcPr>
-                </a:tc>
-                <a:tc>
-                  <a:txBody>
-                    <a:bodyPr/>
-                    <a:lstStyle/>
-                    <a:p>
-                      <a:pPr algn="ctr"/>
-                      <a:r>
-                        <a:rPr sz="1100" b="1">
-                          <a:solidFill>
-                            <a:srgbClr val="FFFFFF"/>
-                          </a:solidFill>
-                          <a:latin typeface="Calibri"/>
-                        </a:rPr>
-                        <a:t>Maio 2026</a:t>
                       </a:r>
                     </a:p>
                   </a:txBody>
@@ -4249,7 +4235,7 @@
                           </a:solidFill>
                           <a:latin typeface="Calibri"/>
                         </a:rPr>
-                        <a:t>47</a:t>
+                        <a:t>-</a:t>
                       </a:r>
                     </a:p>
                   </a:txBody>
@@ -4272,7 +4258,7 @@
                           </a:solidFill>
                           <a:latin typeface="Calibri"/>
                         </a:rPr>
-                        <a:t>94</a:t>
+                        <a:t>51</a:t>
                       </a:r>
                     </a:p>
                   </a:txBody>
@@ -4295,7 +4281,7 @@
                           </a:solidFill>
                           <a:latin typeface="Calibri"/>
                         </a:rPr>
-                        <a:t>+ 47</a:t>
+                        <a:t>-</a:t>
                       </a:r>
                     </a:p>
                   </a:txBody>
@@ -4343,7 +4329,7 @@
                           </a:solidFill>
                           <a:latin typeface="Calibri"/>
                         </a:rPr>
-                        <a:t>47</a:t>
+                        <a:t>-</a:t>
                       </a:r>
                     </a:p>
                   </a:txBody>
@@ -4366,7 +4352,7 @@
                           </a:solidFill>
                           <a:latin typeface="Calibri"/>
                         </a:rPr>
-                        <a:t>89</a:t>
+                        <a:t>51</a:t>
                       </a:r>
                     </a:p>
                   </a:txBody>
@@ -4389,7 +4375,7 @@
                           </a:solidFill>
                           <a:latin typeface="Calibri"/>
                         </a:rPr>
-                        <a:t>+ 42</a:t>
+                        <a:t>-</a:t>
                       </a:r>
                     </a:p>
                   </a:txBody>
@@ -4437,6 +4423,29 @@
                           </a:solidFill>
                           <a:latin typeface="Calibri"/>
                         </a:rPr>
+                        <a:t>-</a:t>
+                      </a:r>
+                    </a:p>
+                  </a:txBody>
+                  <a:tcPr>
+                    <a:solidFill>
+                      <a:srgbClr val="FFFFFF"/>
+                    </a:solidFill>
+                  </a:tcPr>
+                </a:tc>
+                <a:tc>
+                  <a:txBody>
+                    <a:bodyPr/>
+                    <a:lstStyle/>
+                    <a:p>
+                      <a:pPr algn="l"/>
+                      <a:r>
+                        <a:rPr sz="1000" b="0">
+                          <a:solidFill>
+                            <a:srgbClr val="1D1B43"/>
+                          </a:solidFill>
+                          <a:latin typeface="Calibri"/>
+                        </a:rPr>
                         <a:t>0</a:t>
                       </a:r>
                     </a:p>
@@ -4460,30 +4469,7 @@
                           </a:solidFill>
                           <a:latin typeface="Calibri"/>
                         </a:rPr>
-                        <a:t>5</a:t>
-                      </a:r>
-                    </a:p>
-                  </a:txBody>
-                  <a:tcPr>
-                    <a:solidFill>
-                      <a:srgbClr val="FFFFFF"/>
-                    </a:solidFill>
-                  </a:tcPr>
-                </a:tc>
-                <a:tc>
-                  <a:txBody>
-                    <a:bodyPr/>
-                    <a:lstStyle/>
-                    <a:p>
-                      <a:pPr algn="l"/>
-                      <a:r>
-                        <a:rPr sz="1000" b="0">
-                          <a:solidFill>
-                            <a:srgbClr val="1D1B43"/>
-                          </a:solidFill>
-                          <a:latin typeface="Calibri"/>
-                        </a:rPr>
-                        <a:t>+ 5</a:t>
+                        <a:t>-</a:t>
                       </a:r>
                     </a:p>
                   </a:txBody>
@@ -4531,6 +4517,29 @@
                           </a:solidFill>
                           <a:latin typeface="Calibri"/>
                         </a:rPr>
+                        <a:t>-</a:t>
+                      </a:r>
+                    </a:p>
+                  </a:txBody>
+                  <a:tcPr>
+                    <a:solidFill>
+                      <a:srgbClr val="F2F2F2"/>
+                    </a:solidFill>
+                  </a:tcPr>
+                </a:tc>
+                <a:tc>
+                  <a:txBody>
+                    <a:bodyPr/>
+                    <a:lstStyle/>
+                    <a:p>
+                      <a:pPr algn="l"/>
+                      <a:r>
+                        <a:rPr sz="1000" b="0">
+                          <a:solidFill>
+                            <a:srgbClr val="1D1B43"/>
+                          </a:solidFill>
+                          <a:latin typeface="Calibri"/>
+                        </a:rPr>
                         <a:t>100.0%</a:t>
                       </a:r>
                     </a:p>
@@ -4554,30 +4563,7 @@
                           </a:solidFill>
                           <a:latin typeface="Calibri"/>
                         </a:rPr>
-                        <a:t>94.7%</a:t>
-                      </a:r>
-                    </a:p>
-                  </a:txBody>
-                  <a:tcPr>
-                    <a:solidFill>
-                      <a:srgbClr val="F2F2F2"/>
-                    </a:solidFill>
-                  </a:tcPr>
-                </a:tc>
-                <a:tc>
-                  <a:txBody>
-                    <a:bodyPr/>
-                    <a:lstStyle/>
-                    <a:p>
-                      <a:pPr algn="l"/>
-                      <a:r>
-                        <a:rPr sz="1000" b="0">
-                          <a:solidFill>
-                            <a:srgbClr val="1D1B43"/>
-                          </a:solidFill>
-                          <a:latin typeface="Calibri"/>
-                        </a:rPr>
-                        <a:t>- 5.3pp</a:t>
+                        <a:t>-</a:t>
                       </a:r>
                     </a:p>
                   </a:txBody>
@@ -4748,7 +4734,7 @@
         </p:nvGraphicFramePr>
         <p:xfrm>
           <a:off x="7955279" y="2286000"/>
-          <a:ext cx="4480560" cy="1316736"/>
+          <a:ext cx="4480560" cy="877824"/>
         </p:xfrm>
         <a:graphic>
           <a:graphicData uri="http://schemas.openxmlformats.org/drawingml/2006/table">
@@ -4917,7 +4903,7 @@
                           </a:solidFill>
                           <a:latin typeface="Calibri"/>
                         </a:rPr>
-                        <a:t>47</a:t>
+                        <a:t>51</a:t>
                       </a:r>
                     </a:p>
                   </a:txBody>
@@ -4940,7 +4926,7 @@
                           </a:solidFill>
                           <a:latin typeface="Calibri"/>
                         </a:rPr>
-                        <a:t>47</a:t>
+                        <a:t>51</a:t>
                       </a:r>
                     </a:p>
                   </a:txBody>
@@ -4993,123 +4979,6 @@
                   <a:tcPr>
                     <a:solidFill>
                       <a:srgbClr val="FFFFFF"/>
-                    </a:solidFill>
-                  </a:tcPr>
-                </a:tc>
-              </a:tr>
-              <a:tr h="438912">
-                <a:tc>
-                  <a:txBody>
-                    <a:bodyPr/>
-                    <a:lstStyle/>
-                    <a:p>
-                      <a:pPr algn="l"/>
-                      <a:r>
-                        <a:rPr sz="1000" b="0">
-                          <a:solidFill>
-                            <a:srgbClr val="1D1B43"/>
-                          </a:solidFill>
-                          <a:latin typeface="Calibri"/>
-                        </a:rPr>
-                        <a:t>Maio 2026</a:t>
-                      </a:r>
-                    </a:p>
-                  </a:txBody>
-                  <a:tcPr>
-                    <a:solidFill>
-                      <a:srgbClr val="F2F2F2"/>
-                    </a:solidFill>
-                  </a:tcPr>
-                </a:tc>
-                <a:tc>
-                  <a:txBody>
-                    <a:bodyPr/>
-                    <a:lstStyle/>
-                    <a:p>
-                      <a:pPr algn="l"/>
-                      <a:r>
-                        <a:rPr sz="1000" b="0">
-                          <a:solidFill>
-                            <a:srgbClr val="1D1B43"/>
-                          </a:solidFill>
-                          <a:latin typeface="Calibri"/>
-                        </a:rPr>
-                        <a:t>94</a:t>
-                      </a:r>
-                    </a:p>
-                  </a:txBody>
-                  <a:tcPr>
-                    <a:solidFill>
-                      <a:srgbClr val="F2F2F2"/>
-                    </a:solidFill>
-                  </a:tcPr>
-                </a:tc>
-                <a:tc>
-                  <a:txBody>
-                    <a:bodyPr/>
-                    <a:lstStyle/>
-                    <a:p>
-                      <a:pPr algn="l"/>
-                      <a:r>
-                        <a:rPr sz="1000" b="0">
-                          <a:solidFill>
-                            <a:srgbClr val="1D1B43"/>
-                          </a:solidFill>
-                          <a:latin typeface="Calibri"/>
-                        </a:rPr>
-                        <a:t>89</a:t>
-                      </a:r>
-                    </a:p>
-                  </a:txBody>
-                  <a:tcPr>
-                    <a:solidFill>
-                      <a:srgbClr val="F2F2F2"/>
-                    </a:solidFill>
-                  </a:tcPr>
-                </a:tc>
-                <a:tc>
-                  <a:txBody>
-                    <a:bodyPr/>
-                    <a:lstStyle/>
-                    <a:p>
-                      <a:pPr algn="l"/>
-                      <a:r>
-                        <a:rPr sz="1000" b="0">
-                          <a:solidFill>
-                            <a:srgbClr val="1D1B43"/>
-                          </a:solidFill>
-                          <a:latin typeface="Calibri"/>
-                        </a:rPr>
-                        <a:t>5</a:t>
-                      </a:r>
-                    </a:p>
-                  </a:txBody>
-                  <a:tcPr>
-                    <a:solidFill>
-                      <a:srgbClr val="F2F2F2"/>
-                    </a:solidFill>
-                  </a:tcPr>
-                </a:tc>
-                <a:tc>
-                  <a:txBody>
-                    <a:bodyPr/>
-                    <a:lstStyle/>
-                    <a:p>
-                      <a:pPr algn="l"/>
-                      <a:r>
-                        <a:rPr sz="1000" b="0">
-                          <a:solidFill>
-                            <a:srgbClr val="1D1B43"/>
-                          </a:solidFill>
-                          <a:latin typeface="Calibri"/>
-                        </a:rPr>
-                        <a:t>94.7%</a:t>
-                      </a:r>
-                    </a:p>
-                  </a:txBody>
-                  <a:tcPr>
-                    <a:solidFill>
-                      <a:srgbClr val="F2F2F2"/>
                     </a:solidFill>
                   </a:tcPr>
                 </a:tc>
@@ -5191,7 +5060,7 @@
                 </a:solidFill>
                 <a:latin typeface="Calibri"/>
               </a:rPr>
-              <a:t>PERFORMANCE: 94.7% - REGULAR</a:t>
+              <a:t>PERFORMANCE: 100.0% - EXCELENTE</a:t>
             </a:r>
           </a:p>
         </p:txBody>
@@ -5255,7 +5124,7 @@
         <p:spPr>
           <a:xfrm>
             <a:off x="749808" y="502920"/>
-            <a:ext cx="10058400" cy="914400"/>
+            <a:ext cx="9144000" cy="914400"/>
           </a:xfrm>
           <a:prstGeom prst="rect">
             <a:avLst/>
@@ -5270,13 +5139,13 @@
           <a:p>
             <a:pPr algn="l"/>
             <a:r>
-              <a:rPr sz="3200" b="1">
+              <a:rPr sz="4000" b="1">
                 <a:solidFill>
                   <a:srgbClr val="F97316"/>
                 </a:solidFill>
                 <a:latin typeface="Calibri"/>
               </a:rPr>
-              <a:t>OCORRENCIAS FORA DO PRAZO (5)</a:t>
+              <a:t>PERFORMANCE POR UF</a:t>
             </a:r>
           </a:p>
         </p:txBody>
@@ -5289,7 +5158,7 @@
         </p:nvSpPr>
         <p:spPr>
           <a:xfrm>
-            <a:off x="749808" y="1600200"/>
+            <a:off x="749808" y="1719072"/>
             <a:ext cx="10424160" cy="36576"/>
           </a:xfrm>
           <a:prstGeom prst="rect">
@@ -5333,8 +5202,8 @@
           <p:nvPr/>
         </p:nvGraphicFramePr>
         <p:xfrm>
-          <a:off x="457200" y="1828800"/>
-          <a:ext cx="11429999" cy="2304288"/>
+          <a:off x="731520" y="1920240"/>
+          <a:ext cx="10698480" cy="3200400"/>
         </p:xfrm>
         <a:graphic>
           <a:graphicData uri="http://schemas.openxmlformats.org/drawingml/2006/table">
@@ -5343,13 +5212,14 @@
                 <a:tableStyleId>{5C22544A-7EE6-4342-B048-85BDC9FD1C3A}</a:tableStyleId>
               </a:tblPr>
               <a:tblGrid>
-                <a:gridCol w="1280160"/>
-                <a:gridCol w="3749039"/>
-                <a:gridCol w="2103120"/>
+                <a:gridCol w="1097280"/>
+                <a:gridCol w="1645920"/>
+                <a:gridCol w="1645920"/>
+                <a:gridCol w="1645920"/>
                 <a:gridCol w="1554480"/>
-                <a:gridCol w="2743200"/>
+                <a:gridCol w="3108960"/>
               </a:tblGrid>
-              <a:tr h="384048">
+              <a:tr h="457200">
                 <a:tc>
                   <a:txBody>
                     <a:bodyPr/>
@@ -5363,7 +5233,7 @@
                           </a:solidFill>
                           <a:latin typeface="Calibri"/>
                         </a:rPr>
-                        <a:t>MD</a:t>
+                        <a:t>UF</a:t>
                       </a:r>
                     </a:p>
                   </a:txBody>
@@ -5386,7 +5256,7 @@
                           </a:solidFill>
                           <a:latin typeface="Calibri"/>
                         </a:rPr>
-                        <a:t>DESTINATARIO</a:t>
+                        <a:t>TOTAL</a:t>
                       </a:r>
                     </a:p>
                   </a:txBody>
@@ -5409,7 +5279,7 @@
                           </a:solidFill>
                           <a:latin typeface="Calibri"/>
                         </a:rPr>
-                        <a:t>CIDADE/UF</a:t>
+                        <a:t>NO PRAZO</a:t>
                       </a:r>
                     </a:p>
                   </a:txBody>
@@ -5432,7 +5302,7 @@
                           </a:solidFill>
                           <a:latin typeface="Calibri"/>
                         </a:rPr>
-                        <a:t>PREV. ENTREGA</a:t>
+                        <a:t>FORA</a:t>
                       </a:r>
                     </a:p>
                   </a:txBody>
@@ -5455,6 +5325,29 @@
                           </a:solidFill>
                           <a:latin typeface="Calibri"/>
                         </a:rPr>
+                        <a:t>TAXA</a:t>
+                      </a:r>
+                    </a:p>
+                  </a:txBody>
+                  <a:tcPr>
+                    <a:solidFill>
+                      <a:srgbClr val="1D1B43"/>
+                    </a:solidFill>
+                  </a:tcPr>
+                </a:tc>
+                <a:tc>
+                  <a:txBody>
+                    <a:bodyPr/>
+                    <a:lstStyle/>
+                    <a:p>
+                      <a:pPr algn="ctr"/>
+                      <a:r>
+                        <a:rPr sz="1100" b="1">
+                          <a:solidFill>
+                            <a:srgbClr val="FFFFFF"/>
+                          </a:solidFill>
+                          <a:latin typeface="Calibri"/>
+                        </a:rPr>
                         <a:t>STATUS</a:t>
                       </a:r>
                     </a:p>
@@ -5466,21 +5359,21 @@
                   </a:tcPr>
                 </a:tc>
               </a:tr>
-              <a:tr h="384048">
-                <a:tc>
-                  <a:txBody>
-                    <a:bodyPr/>
-                    <a:lstStyle/>
-                    <a:p>
-                      <a:pPr algn="l"/>
-                      <a:r>
-                        <a:rPr sz="1000" b="0">
-                          <a:solidFill>
-                            <a:srgbClr val="1D1B43"/>
-                          </a:solidFill>
-                          <a:latin typeface="Calibri"/>
-                        </a:rPr>
-                        <a:t>280853</a:t>
+              <a:tr h="457200">
+                <a:tc>
+                  <a:txBody>
+                    <a:bodyPr/>
+                    <a:lstStyle/>
+                    <a:p>
+                      <a:pPr algn="l"/>
+                      <a:r>
+                        <a:rPr sz="1000" b="0">
+                          <a:solidFill>
+                            <a:srgbClr val="1D1B43"/>
+                          </a:solidFill>
+                          <a:latin typeface="Calibri"/>
+                        </a:rPr>
+                        <a:t>MG</a:t>
                       </a:r>
                     </a:p>
                   </a:txBody>
@@ -5503,7 +5396,7 @@
                           </a:solidFill>
                           <a:latin typeface="Calibri"/>
                         </a:rPr>
-                        <a:t>INFINITY ASSISTENCIA - JUIZ DE FORA / MG</a:t>
+                        <a:t>16</a:t>
                       </a:r>
                     </a:p>
                   </a:txBody>
@@ -5526,7 +5419,7 @@
                           </a:solidFill>
                           <a:latin typeface="Calibri"/>
                         </a:rPr>
-                        <a:t>JUIZ DE FORA/MG</a:t>
+                        <a:t>16</a:t>
                       </a:r>
                     </a:p>
                   </a:txBody>
@@ -5549,7 +5442,7 @@
                           </a:solidFill>
                           <a:latin typeface="Calibri"/>
                         </a:rPr>
-                        <a:t>11/05/2026</a:t>
+                        <a:t>0</a:t>
                       </a:r>
                     </a:p>
                   </a:txBody>
@@ -5572,7 +5465,7 @@
                           </a:solidFill>
                           <a:latin typeface="Calibri"/>
                         </a:rPr>
-                        <a:t>FORA DO PRAZO</a:t>
+                        <a:t>100.0%</a:t>
                       </a:r>
                     </a:p>
                   </a:txBody>
@@ -5582,22 +5475,45 @@
                     </a:solidFill>
                   </a:tcPr>
                 </a:tc>
+                <a:tc>
+                  <a:txBody>
+                    <a:bodyPr/>
+                    <a:lstStyle/>
+                    <a:p>
+                      <a:pPr algn="l"/>
+                      <a:r>
+                        <a:rPr sz="1000" b="0">
+                          <a:solidFill>
+                            <a:srgbClr val="1D1B43"/>
+                          </a:solidFill>
+                          <a:latin typeface="Calibri"/>
+                        </a:rPr>
+                        <a:t>Excelente</a:t>
+                      </a:r>
+                    </a:p>
+                  </a:txBody>
+                  <a:tcPr>
+                    <a:solidFill>
+                      <a:srgbClr val="FFFFFF"/>
+                    </a:solidFill>
+                  </a:tcPr>
+                </a:tc>
               </a:tr>
-              <a:tr h="384048">
-                <a:tc>
-                  <a:txBody>
-                    <a:bodyPr/>
-                    <a:lstStyle/>
-                    <a:p>
-                      <a:pPr algn="l"/>
-                      <a:r>
-                        <a:rPr sz="1000" b="0">
-                          <a:solidFill>
-                            <a:srgbClr val="1D1B43"/>
-                          </a:solidFill>
-                          <a:latin typeface="Calibri"/>
-                        </a:rPr>
-                        <a:t>282649</a:t>
+              <a:tr h="457200">
+                <a:tc>
+                  <a:txBody>
+                    <a:bodyPr/>
+                    <a:lstStyle/>
+                    <a:p>
+                      <a:pPr algn="l"/>
+                      <a:r>
+                        <a:rPr sz="1000" b="0">
+                          <a:solidFill>
+                            <a:srgbClr val="1D1B43"/>
+                          </a:solidFill>
+                          <a:latin typeface="Calibri"/>
+                        </a:rPr>
+                        <a:t>PR</a:t>
                       </a:r>
                     </a:p>
                   </a:txBody>
@@ -5620,7 +5536,7 @@
                           </a:solidFill>
                           <a:latin typeface="Calibri"/>
                         </a:rPr>
-                        <a:t>ABECOM ROLAMENTOS E - SAO PAULO / SP</a:t>
+                        <a:t>13</a:t>
                       </a:r>
                     </a:p>
                   </a:txBody>
@@ -5643,7 +5559,7 @@
                           </a:solidFill>
                           <a:latin typeface="Calibri"/>
                         </a:rPr>
-                        <a:t>SAO PAULO/SP</a:t>
+                        <a:t>13</a:t>
                       </a:r>
                     </a:p>
                   </a:txBody>
@@ -5666,7 +5582,7 @@
                           </a:solidFill>
                           <a:latin typeface="Calibri"/>
                         </a:rPr>
-                        <a:t>13/05/2026</a:t>
+                        <a:t>0</a:t>
                       </a:r>
                     </a:p>
                   </a:txBody>
@@ -5689,7 +5605,7 @@
                           </a:solidFill>
                           <a:latin typeface="Calibri"/>
                         </a:rPr>
-                        <a:t>ENTREGUE FORA DO PRAZO</a:t>
+                        <a:t>100.0%</a:t>
                       </a:r>
                     </a:p>
                   </a:txBody>
@@ -5699,22 +5615,45 @@
                     </a:solidFill>
                   </a:tcPr>
                 </a:tc>
+                <a:tc>
+                  <a:txBody>
+                    <a:bodyPr/>
+                    <a:lstStyle/>
+                    <a:p>
+                      <a:pPr algn="l"/>
+                      <a:r>
+                        <a:rPr sz="1000" b="0">
+                          <a:solidFill>
+                            <a:srgbClr val="1D1B43"/>
+                          </a:solidFill>
+                          <a:latin typeface="Calibri"/>
+                        </a:rPr>
+                        <a:t>Excelente</a:t>
+                      </a:r>
+                    </a:p>
+                  </a:txBody>
+                  <a:tcPr>
+                    <a:solidFill>
+                      <a:srgbClr val="F2F2F2"/>
+                    </a:solidFill>
+                  </a:tcPr>
+                </a:tc>
               </a:tr>
-              <a:tr h="384048">
-                <a:tc>
-                  <a:txBody>
-                    <a:bodyPr/>
-                    <a:lstStyle/>
-                    <a:p>
-                      <a:pPr algn="l"/>
-                      <a:r>
-                        <a:rPr sz="1000" b="0">
-                          <a:solidFill>
-                            <a:srgbClr val="1D1B43"/>
-                          </a:solidFill>
-                          <a:latin typeface="Calibri"/>
-                        </a:rPr>
-                        <a:t>282680</a:t>
+              <a:tr h="457200">
+                <a:tc>
+                  <a:txBody>
+                    <a:bodyPr/>
+                    <a:lstStyle/>
+                    <a:p>
+                      <a:pPr algn="l"/>
+                      <a:r>
+                        <a:rPr sz="1000" b="0">
+                          <a:solidFill>
+                            <a:srgbClr val="1D1B43"/>
+                          </a:solidFill>
+                          <a:latin typeface="Calibri"/>
+                        </a:rPr>
+                        <a:t>RJ</a:t>
                       </a:r>
                     </a:p>
                   </a:txBody>
@@ -5737,7 +5676,7 @@
                           </a:solidFill>
                           <a:latin typeface="Calibri"/>
                         </a:rPr>
-                        <a:t>IRSA ROLAMENTOS S/A - SANTO ANDRE / SP</a:t>
+                        <a:t>8</a:t>
                       </a:r>
                     </a:p>
                   </a:txBody>
@@ -5760,7 +5699,7 @@
                           </a:solidFill>
                           <a:latin typeface="Calibri"/>
                         </a:rPr>
-                        <a:t>SANTO ANDRE/SP</a:t>
+                        <a:t>8</a:t>
                       </a:r>
                     </a:p>
                   </a:txBody>
@@ -5783,7 +5722,7 @@
                           </a:solidFill>
                           <a:latin typeface="Calibri"/>
                         </a:rPr>
-                        <a:t>13/05/2026</a:t>
+                        <a:t>0</a:t>
                       </a:r>
                     </a:p>
                   </a:txBody>
@@ -5806,7 +5745,7 @@
                           </a:solidFill>
                           <a:latin typeface="Calibri"/>
                         </a:rPr>
-                        <a:t>ENTREGUE FORA DO PRAZO</a:t>
+                        <a:t>100.0%</a:t>
                       </a:r>
                     </a:p>
                   </a:txBody>
@@ -5816,22 +5755,45 @@
                     </a:solidFill>
                   </a:tcPr>
                 </a:tc>
+                <a:tc>
+                  <a:txBody>
+                    <a:bodyPr/>
+                    <a:lstStyle/>
+                    <a:p>
+                      <a:pPr algn="l"/>
+                      <a:r>
+                        <a:rPr sz="1000" b="0">
+                          <a:solidFill>
+                            <a:srgbClr val="1D1B43"/>
+                          </a:solidFill>
+                          <a:latin typeface="Calibri"/>
+                        </a:rPr>
+                        <a:t>Excelente</a:t>
+                      </a:r>
+                    </a:p>
+                  </a:txBody>
+                  <a:tcPr>
+                    <a:solidFill>
+                      <a:srgbClr val="FFFFFF"/>
+                    </a:solidFill>
+                  </a:tcPr>
+                </a:tc>
               </a:tr>
-              <a:tr h="384048">
-                <a:tc>
-                  <a:txBody>
-                    <a:bodyPr/>
-                    <a:lstStyle/>
-                    <a:p>
-                      <a:pPr algn="l"/>
-                      <a:r>
-                        <a:rPr sz="1000" b="0">
-                          <a:solidFill>
-                            <a:srgbClr val="1D1B43"/>
-                          </a:solidFill>
-                          <a:latin typeface="Calibri"/>
-                        </a:rPr>
-                        <a:t>282683</a:t>
+              <a:tr h="457200">
+                <a:tc>
+                  <a:txBody>
+                    <a:bodyPr/>
+                    <a:lstStyle/>
+                    <a:p>
+                      <a:pPr algn="l"/>
+                      <a:r>
+                        <a:rPr sz="1000" b="0">
+                          <a:solidFill>
+                            <a:srgbClr val="1D1B43"/>
+                          </a:solidFill>
+                          <a:latin typeface="Calibri"/>
+                        </a:rPr>
+                        <a:t>RS</a:t>
                       </a:r>
                     </a:p>
                   </a:txBody>
@@ -5854,7 +5816,7 @@
                           </a:solidFill>
                           <a:latin typeface="Calibri"/>
                         </a:rPr>
-                        <a:t>ENCOPEL COMERCIO DE - SAO PAULO / SP</a:t>
+                        <a:t>6</a:t>
                       </a:r>
                     </a:p>
                   </a:txBody>
@@ -5877,7 +5839,7 @@
                           </a:solidFill>
                           <a:latin typeface="Calibri"/>
                         </a:rPr>
-                        <a:t>SAO PAULO/SP</a:t>
+                        <a:t>6</a:t>
                       </a:r>
                     </a:p>
                   </a:txBody>
@@ -5900,7 +5862,7 @@
                           </a:solidFill>
                           <a:latin typeface="Calibri"/>
                         </a:rPr>
-                        <a:t>13/05/2026</a:t>
+                        <a:t>0</a:t>
                       </a:r>
                     </a:p>
                   </a:txBody>
@@ -5923,7 +5885,7 @@
                           </a:solidFill>
                           <a:latin typeface="Calibri"/>
                         </a:rPr>
-                        <a:t>FORA DO PRAZO</a:t>
+                        <a:t>100.0%</a:t>
                       </a:r>
                     </a:p>
                   </a:txBody>
@@ -5933,22 +5895,45 @@
                     </a:solidFill>
                   </a:tcPr>
                 </a:tc>
+                <a:tc>
+                  <a:txBody>
+                    <a:bodyPr/>
+                    <a:lstStyle/>
+                    <a:p>
+                      <a:pPr algn="l"/>
+                      <a:r>
+                        <a:rPr sz="1000" b="0">
+                          <a:solidFill>
+                            <a:srgbClr val="1D1B43"/>
+                          </a:solidFill>
+                          <a:latin typeface="Calibri"/>
+                        </a:rPr>
+                        <a:t>Excelente</a:t>
+                      </a:r>
+                    </a:p>
+                  </a:txBody>
+                  <a:tcPr>
+                    <a:solidFill>
+                      <a:srgbClr val="F2F2F2"/>
+                    </a:solidFill>
+                  </a:tcPr>
+                </a:tc>
               </a:tr>
-              <a:tr h="384048">
-                <a:tc>
-                  <a:txBody>
-                    <a:bodyPr/>
-                    <a:lstStyle/>
-                    <a:p>
-                      <a:pPr algn="l"/>
-                      <a:r>
-                        <a:rPr sz="1000" b="0">
-                          <a:solidFill>
-                            <a:srgbClr val="1D1B43"/>
-                          </a:solidFill>
-                          <a:latin typeface="Calibri"/>
-                        </a:rPr>
-                        <a:t>282987</a:t>
+              <a:tr h="457200">
+                <a:tc>
+                  <a:txBody>
+                    <a:bodyPr/>
+                    <a:lstStyle/>
+                    <a:p>
+                      <a:pPr algn="l"/>
+                      <a:r>
+                        <a:rPr sz="1000" b="0">
+                          <a:solidFill>
+                            <a:srgbClr val="1D1B43"/>
+                          </a:solidFill>
+                          <a:latin typeface="Calibri"/>
+                        </a:rPr>
+                        <a:t>SC</a:t>
                       </a:r>
                     </a:p>
                   </a:txBody>
@@ -5971,7 +5956,7 @@
                           </a:solidFill>
                           <a:latin typeface="Calibri"/>
                         </a:rPr>
-                        <a:t>ENCOPEL COMERCIO DE - SAO PAULO / SP</a:t>
+                        <a:t>6</a:t>
                       </a:r>
                     </a:p>
                   </a:txBody>
@@ -5994,7 +5979,7 @@
                           </a:solidFill>
                           <a:latin typeface="Calibri"/>
                         </a:rPr>
-                        <a:t>SAO PAULO/SP</a:t>
+                        <a:t>6</a:t>
                       </a:r>
                     </a:p>
                   </a:txBody>
@@ -6017,7 +6002,7 @@
                           </a:solidFill>
                           <a:latin typeface="Calibri"/>
                         </a:rPr>
-                        <a:t>15/05/2026</a:t>
+                        <a:t>0</a:t>
                       </a:r>
                     </a:p>
                   </a:txBody>
@@ -6040,13 +6025,176 @@
                           </a:solidFill>
                           <a:latin typeface="Calibri"/>
                         </a:rPr>
-                        <a:t>ENTREGUE FORA DO PRAZO</a:t>
+                        <a:t>100.0%</a:t>
                       </a:r>
                     </a:p>
                   </a:txBody>
                   <a:tcPr>
                     <a:solidFill>
                       <a:srgbClr val="FFFFFF"/>
+                    </a:solidFill>
+                  </a:tcPr>
+                </a:tc>
+                <a:tc>
+                  <a:txBody>
+                    <a:bodyPr/>
+                    <a:lstStyle/>
+                    <a:p>
+                      <a:pPr algn="l"/>
+                      <a:r>
+                        <a:rPr sz="1000" b="0">
+                          <a:solidFill>
+                            <a:srgbClr val="1D1B43"/>
+                          </a:solidFill>
+                          <a:latin typeface="Calibri"/>
+                        </a:rPr>
+                        <a:t>Excelente</a:t>
+                      </a:r>
+                    </a:p>
+                  </a:txBody>
+                  <a:tcPr>
+                    <a:solidFill>
+                      <a:srgbClr val="FFFFFF"/>
+                    </a:solidFill>
+                  </a:tcPr>
+                </a:tc>
+              </a:tr>
+              <a:tr h="457200">
+                <a:tc>
+                  <a:txBody>
+                    <a:bodyPr/>
+                    <a:lstStyle/>
+                    <a:p>
+                      <a:pPr algn="l"/>
+                      <a:r>
+                        <a:rPr sz="1000" b="0">
+                          <a:solidFill>
+                            <a:srgbClr val="1D1B43"/>
+                          </a:solidFill>
+                          <a:latin typeface="Calibri"/>
+                        </a:rPr>
+                        <a:t>ES</a:t>
+                      </a:r>
+                    </a:p>
+                  </a:txBody>
+                  <a:tcPr>
+                    <a:solidFill>
+                      <a:srgbClr val="F2F2F2"/>
+                    </a:solidFill>
+                  </a:tcPr>
+                </a:tc>
+                <a:tc>
+                  <a:txBody>
+                    <a:bodyPr/>
+                    <a:lstStyle/>
+                    <a:p>
+                      <a:pPr algn="l"/>
+                      <a:r>
+                        <a:rPr sz="1000" b="0">
+                          <a:solidFill>
+                            <a:srgbClr val="1D1B43"/>
+                          </a:solidFill>
+                          <a:latin typeface="Calibri"/>
+                        </a:rPr>
+                        <a:t>2</a:t>
+                      </a:r>
+                    </a:p>
+                  </a:txBody>
+                  <a:tcPr>
+                    <a:solidFill>
+                      <a:srgbClr val="F2F2F2"/>
+                    </a:solidFill>
+                  </a:tcPr>
+                </a:tc>
+                <a:tc>
+                  <a:txBody>
+                    <a:bodyPr/>
+                    <a:lstStyle/>
+                    <a:p>
+                      <a:pPr algn="l"/>
+                      <a:r>
+                        <a:rPr sz="1000" b="0">
+                          <a:solidFill>
+                            <a:srgbClr val="1D1B43"/>
+                          </a:solidFill>
+                          <a:latin typeface="Calibri"/>
+                        </a:rPr>
+                        <a:t>2</a:t>
+                      </a:r>
+                    </a:p>
+                  </a:txBody>
+                  <a:tcPr>
+                    <a:solidFill>
+                      <a:srgbClr val="F2F2F2"/>
+                    </a:solidFill>
+                  </a:tcPr>
+                </a:tc>
+                <a:tc>
+                  <a:txBody>
+                    <a:bodyPr/>
+                    <a:lstStyle/>
+                    <a:p>
+                      <a:pPr algn="l"/>
+                      <a:r>
+                        <a:rPr sz="1000" b="0">
+                          <a:solidFill>
+                            <a:srgbClr val="1D1B43"/>
+                          </a:solidFill>
+                          <a:latin typeface="Calibri"/>
+                        </a:rPr>
+                        <a:t>0</a:t>
+                      </a:r>
+                    </a:p>
+                  </a:txBody>
+                  <a:tcPr>
+                    <a:solidFill>
+                      <a:srgbClr val="F2F2F2"/>
+                    </a:solidFill>
+                  </a:tcPr>
+                </a:tc>
+                <a:tc>
+                  <a:txBody>
+                    <a:bodyPr/>
+                    <a:lstStyle/>
+                    <a:p>
+                      <a:pPr algn="l"/>
+                      <a:r>
+                        <a:rPr sz="1000" b="0">
+                          <a:solidFill>
+                            <a:srgbClr val="1D1B43"/>
+                          </a:solidFill>
+                          <a:latin typeface="Calibri"/>
+                        </a:rPr>
+                        <a:t>100.0%</a:t>
+                      </a:r>
+                    </a:p>
+                  </a:txBody>
+                  <a:tcPr>
+                    <a:solidFill>
+                      <a:srgbClr val="F2F2F2"/>
+                    </a:solidFill>
+                  </a:tcPr>
+                </a:tc>
+                <a:tc>
+                  <a:txBody>
+                    <a:bodyPr/>
+                    <a:lstStyle/>
+                    <a:p>
+                      <a:pPr algn="l"/>
+                      <a:r>
+                        <a:rPr sz="1000" b="0">
+                          <a:solidFill>
+                            <a:srgbClr val="1D1B43"/>
+                          </a:solidFill>
+                          <a:latin typeface="Calibri"/>
+                        </a:rPr>
+                        <a:t>Excelente</a:t>
+                      </a:r>
+                    </a:p>
+                  </a:txBody>
+                  <a:tcPr>
+                    <a:solidFill>
+                      <a:srgbClr val="F2F2F2"/>
                     </a:solidFill>
                   </a:tcPr>
                 </a:tc>
@@ -6114,1284 +6262,6 @@
         <p:spPr>
           <a:xfrm>
             <a:off x="749808" y="502920"/>
-            <a:ext cx="9144000" cy="914400"/>
-          </a:xfrm>
-          <a:prstGeom prst="rect">
-            <a:avLst/>
-          </a:prstGeom>
-          <a:noFill/>
-        </p:spPr>
-        <p:txBody>
-          <a:bodyPr wrap="square">
-            <a:spAutoFit/>
-          </a:bodyPr>
-          <a:lstStyle/>
-          <a:p>
-            <a:pPr algn="l"/>
-            <a:r>
-              <a:rPr sz="4000" b="1">
-                <a:solidFill>
-                  <a:srgbClr val="F97316"/>
-                </a:solidFill>
-                <a:latin typeface="Calibri"/>
-              </a:rPr>
-              <a:t>PERFORMANCE POR UF</a:t>
-            </a:r>
-          </a:p>
-        </p:txBody>
-      </p:sp>
-      <p:sp>
-        <p:nvSpPr>
-          <p:cNvPr id="4" name="Rectangle 3"/>
-          <p:cNvSpPr/>
-          <p:nvPr/>
-        </p:nvSpPr>
-        <p:spPr>
-          <a:xfrm>
-            <a:off x="749808" y="1719072"/>
-            <a:ext cx="10424160" cy="36576"/>
-          </a:xfrm>
-          <a:prstGeom prst="rect">
-            <a:avLst/>
-          </a:prstGeom>
-          <a:solidFill>
-            <a:srgbClr val="F97316"/>
-          </a:solidFill>
-          <a:ln>
-            <a:noFill/>
-          </a:ln>
-        </p:spPr>
-        <p:style>
-          <a:lnRef idx="1">
-            <a:schemeClr val="accent1"/>
-          </a:lnRef>
-          <a:fillRef idx="3">
-            <a:schemeClr val="accent1"/>
-          </a:fillRef>
-          <a:effectRef idx="2">
-            <a:schemeClr val="accent1"/>
-          </a:effectRef>
-          <a:fontRef idx="minor">
-            <a:schemeClr val="lt1"/>
-          </a:fontRef>
-        </p:style>
-        <p:txBody>
-          <a:bodyPr rtlCol="0" anchor="ctr"/>
-          <a:lstStyle/>
-          <a:p>
-            <a:pPr algn="ctr"/>
-          </a:p>
-        </p:txBody>
-      </p:sp>
-      <p:graphicFrame>
-        <p:nvGraphicFramePr>
-          <p:cNvPr id="5" name="Table 4"/>
-          <p:cNvGraphicFramePr>
-            <a:graphicFrameLocks noGrp="1"/>
-          </p:cNvGraphicFramePr>
-          <p:nvPr/>
-        </p:nvGraphicFramePr>
-        <p:xfrm>
-          <a:off x="731520" y="1920240"/>
-          <a:ext cx="10698480" cy="3657600"/>
-        </p:xfrm>
-        <a:graphic>
-          <a:graphicData uri="http://schemas.openxmlformats.org/drawingml/2006/table">
-            <a:tbl>
-              <a:tblPr firstRow="1" bandRow="1">
-                <a:tableStyleId>{5C22544A-7EE6-4342-B048-85BDC9FD1C3A}</a:tableStyleId>
-              </a:tblPr>
-              <a:tblGrid>
-                <a:gridCol w="1097280"/>
-                <a:gridCol w="1645920"/>
-                <a:gridCol w="1645920"/>
-                <a:gridCol w="1645920"/>
-                <a:gridCol w="1554480"/>
-                <a:gridCol w="3108960"/>
-              </a:tblGrid>
-              <a:tr h="457200">
-                <a:tc>
-                  <a:txBody>
-                    <a:bodyPr/>
-                    <a:lstStyle/>
-                    <a:p>
-                      <a:pPr algn="ctr"/>
-                      <a:r>
-                        <a:rPr sz="1100" b="1">
-                          <a:solidFill>
-                            <a:srgbClr val="FFFFFF"/>
-                          </a:solidFill>
-                          <a:latin typeface="Calibri"/>
-                        </a:rPr>
-                        <a:t>UF</a:t>
-                      </a:r>
-                    </a:p>
-                  </a:txBody>
-                  <a:tcPr>
-                    <a:solidFill>
-                      <a:srgbClr val="1D1B43"/>
-                    </a:solidFill>
-                  </a:tcPr>
-                </a:tc>
-                <a:tc>
-                  <a:txBody>
-                    <a:bodyPr/>
-                    <a:lstStyle/>
-                    <a:p>
-                      <a:pPr algn="ctr"/>
-                      <a:r>
-                        <a:rPr sz="1100" b="1">
-                          <a:solidFill>
-                            <a:srgbClr val="FFFFFF"/>
-                          </a:solidFill>
-                          <a:latin typeface="Calibri"/>
-                        </a:rPr>
-                        <a:t>TOTAL</a:t>
-                      </a:r>
-                    </a:p>
-                  </a:txBody>
-                  <a:tcPr>
-                    <a:solidFill>
-                      <a:srgbClr val="1D1B43"/>
-                    </a:solidFill>
-                  </a:tcPr>
-                </a:tc>
-                <a:tc>
-                  <a:txBody>
-                    <a:bodyPr/>
-                    <a:lstStyle/>
-                    <a:p>
-                      <a:pPr algn="ctr"/>
-                      <a:r>
-                        <a:rPr sz="1100" b="1">
-                          <a:solidFill>
-                            <a:srgbClr val="FFFFFF"/>
-                          </a:solidFill>
-                          <a:latin typeface="Calibri"/>
-                        </a:rPr>
-                        <a:t>NO PRAZO</a:t>
-                      </a:r>
-                    </a:p>
-                  </a:txBody>
-                  <a:tcPr>
-                    <a:solidFill>
-                      <a:srgbClr val="1D1B43"/>
-                    </a:solidFill>
-                  </a:tcPr>
-                </a:tc>
-                <a:tc>
-                  <a:txBody>
-                    <a:bodyPr/>
-                    <a:lstStyle/>
-                    <a:p>
-                      <a:pPr algn="ctr"/>
-                      <a:r>
-                        <a:rPr sz="1100" b="1">
-                          <a:solidFill>
-                            <a:srgbClr val="FFFFFF"/>
-                          </a:solidFill>
-                          <a:latin typeface="Calibri"/>
-                        </a:rPr>
-                        <a:t>FORA</a:t>
-                      </a:r>
-                    </a:p>
-                  </a:txBody>
-                  <a:tcPr>
-                    <a:solidFill>
-                      <a:srgbClr val="1D1B43"/>
-                    </a:solidFill>
-                  </a:tcPr>
-                </a:tc>
-                <a:tc>
-                  <a:txBody>
-                    <a:bodyPr/>
-                    <a:lstStyle/>
-                    <a:p>
-                      <a:pPr algn="ctr"/>
-                      <a:r>
-                        <a:rPr sz="1100" b="1">
-                          <a:solidFill>
-                            <a:srgbClr val="FFFFFF"/>
-                          </a:solidFill>
-                          <a:latin typeface="Calibri"/>
-                        </a:rPr>
-                        <a:t>TAXA</a:t>
-                      </a:r>
-                    </a:p>
-                  </a:txBody>
-                  <a:tcPr>
-                    <a:solidFill>
-                      <a:srgbClr val="1D1B43"/>
-                    </a:solidFill>
-                  </a:tcPr>
-                </a:tc>
-                <a:tc>
-                  <a:txBody>
-                    <a:bodyPr/>
-                    <a:lstStyle/>
-                    <a:p>
-                      <a:pPr algn="ctr"/>
-                      <a:r>
-                        <a:rPr sz="1100" b="1">
-                          <a:solidFill>
-                            <a:srgbClr val="FFFFFF"/>
-                          </a:solidFill>
-                          <a:latin typeface="Calibri"/>
-                        </a:rPr>
-                        <a:t>STATUS</a:t>
-                      </a:r>
-                    </a:p>
-                  </a:txBody>
-                  <a:tcPr>
-                    <a:solidFill>
-                      <a:srgbClr val="1D1B43"/>
-                    </a:solidFill>
-                  </a:tcPr>
-                </a:tc>
-              </a:tr>
-              <a:tr h="457200">
-                <a:tc>
-                  <a:txBody>
-                    <a:bodyPr/>
-                    <a:lstStyle/>
-                    <a:p>
-                      <a:pPr algn="l"/>
-                      <a:r>
-                        <a:rPr sz="1000" b="0">
-                          <a:solidFill>
-                            <a:srgbClr val="1D1B43"/>
-                          </a:solidFill>
-                          <a:latin typeface="Calibri"/>
-                        </a:rPr>
-                        <a:t>SP</a:t>
-                      </a:r>
-                    </a:p>
-                  </a:txBody>
-                  <a:tcPr>
-                    <a:solidFill>
-                      <a:srgbClr val="FFFFFF"/>
-                    </a:solidFill>
-                  </a:tcPr>
-                </a:tc>
-                <a:tc>
-                  <a:txBody>
-                    <a:bodyPr/>
-                    <a:lstStyle/>
-                    <a:p>
-                      <a:pPr algn="l"/>
-                      <a:r>
-                        <a:rPr sz="1000" b="0">
-                          <a:solidFill>
-                            <a:srgbClr val="1D1B43"/>
-                          </a:solidFill>
-                          <a:latin typeface="Calibri"/>
-                        </a:rPr>
-                        <a:t>66</a:t>
-                      </a:r>
-                    </a:p>
-                  </a:txBody>
-                  <a:tcPr>
-                    <a:solidFill>
-                      <a:srgbClr val="FFFFFF"/>
-                    </a:solidFill>
-                  </a:tcPr>
-                </a:tc>
-                <a:tc>
-                  <a:txBody>
-                    <a:bodyPr/>
-                    <a:lstStyle/>
-                    <a:p>
-                      <a:pPr algn="l"/>
-                      <a:r>
-                        <a:rPr sz="1000" b="0">
-                          <a:solidFill>
-                            <a:srgbClr val="1D1B43"/>
-                          </a:solidFill>
-                          <a:latin typeface="Calibri"/>
-                        </a:rPr>
-                        <a:t>62</a:t>
-                      </a:r>
-                    </a:p>
-                  </a:txBody>
-                  <a:tcPr>
-                    <a:solidFill>
-                      <a:srgbClr val="FFFFFF"/>
-                    </a:solidFill>
-                  </a:tcPr>
-                </a:tc>
-                <a:tc>
-                  <a:txBody>
-                    <a:bodyPr/>
-                    <a:lstStyle/>
-                    <a:p>
-                      <a:pPr algn="l"/>
-                      <a:r>
-                        <a:rPr sz="1000" b="0">
-                          <a:solidFill>
-                            <a:srgbClr val="1D1B43"/>
-                          </a:solidFill>
-                          <a:latin typeface="Calibri"/>
-                        </a:rPr>
-                        <a:t>4</a:t>
-                      </a:r>
-                    </a:p>
-                  </a:txBody>
-                  <a:tcPr>
-                    <a:solidFill>
-                      <a:srgbClr val="FFFFFF"/>
-                    </a:solidFill>
-                  </a:tcPr>
-                </a:tc>
-                <a:tc>
-                  <a:txBody>
-                    <a:bodyPr/>
-                    <a:lstStyle/>
-                    <a:p>
-                      <a:pPr algn="l"/>
-                      <a:r>
-                        <a:rPr sz="1000" b="0">
-                          <a:solidFill>
-                            <a:srgbClr val="1D1B43"/>
-                          </a:solidFill>
-                          <a:latin typeface="Calibri"/>
-                        </a:rPr>
-                        <a:t>93.9%</a:t>
-                      </a:r>
-                    </a:p>
-                  </a:txBody>
-                  <a:tcPr>
-                    <a:solidFill>
-                      <a:srgbClr val="FFFFFF"/>
-                    </a:solidFill>
-                  </a:tcPr>
-                </a:tc>
-                <a:tc>
-                  <a:txBody>
-                    <a:bodyPr/>
-                    <a:lstStyle/>
-                    <a:p>
-                      <a:pPr algn="l"/>
-                      <a:r>
-                        <a:rPr sz="1000" b="0">
-                          <a:solidFill>
-                            <a:srgbClr val="1D1B43"/>
-                          </a:solidFill>
-                          <a:latin typeface="Calibri"/>
-                        </a:rPr>
-                        <a:t>Regular</a:t>
-                      </a:r>
-                    </a:p>
-                  </a:txBody>
-                  <a:tcPr>
-                    <a:solidFill>
-                      <a:srgbClr val="FFFFFF"/>
-                    </a:solidFill>
-                  </a:tcPr>
-                </a:tc>
-              </a:tr>
-              <a:tr h="457200">
-                <a:tc>
-                  <a:txBody>
-                    <a:bodyPr/>
-                    <a:lstStyle/>
-                    <a:p>
-                      <a:pPr algn="l"/>
-                      <a:r>
-                        <a:rPr sz="1000" b="0">
-                          <a:solidFill>
-                            <a:srgbClr val="1D1B43"/>
-                          </a:solidFill>
-                          <a:latin typeface="Calibri"/>
-                        </a:rPr>
-                        <a:t>PR</a:t>
-                      </a:r>
-                    </a:p>
-                  </a:txBody>
-                  <a:tcPr>
-                    <a:solidFill>
-                      <a:srgbClr val="F2F2F2"/>
-                    </a:solidFill>
-                  </a:tcPr>
-                </a:tc>
-                <a:tc>
-                  <a:txBody>
-                    <a:bodyPr/>
-                    <a:lstStyle/>
-                    <a:p>
-                      <a:pPr algn="l"/>
-                      <a:r>
-                        <a:rPr sz="1000" b="0">
-                          <a:solidFill>
-                            <a:srgbClr val="1D1B43"/>
-                          </a:solidFill>
-                          <a:latin typeface="Calibri"/>
-                        </a:rPr>
-                        <a:t>9</a:t>
-                      </a:r>
-                    </a:p>
-                  </a:txBody>
-                  <a:tcPr>
-                    <a:solidFill>
-                      <a:srgbClr val="F2F2F2"/>
-                    </a:solidFill>
-                  </a:tcPr>
-                </a:tc>
-                <a:tc>
-                  <a:txBody>
-                    <a:bodyPr/>
-                    <a:lstStyle/>
-                    <a:p>
-                      <a:pPr algn="l"/>
-                      <a:r>
-                        <a:rPr sz="1000" b="0">
-                          <a:solidFill>
-                            <a:srgbClr val="1D1B43"/>
-                          </a:solidFill>
-                          <a:latin typeface="Calibri"/>
-                        </a:rPr>
-                        <a:t>9</a:t>
-                      </a:r>
-                    </a:p>
-                  </a:txBody>
-                  <a:tcPr>
-                    <a:solidFill>
-                      <a:srgbClr val="F2F2F2"/>
-                    </a:solidFill>
-                  </a:tcPr>
-                </a:tc>
-                <a:tc>
-                  <a:txBody>
-                    <a:bodyPr/>
-                    <a:lstStyle/>
-                    <a:p>
-                      <a:pPr algn="l"/>
-                      <a:r>
-                        <a:rPr sz="1000" b="0">
-                          <a:solidFill>
-                            <a:srgbClr val="1D1B43"/>
-                          </a:solidFill>
-                          <a:latin typeface="Calibri"/>
-                        </a:rPr>
-                        <a:t>0</a:t>
-                      </a:r>
-                    </a:p>
-                  </a:txBody>
-                  <a:tcPr>
-                    <a:solidFill>
-                      <a:srgbClr val="F2F2F2"/>
-                    </a:solidFill>
-                  </a:tcPr>
-                </a:tc>
-                <a:tc>
-                  <a:txBody>
-                    <a:bodyPr/>
-                    <a:lstStyle/>
-                    <a:p>
-                      <a:pPr algn="l"/>
-                      <a:r>
-                        <a:rPr sz="1000" b="0">
-                          <a:solidFill>
-                            <a:srgbClr val="1D1B43"/>
-                          </a:solidFill>
-                          <a:latin typeface="Calibri"/>
-                        </a:rPr>
-                        <a:t>100.0%</a:t>
-                      </a:r>
-                    </a:p>
-                  </a:txBody>
-                  <a:tcPr>
-                    <a:solidFill>
-                      <a:srgbClr val="F2F2F2"/>
-                    </a:solidFill>
-                  </a:tcPr>
-                </a:tc>
-                <a:tc>
-                  <a:txBody>
-                    <a:bodyPr/>
-                    <a:lstStyle/>
-                    <a:p>
-                      <a:pPr algn="l"/>
-                      <a:r>
-                        <a:rPr sz="1000" b="0">
-                          <a:solidFill>
-                            <a:srgbClr val="1D1B43"/>
-                          </a:solidFill>
-                          <a:latin typeface="Calibri"/>
-                        </a:rPr>
-                        <a:t>Excelente</a:t>
-                      </a:r>
-                    </a:p>
-                  </a:txBody>
-                  <a:tcPr>
-                    <a:solidFill>
-                      <a:srgbClr val="F2F2F2"/>
-                    </a:solidFill>
-                  </a:tcPr>
-                </a:tc>
-              </a:tr>
-              <a:tr h="457200">
-                <a:tc>
-                  <a:txBody>
-                    <a:bodyPr/>
-                    <a:lstStyle/>
-                    <a:p>
-                      <a:pPr algn="l"/>
-                      <a:r>
-                        <a:rPr sz="1000" b="0">
-                          <a:solidFill>
-                            <a:srgbClr val="1D1B43"/>
-                          </a:solidFill>
-                          <a:latin typeface="Calibri"/>
-                        </a:rPr>
-                        <a:t>MG</a:t>
-                      </a:r>
-                    </a:p>
-                  </a:txBody>
-                  <a:tcPr>
-                    <a:solidFill>
-                      <a:srgbClr val="FFFFFF"/>
-                    </a:solidFill>
-                  </a:tcPr>
-                </a:tc>
-                <a:tc>
-                  <a:txBody>
-                    <a:bodyPr/>
-                    <a:lstStyle/>
-                    <a:p>
-                      <a:pPr algn="l"/>
-                      <a:r>
-                        <a:rPr sz="1000" b="0">
-                          <a:solidFill>
-                            <a:srgbClr val="1D1B43"/>
-                          </a:solidFill>
-                          <a:latin typeface="Calibri"/>
-                        </a:rPr>
-                        <a:t>8</a:t>
-                      </a:r>
-                    </a:p>
-                  </a:txBody>
-                  <a:tcPr>
-                    <a:solidFill>
-                      <a:srgbClr val="FFFFFF"/>
-                    </a:solidFill>
-                  </a:tcPr>
-                </a:tc>
-                <a:tc>
-                  <a:txBody>
-                    <a:bodyPr/>
-                    <a:lstStyle/>
-                    <a:p>
-                      <a:pPr algn="l"/>
-                      <a:r>
-                        <a:rPr sz="1000" b="0">
-                          <a:solidFill>
-                            <a:srgbClr val="1D1B43"/>
-                          </a:solidFill>
-                          <a:latin typeface="Calibri"/>
-                        </a:rPr>
-                        <a:t>7</a:t>
-                      </a:r>
-                    </a:p>
-                  </a:txBody>
-                  <a:tcPr>
-                    <a:solidFill>
-                      <a:srgbClr val="FFFFFF"/>
-                    </a:solidFill>
-                  </a:tcPr>
-                </a:tc>
-                <a:tc>
-                  <a:txBody>
-                    <a:bodyPr/>
-                    <a:lstStyle/>
-                    <a:p>
-                      <a:pPr algn="l"/>
-                      <a:r>
-                        <a:rPr sz="1000" b="0">
-                          <a:solidFill>
-                            <a:srgbClr val="1D1B43"/>
-                          </a:solidFill>
-                          <a:latin typeface="Calibri"/>
-                        </a:rPr>
-                        <a:t>1</a:t>
-                      </a:r>
-                    </a:p>
-                  </a:txBody>
-                  <a:tcPr>
-                    <a:solidFill>
-                      <a:srgbClr val="FFFFFF"/>
-                    </a:solidFill>
-                  </a:tcPr>
-                </a:tc>
-                <a:tc>
-                  <a:txBody>
-                    <a:bodyPr/>
-                    <a:lstStyle/>
-                    <a:p>
-                      <a:pPr algn="l"/>
-                      <a:r>
-                        <a:rPr sz="1000" b="0">
-                          <a:solidFill>
-                            <a:srgbClr val="1D1B43"/>
-                          </a:solidFill>
-                          <a:latin typeface="Calibri"/>
-                        </a:rPr>
-                        <a:t>87.5%</a:t>
-                      </a:r>
-                    </a:p>
-                  </a:txBody>
-                  <a:tcPr>
-                    <a:solidFill>
-                      <a:srgbClr val="FFFFFF"/>
-                    </a:solidFill>
-                  </a:tcPr>
-                </a:tc>
-                <a:tc>
-                  <a:txBody>
-                    <a:bodyPr/>
-                    <a:lstStyle/>
-                    <a:p>
-                      <a:pPr algn="l"/>
-                      <a:r>
-                        <a:rPr sz="1000" b="0">
-                          <a:solidFill>
-                            <a:srgbClr val="1D1B43"/>
-                          </a:solidFill>
-                          <a:latin typeface="Calibri"/>
-                        </a:rPr>
-                        <a:t>Regular</a:t>
-                      </a:r>
-                    </a:p>
-                  </a:txBody>
-                  <a:tcPr>
-                    <a:solidFill>
-                      <a:srgbClr val="FFFFFF"/>
-                    </a:solidFill>
-                  </a:tcPr>
-                </a:tc>
-              </a:tr>
-              <a:tr h="457200">
-                <a:tc>
-                  <a:txBody>
-                    <a:bodyPr/>
-                    <a:lstStyle/>
-                    <a:p>
-                      <a:pPr algn="l"/>
-                      <a:r>
-                        <a:rPr sz="1000" b="0">
-                          <a:solidFill>
-                            <a:srgbClr val="1D1B43"/>
-                          </a:solidFill>
-                          <a:latin typeface="Calibri"/>
-                        </a:rPr>
-                        <a:t>RS</a:t>
-                      </a:r>
-                    </a:p>
-                  </a:txBody>
-                  <a:tcPr>
-                    <a:solidFill>
-                      <a:srgbClr val="F2F2F2"/>
-                    </a:solidFill>
-                  </a:tcPr>
-                </a:tc>
-                <a:tc>
-                  <a:txBody>
-                    <a:bodyPr/>
-                    <a:lstStyle/>
-                    <a:p>
-                      <a:pPr algn="l"/>
-                      <a:r>
-                        <a:rPr sz="1000" b="0">
-                          <a:solidFill>
-                            <a:srgbClr val="1D1B43"/>
-                          </a:solidFill>
-                          <a:latin typeface="Calibri"/>
-                        </a:rPr>
-                        <a:t>4</a:t>
-                      </a:r>
-                    </a:p>
-                  </a:txBody>
-                  <a:tcPr>
-                    <a:solidFill>
-                      <a:srgbClr val="F2F2F2"/>
-                    </a:solidFill>
-                  </a:tcPr>
-                </a:tc>
-                <a:tc>
-                  <a:txBody>
-                    <a:bodyPr/>
-                    <a:lstStyle/>
-                    <a:p>
-                      <a:pPr algn="l"/>
-                      <a:r>
-                        <a:rPr sz="1000" b="0">
-                          <a:solidFill>
-                            <a:srgbClr val="1D1B43"/>
-                          </a:solidFill>
-                          <a:latin typeface="Calibri"/>
-                        </a:rPr>
-                        <a:t>4</a:t>
-                      </a:r>
-                    </a:p>
-                  </a:txBody>
-                  <a:tcPr>
-                    <a:solidFill>
-                      <a:srgbClr val="F2F2F2"/>
-                    </a:solidFill>
-                  </a:tcPr>
-                </a:tc>
-                <a:tc>
-                  <a:txBody>
-                    <a:bodyPr/>
-                    <a:lstStyle/>
-                    <a:p>
-                      <a:pPr algn="l"/>
-                      <a:r>
-                        <a:rPr sz="1000" b="0">
-                          <a:solidFill>
-                            <a:srgbClr val="1D1B43"/>
-                          </a:solidFill>
-                          <a:latin typeface="Calibri"/>
-                        </a:rPr>
-                        <a:t>0</a:t>
-                      </a:r>
-                    </a:p>
-                  </a:txBody>
-                  <a:tcPr>
-                    <a:solidFill>
-                      <a:srgbClr val="F2F2F2"/>
-                    </a:solidFill>
-                  </a:tcPr>
-                </a:tc>
-                <a:tc>
-                  <a:txBody>
-                    <a:bodyPr/>
-                    <a:lstStyle/>
-                    <a:p>
-                      <a:pPr algn="l"/>
-                      <a:r>
-                        <a:rPr sz="1000" b="0">
-                          <a:solidFill>
-                            <a:srgbClr val="1D1B43"/>
-                          </a:solidFill>
-                          <a:latin typeface="Calibri"/>
-                        </a:rPr>
-                        <a:t>100.0%</a:t>
-                      </a:r>
-                    </a:p>
-                  </a:txBody>
-                  <a:tcPr>
-                    <a:solidFill>
-                      <a:srgbClr val="F2F2F2"/>
-                    </a:solidFill>
-                  </a:tcPr>
-                </a:tc>
-                <a:tc>
-                  <a:txBody>
-                    <a:bodyPr/>
-                    <a:lstStyle/>
-                    <a:p>
-                      <a:pPr algn="l"/>
-                      <a:r>
-                        <a:rPr sz="1000" b="0">
-                          <a:solidFill>
-                            <a:srgbClr val="1D1B43"/>
-                          </a:solidFill>
-                          <a:latin typeface="Calibri"/>
-                        </a:rPr>
-                        <a:t>Excelente</a:t>
-                      </a:r>
-                    </a:p>
-                  </a:txBody>
-                  <a:tcPr>
-                    <a:solidFill>
-                      <a:srgbClr val="F2F2F2"/>
-                    </a:solidFill>
-                  </a:tcPr>
-                </a:tc>
-              </a:tr>
-              <a:tr h="457200">
-                <a:tc>
-                  <a:txBody>
-                    <a:bodyPr/>
-                    <a:lstStyle/>
-                    <a:p>
-                      <a:pPr algn="l"/>
-                      <a:r>
-                        <a:rPr sz="1000" b="0">
-                          <a:solidFill>
-                            <a:srgbClr val="1D1B43"/>
-                          </a:solidFill>
-                          <a:latin typeface="Calibri"/>
-                        </a:rPr>
-                        <a:t>RJ</a:t>
-                      </a:r>
-                    </a:p>
-                  </a:txBody>
-                  <a:tcPr>
-                    <a:solidFill>
-                      <a:srgbClr val="FFFFFF"/>
-                    </a:solidFill>
-                  </a:tcPr>
-                </a:tc>
-                <a:tc>
-                  <a:txBody>
-                    <a:bodyPr/>
-                    <a:lstStyle/>
-                    <a:p>
-                      <a:pPr algn="l"/>
-                      <a:r>
-                        <a:rPr sz="1000" b="0">
-                          <a:solidFill>
-                            <a:srgbClr val="1D1B43"/>
-                          </a:solidFill>
-                          <a:latin typeface="Calibri"/>
-                        </a:rPr>
-                        <a:t>3</a:t>
-                      </a:r>
-                    </a:p>
-                  </a:txBody>
-                  <a:tcPr>
-                    <a:solidFill>
-                      <a:srgbClr val="FFFFFF"/>
-                    </a:solidFill>
-                  </a:tcPr>
-                </a:tc>
-                <a:tc>
-                  <a:txBody>
-                    <a:bodyPr/>
-                    <a:lstStyle/>
-                    <a:p>
-                      <a:pPr algn="l"/>
-                      <a:r>
-                        <a:rPr sz="1000" b="0">
-                          <a:solidFill>
-                            <a:srgbClr val="1D1B43"/>
-                          </a:solidFill>
-                          <a:latin typeface="Calibri"/>
-                        </a:rPr>
-                        <a:t>3</a:t>
-                      </a:r>
-                    </a:p>
-                  </a:txBody>
-                  <a:tcPr>
-                    <a:solidFill>
-                      <a:srgbClr val="FFFFFF"/>
-                    </a:solidFill>
-                  </a:tcPr>
-                </a:tc>
-                <a:tc>
-                  <a:txBody>
-                    <a:bodyPr/>
-                    <a:lstStyle/>
-                    <a:p>
-                      <a:pPr algn="l"/>
-                      <a:r>
-                        <a:rPr sz="1000" b="0">
-                          <a:solidFill>
-                            <a:srgbClr val="1D1B43"/>
-                          </a:solidFill>
-                          <a:latin typeface="Calibri"/>
-                        </a:rPr>
-                        <a:t>0</a:t>
-                      </a:r>
-                    </a:p>
-                  </a:txBody>
-                  <a:tcPr>
-                    <a:solidFill>
-                      <a:srgbClr val="FFFFFF"/>
-                    </a:solidFill>
-                  </a:tcPr>
-                </a:tc>
-                <a:tc>
-                  <a:txBody>
-                    <a:bodyPr/>
-                    <a:lstStyle/>
-                    <a:p>
-                      <a:pPr algn="l"/>
-                      <a:r>
-                        <a:rPr sz="1000" b="0">
-                          <a:solidFill>
-                            <a:srgbClr val="1D1B43"/>
-                          </a:solidFill>
-                          <a:latin typeface="Calibri"/>
-                        </a:rPr>
-                        <a:t>100.0%</a:t>
-                      </a:r>
-                    </a:p>
-                  </a:txBody>
-                  <a:tcPr>
-                    <a:solidFill>
-                      <a:srgbClr val="FFFFFF"/>
-                    </a:solidFill>
-                  </a:tcPr>
-                </a:tc>
-                <a:tc>
-                  <a:txBody>
-                    <a:bodyPr/>
-                    <a:lstStyle/>
-                    <a:p>
-                      <a:pPr algn="l"/>
-                      <a:r>
-                        <a:rPr sz="1000" b="0">
-                          <a:solidFill>
-                            <a:srgbClr val="1D1B43"/>
-                          </a:solidFill>
-                          <a:latin typeface="Calibri"/>
-                        </a:rPr>
-                        <a:t>Excelente</a:t>
-                      </a:r>
-                    </a:p>
-                  </a:txBody>
-                  <a:tcPr>
-                    <a:solidFill>
-                      <a:srgbClr val="FFFFFF"/>
-                    </a:solidFill>
-                  </a:tcPr>
-                </a:tc>
-              </a:tr>
-              <a:tr h="457200">
-                <a:tc>
-                  <a:txBody>
-                    <a:bodyPr/>
-                    <a:lstStyle/>
-                    <a:p>
-                      <a:pPr algn="l"/>
-                      <a:r>
-                        <a:rPr sz="1000" b="0">
-                          <a:solidFill>
-                            <a:srgbClr val="1D1B43"/>
-                          </a:solidFill>
-                          <a:latin typeface="Calibri"/>
-                        </a:rPr>
-                        <a:t>ES</a:t>
-                      </a:r>
-                    </a:p>
-                  </a:txBody>
-                  <a:tcPr>
-                    <a:solidFill>
-                      <a:srgbClr val="F2F2F2"/>
-                    </a:solidFill>
-                  </a:tcPr>
-                </a:tc>
-                <a:tc>
-                  <a:txBody>
-                    <a:bodyPr/>
-                    <a:lstStyle/>
-                    <a:p>
-                      <a:pPr algn="l"/>
-                      <a:r>
-                        <a:rPr sz="1000" b="0">
-                          <a:solidFill>
-                            <a:srgbClr val="1D1B43"/>
-                          </a:solidFill>
-                          <a:latin typeface="Calibri"/>
-                        </a:rPr>
-                        <a:t>2</a:t>
-                      </a:r>
-                    </a:p>
-                  </a:txBody>
-                  <a:tcPr>
-                    <a:solidFill>
-                      <a:srgbClr val="F2F2F2"/>
-                    </a:solidFill>
-                  </a:tcPr>
-                </a:tc>
-                <a:tc>
-                  <a:txBody>
-                    <a:bodyPr/>
-                    <a:lstStyle/>
-                    <a:p>
-                      <a:pPr algn="l"/>
-                      <a:r>
-                        <a:rPr sz="1000" b="0">
-                          <a:solidFill>
-                            <a:srgbClr val="1D1B43"/>
-                          </a:solidFill>
-                          <a:latin typeface="Calibri"/>
-                        </a:rPr>
-                        <a:t>2</a:t>
-                      </a:r>
-                    </a:p>
-                  </a:txBody>
-                  <a:tcPr>
-                    <a:solidFill>
-                      <a:srgbClr val="F2F2F2"/>
-                    </a:solidFill>
-                  </a:tcPr>
-                </a:tc>
-                <a:tc>
-                  <a:txBody>
-                    <a:bodyPr/>
-                    <a:lstStyle/>
-                    <a:p>
-                      <a:pPr algn="l"/>
-                      <a:r>
-                        <a:rPr sz="1000" b="0">
-                          <a:solidFill>
-                            <a:srgbClr val="1D1B43"/>
-                          </a:solidFill>
-                          <a:latin typeface="Calibri"/>
-                        </a:rPr>
-                        <a:t>0</a:t>
-                      </a:r>
-                    </a:p>
-                  </a:txBody>
-                  <a:tcPr>
-                    <a:solidFill>
-                      <a:srgbClr val="F2F2F2"/>
-                    </a:solidFill>
-                  </a:tcPr>
-                </a:tc>
-                <a:tc>
-                  <a:txBody>
-                    <a:bodyPr/>
-                    <a:lstStyle/>
-                    <a:p>
-                      <a:pPr algn="l"/>
-                      <a:r>
-                        <a:rPr sz="1000" b="0">
-                          <a:solidFill>
-                            <a:srgbClr val="1D1B43"/>
-                          </a:solidFill>
-                          <a:latin typeface="Calibri"/>
-                        </a:rPr>
-                        <a:t>100.0%</a:t>
-                      </a:r>
-                    </a:p>
-                  </a:txBody>
-                  <a:tcPr>
-                    <a:solidFill>
-                      <a:srgbClr val="F2F2F2"/>
-                    </a:solidFill>
-                  </a:tcPr>
-                </a:tc>
-                <a:tc>
-                  <a:txBody>
-                    <a:bodyPr/>
-                    <a:lstStyle/>
-                    <a:p>
-                      <a:pPr algn="l"/>
-                      <a:r>
-                        <a:rPr sz="1000" b="0">
-                          <a:solidFill>
-                            <a:srgbClr val="1D1B43"/>
-                          </a:solidFill>
-                          <a:latin typeface="Calibri"/>
-                        </a:rPr>
-                        <a:t>Excelente</a:t>
-                      </a:r>
-                    </a:p>
-                  </a:txBody>
-                  <a:tcPr>
-                    <a:solidFill>
-                      <a:srgbClr val="F2F2F2"/>
-                    </a:solidFill>
-                  </a:tcPr>
-                </a:tc>
-              </a:tr>
-              <a:tr h="457200">
-                <a:tc>
-                  <a:txBody>
-                    <a:bodyPr/>
-                    <a:lstStyle/>
-                    <a:p>
-                      <a:pPr algn="l"/>
-                      <a:r>
-                        <a:rPr sz="1000" b="0">
-                          <a:solidFill>
-                            <a:srgbClr val="1D1B43"/>
-                          </a:solidFill>
-                          <a:latin typeface="Calibri"/>
-                        </a:rPr>
-                        <a:t>SC</a:t>
-                      </a:r>
-                    </a:p>
-                  </a:txBody>
-                  <a:tcPr>
-                    <a:solidFill>
-                      <a:srgbClr val="FFFFFF"/>
-                    </a:solidFill>
-                  </a:tcPr>
-                </a:tc>
-                <a:tc>
-                  <a:txBody>
-                    <a:bodyPr/>
-                    <a:lstStyle/>
-                    <a:p>
-                      <a:pPr algn="l"/>
-                      <a:r>
-                        <a:rPr sz="1000" b="0">
-                          <a:solidFill>
-                            <a:srgbClr val="1D1B43"/>
-                          </a:solidFill>
-                          <a:latin typeface="Calibri"/>
-                        </a:rPr>
-                        <a:t>2</a:t>
-                      </a:r>
-                    </a:p>
-                  </a:txBody>
-                  <a:tcPr>
-                    <a:solidFill>
-                      <a:srgbClr val="FFFFFF"/>
-                    </a:solidFill>
-                  </a:tcPr>
-                </a:tc>
-                <a:tc>
-                  <a:txBody>
-                    <a:bodyPr/>
-                    <a:lstStyle/>
-                    <a:p>
-                      <a:pPr algn="l"/>
-                      <a:r>
-                        <a:rPr sz="1000" b="0">
-                          <a:solidFill>
-                            <a:srgbClr val="1D1B43"/>
-                          </a:solidFill>
-                          <a:latin typeface="Calibri"/>
-                        </a:rPr>
-                        <a:t>2</a:t>
-                      </a:r>
-                    </a:p>
-                  </a:txBody>
-                  <a:tcPr>
-                    <a:solidFill>
-                      <a:srgbClr val="FFFFFF"/>
-                    </a:solidFill>
-                  </a:tcPr>
-                </a:tc>
-                <a:tc>
-                  <a:txBody>
-                    <a:bodyPr/>
-                    <a:lstStyle/>
-                    <a:p>
-                      <a:pPr algn="l"/>
-                      <a:r>
-                        <a:rPr sz="1000" b="0">
-                          <a:solidFill>
-                            <a:srgbClr val="1D1B43"/>
-                          </a:solidFill>
-                          <a:latin typeface="Calibri"/>
-                        </a:rPr>
-                        <a:t>0</a:t>
-                      </a:r>
-                    </a:p>
-                  </a:txBody>
-                  <a:tcPr>
-                    <a:solidFill>
-                      <a:srgbClr val="FFFFFF"/>
-                    </a:solidFill>
-                  </a:tcPr>
-                </a:tc>
-                <a:tc>
-                  <a:txBody>
-                    <a:bodyPr/>
-                    <a:lstStyle/>
-                    <a:p>
-                      <a:pPr algn="l"/>
-                      <a:r>
-                        <a:rPr sz="1000" b="0">
-                          <a:solidFill>
-                            <a:srgbClr val="1D1B43"/>
-                          </a:solidFill>
-                          <a:latin typeface="Calibri"/>
-                        </a:rPr>
-                        <a:t>100.0%</a:t>
-                      </a:r>
-                    </a:p>
-                  </a:txBody>
-                  <a:tcPr>
-                    <a:solidFill>
-                      <a:srgbClr val="FFFFFF"/>
-                    </a:solidFill>
-                  </a:tcPr>
-                </a:tc>
-                <a:tc>
-                  <a:txBody>
-                    <a:bodyPr/>
-                    <a:lstStyle/>
-                    <a:p>
-                      <a:pPr algn="l"/>
-                      <a:r>
-                        <a:rPr sz="1000" b="0">
-                          <a:solidFill>
-                            <a:srgbClr val="1D1B43"/>
-                          </a:solidFill>
-                          <a:latin typeface="Calibri"/>
-                        </a:rPr>
-                        <a:t>Excelente</a:t>
-                      </a:r>
-                    </a:p>
-                  </a:txBody>
-                  <a:tcPr>
-                    <a:solidFill>
-                      <a:srgbClr val="FFFFFF"/>
-                    </a:solidFill>
-                  </a:tcPr>
-                </a:tc>
-              </a:tr>
-            </a:tbl>
-          </a:graphicData>
-        </a:graphic>
-      </p:graphicFrame>
-    </p:spTree>
-  </p:cSld>
-  <p:clrMapOvr>
-    <a:masterClrMapping/>
-  </p:clrMapOvr>
-</p:sld>
-</file>
-
-<file path=ppt/slides/slide6.xml><?xml version="1.0" encoding="utf-8"?>
-<p:sld xmlns:a="http://schemas.openxmlformats.org/drawingml/2006/main" xmlns:p="http://schemas.openxmlformats.org/presentationml/2006/main" xmlns:r="http://schemas.openxmlformats.org/officeDocument/2006/relationships">
-  <p:cSld>
-    <p:bg>
-      <p:bgPr>
-        <a:solidFill>
-          <a:srgbClr val="FFFFFF"/>
-        </a:solidFill>
-        <a:effectLst/>
-      </p:bgPr>
-    </p:bg>
-    <p:spTree>
-      <p:nvGrpSpPr>
-        <p:cNvPr id="1" name=""/>
-        <p:cNvGrpSpPr/>
-        <p:nvPr/>
-      </p:nvGrpSpPr>
-      <p:grpSpPr/>
-      <p:pic>
-        <p:nvPicPr>
-          <p:cNvPr id="2" name="Picture 1" descr="slide2_img3.png"/>
-          <p:cNvPicPr>
-            <a:picLocks noChangeAspect="1"/>
-          </p:cNvPicPr>
-          <p:nvPr/>
-        </p:nvPicPr>
-        <p:blipFill>
-          <a:blip r:embed="rId2"/>
-          <a:stretch>
-            <a:fillRect/>
-          </a:stretch>
-        </p:blipFill>
-        <p:spPr>
-          <a:xfrm>
-            <a:off x="10661904" y="155448"/>
-            <a:ext cx="1380744" cy="667512"/>
-          </a:xfrm>
-          <a:prstGeom prst="rect">
-            <a:avLst/>
-          </a:prstGeom>
-        </p:spPr>
-      </p:pic>
-      <p:sp>
-        <p:nvSpPr>
-          <p:cNvPr id="3" name="TextBox 2"/>
-          <p:cNvSpPr txBox="1"/>
-          <p:nvPr/>
-        </p:nvSpPr>
-        <p:spPr>
-          <a:xfrm>
-            <a:off x="749808" y="502920"/>
             <a:ext cx="10058400" cy="914400"/>
           </a:xfrm>
           <a:prstGeom prst="rect">
@@ -7688,7 +6558,7 @@
                           </a:solidFill>
                           <a:latin typeface="Calibri"/>
                         </a:rPr>
-                        <a:t>ABECOM ROLAMENTOS E - SAO PAULO / SP</a:t>
+                        <a:t>MINASFAST TECNOLOGIA - CONTAGEM / MG</a:t>
                       </a:r>
                     </a:p>
                   </a:txBody>
@@ -7711,7 +6581,7 @@
                           </a:solidFill>
                           <a:latin typeface="Calibri"/>
                         </a:rPr>
-                        <a:t>25</a:t>
+                        <a:t>6</a:t>
                       </a:r>
                     </a:p>
                   </a:txBody>
@@ -7734,7 +6604,7 @@
                           </a:solidFill>
                           <a:latin typeface="Calibri"/>
                         </a:rPr>
-                        <a:t>24</a:t>
+                        <a:t>6</a:t>
                       </a:r>
                     </a:p>
                   </a:txBody>
@@ -7757,7 +6627,7 @@
                           </a:solidFill>
                           <a:latin typeface="Calibri"/>
                         </a:rPr>
-                        <a:t>1</a:t>
+                        <a:t>0</a:t>
                       </a:r>
                     </a:p>
                   </a:txBody>
@@ -7780,7 +6650,7 @@
                           </a:solidFill>
                           <a:latin typeface="Calibri"/>
                         </a:rPr>
-                        <a:t>96.0%</a:t>
+                        <a:t>100.0%</a:t>
                       </a:r>
                     </a:p>
                   </a:txBody>
@@ -7851,7 +6721,7 @@
                           </a:solidFill>
                           <a:latin typeface="Calibri"/>
                         </a:rPr>
-                        <a:t>ENCOPEL COMERCIO DE - SAO PAULO / SP</a:t>
+                        <a:t>GMX TECNOLOGIA E SER - RIO DE JANEIRO / RJ</a:t>
                       </a:r>
                     </a:p>
                   </a:txBody>
@@ -7874,7 +6744,7 @@
                           </a:solidFill>
                           <a:latin typeface="Calibri"/>
                         </a:rPr>
-                        <a:t>21</a:t>
+                        <a:t>5</a:t>
                       </a:r>
                     </a:p>
                   </a:txBody>
@@ -7897,7 +6767,7 @@
                           </a:solidFill>
                           <a:latin typeface="Calibri"/>
                         </a:rPr>
-                        <a:t>19</a:t>
+                        <a:t>5</a:t>
                       </a:r>
                     </a:p>
                   </a:txBody>
@@ -7920,7 +6790,7 @@
                           </a:solidFill>
                           <a:latin typeface="Calibri"/>
                         </a:rPr>
-                        <a:t>2</a:t>
+                        <a:t>0</a:t>
                       </a:r>
                     </a:p>
                   </a:txBody>
@@ -7943,7 +6813,7 @@
                           </a:solidFill>
                           <a:latin typeface="Calibri"/>
                         </a:rPr>
-                        <a:t>90.5%</a:t>
+                        <a:t>100.0%</a:t>
                       </a:r>
                     </a:p>
                   </a:txBody>
@@ -7966,7 +6836,7 @@
                           </a:solidFill>
                           <a:latin typeface="Calibri"/>
                         </a:rPr>
-                        <a:t>Regular</a:t>
+                        <a:t>Excelente</a:t>
                       </a:r>
                     </a:p>
                   </a:txBody>
@@ -8014,7 +6884,7 @@
                           </a:solidFill>
                           <a:latin typeface="Calibri"/>
                         </a:rPr>
-                        <a:t>IRSA ROLAMENTOS S/A - SANTO ANDRE / SP</a:t>
+                        <a:t>BEM ESTAR LONDRINA L - LONDRINA / PR</a:t>
                       </a:r>
                     </a:p>
                   </a:txBody>
@@ -8037,7 +6907,7 @@
                           </a:solidFill>
                           <a:latin typeface="Calibri"/>
                         </a:rPr>
-                        <a:t>14</a:t>
+                        <a:t>5</a:t>
                       </a:r>
                     </a:p>
                   </a:txBody>
@@ -8060,7 +6930,7 @@
                           </a:solidFill>
                           <a:latin typeface="Calibri"/>
                         </a:rPr>
-                        <a:t>13</a:t>
+                        <a:t>5</a:t>
                       </a:r>
                     </a:p>
                   </a:txBody>
@@ -8083,7 +6953,7 @@
                           </a:solidFill>
                           <a:latin typeface="Calibri"/>
                         </a:rPr>
-                        <a:t>1</a:t>
+                        <a:t>0</a:t>
                       </a:r>
                     </a:p>
                   </a:txBody>
@@ -8106,7 +6976,7 @@
                           </a:solidFill>
                           <a:latin typeface="Calibri"/>
                         </a:rPr>
-                        <a:t>92.9%</a:t>
+                        <a:t>100.0%</a:t>
                       </a:r>
                     </a:p>
                   </a:txBody>
@@ -8129,7 +6999,7 @@
                           </a:solidFill>
                           <a:latin typeface="Calibri"/>
                         </a:rPr>
-                        <a:t>Regular</a:t>
+                        <a:t>Excelente</a:t>
                       </a:r>
                     </a:p>
                   </a:txBody>
@@ -8177,7 +7047,7 @@
                           </a:solidFill>
                           <a:latin typeface="Calibri"/>
                         </a:rPr>
-                        <a:t>NORPEM COMERCIAL LTD - SAO PAULO / SP</a:t>
+                        <a:t>VIP REPAIR CENTER AS - CURITIBA / PR</a:t>
                       </a:r>
                     </a:p>
                   </a:txBody>
@@ -8200,7 +7070,7 @@
                           </a:solidFill>
                           <a:latin typeface="Calibri"/>
                         </a:rPr>
-                        <a:t>6</a:t>
+                        <a:t>4</a:t>
                       </a:r>
                     </a:p>
                   </a:txBody>
@@ -8223,7 +7093,7 @@
                           </a:solidFill>
                           <a:latin typeface="Calibri"/>
                         </a:rPr>
-                        <a:t>6</a:t>
+                        <a:t>4</a:t>
                       </a:r>
                     </a:p>
                   </a:txBody>
@@ -8340,7 +7210,7 @@
                           </a:solidFill>
                           <a:latin typeface="Calibri"/>
                         </a:rPr>
-                        <a:t>BEM ESTAR LONDRINA L - LONDRINA / PR</a:t>
+                        <a:t>FIX IT ASSISTENCIA E - PORTO ALEGRE / RS</a:t>
                       </a:r>
                     </a:p>
                   </a:txBody>
@@ -8363,7 +7233,7 @@
                           </a:solidFill>
                           <a:latin typeface="Calibri"/>
                         </a:rPr>
-                        <a:t>5</a:t>
+                        <a:t>4</a:t>
                       </a:r>
                     </a:p>
                   </a:txBody>
@@ -8386,7 +7256,7 @@
                           </a:solidFill>
                           <a:latin typeface="Calibri"/>
                         </a:rPr>
-                        <a:t>5</a:t>
+                        <a:t>4</a:t>
                       </a:r>
                     </a:p>
                   </a:txBody>
@@ -8503,7 +7373,7 @@
                           </a:solidFill>
                           <a:latin typeface="Calibri"/>
                         </a:rPr>
-                        <a:t>VIP REPAIR CENTER AS - CURITIBA / PR</a:t>
+                        <a:t>GLOBAL EXPRESS ASSIS - UBERLANDIA / MG</a:t>
                       </a:r>
                     </a:p>
                   </a:txBody>
@@ -8526,7 +7396,7 @@
                           </a:solidFill>
                           <a:latin typeface="Calibri"/>
                         </a:rPr>
-                        <a:t>3</a:t>
+                        <a:t>4</a:t>
                       </a:r>
                     </a:p>
                   </a:txBody>
@@ -8549,7 +7419,7 @@
                           </a:solidFill>
                           <a:latin typeface="Calibri"/>
                         </a:rPr>
-                        <a:t>3</a:t>
+                        <a:t>4</a:t>
                       </a:r>
                     </a:p>
                   </a:txBody>
@@ -8666,7 +7536,7 @@
                           </a:solidFill>
                           <a:latin typeface="Calibri"/>
                         </a:rPr>
-                        <a:t>ELETRORARO COM DE EL - BELO HORIZONTE / MG</a:t>
+                        <a:t>EXCELLENCE ELETRODOM - ARAPONGAS / PR</a:t>
                       </a:r>
                     </a:p>
                   </a:txBody>
@@ -8689,7 +7559,7 @@
                           </a:solidFill>
                           <a:latin typeface="Calibri"/>
                         </a:rPr>
-                        <a:t>3</a:t>
+                        <a:t>4</a:t>
                       </a:r>
                     </a:p>
                   </a:txBody>
@@ -8712,7 +7582,7 @@
                           </a:solidFill>
                           <a:latin typeface="Calibri"/>
                         </a:rPr>
-                        <a:t>3</a:t>
+                        <a:t>4</a:t>
                       </a:r>
                     </a:p>
                   </a:txBody>
@@ -8829,7 +7699,7 @@
                           </a:solidFill>
                           <a:latin typeface="Calibri"/>
                         </a:rPr>
-                        <a:t>TXM VITORIA LTDA - VITORIA / ES</a:t>
+                        <a:t>ELETRORARO COM DE EL - BELO HORIZONTE / MG</a:t>
                       </a:r>
                     </a:p>
                   </a:txBody>
@@ -8852,7 +7722,7 @@
                           </a:solidFill>
                           <a:latin typeface="Calibri"/>
                         </a:rPr>
-                        <a:t>2</a:t>
+                        <a:t>3</a:t>
                       </a:r>
                     </a:p>
                   </a:txBody>
@@ -8875,7 +7745,7 @@
                           </a:solidFill>
                           <a:latin typeface="Calibri"/>
                         </a:rPr>
-                        <a:t>2</a:t>
+                        <a:t>3</a:t>
                       </a:r>
                     </a:p>
                   </a:txBody>
@@ -8992,7 +7862,7 @@
                           </a:solidFill>
                           <a:latin typeface="Calibri"/>
                         </a:rPr>
-                        <a:t>GLOBAL EXPRESS ASSIS - UBERLANDIA / MG</a:t>
+                        <a:t>KNOLL REPARACAO E MA - FLORIANOPOLIS / SC</a:t>
                       </a:r>
                     </a:p>
                   </a:txBody>
@@ -9015,7 +7885,7 @@
                           </a:solidFill>
                           <a:latin typeface="Calibri"/>
                         </a:rPr>
-                        <a:t>2</a:t>
+                        <a:t>3</a:t>
                       </a:r>
                     </a:p>
                   </a:txBody>
@@ -9038,7 +7908,7 @@
                           </a:solidFill>
                           <a:latin typeface="Calibri"/>
                         </a:rPr>
-                        <a:t>2</a:t>
+                        <a:t>3</a:t>
                       </a:r>
                     </a:p>
                   </a:txBody>
@@ -9155,7 +8025,7 @@
                           </a:solidFill>
                           <a:latin typeface="Calibri"/>
                         </a:rPr>
-                        <a:t>INFINITY ASSISTENCIA - JUIZ DE FORA / MG</a:t>
+                        <a:t>V CELL COMERCIO E SE - DUQUE DE CAXIAS / RJ</a:t>
                       </a:r>
                     </a:p>
                   </a:txBody>
@@ -9201,7 +8071,7 @@
                           </a:solidFill>
                           <a:latin typeface="Calibri"/>
                         </a:rPr>
-                        <a:t>1</a:t>
+                        <a:t>2</a:t>
                       </a:r>
                     </a:p>
                   </a:txBody>
@@ -9224,7 +8094,7 @@
                           </a:solidFill>
                           <a:latin typeface="Calibri"/>
                         </a:rPr>
-                        <a:t>1</a:t>
+                        <a:t>0</a:t>
                       </a:r>
                     </a:p>
                   </a:txBody>
@@ -9247,7 +8117,7 @@
                           </a:solidFill>
                           <a:latin typeface="Calibri"/>
                         </a:rPr>
-                        <a:t>50.0%</a:t>
+                        <a:t>100.0%</a:t>
                       </a:r>
                     </a:p>
                   </a:txBody>
@@ -9270,7 +8140,7 @@
                           </a:solidFill>
                           <a:latin typeface="Calibri"/>
                         </a:rPr>
-                        <a:t>Atencao</a:t>
+                        <a:t>Excelente</a:t>
                       </a:r>
                     </a:p>
                   </a:txBody>
@@ -9318,7 +8188,7 @@
                           </a:solidFill>
                           <a:latin typeface="Calibri"/>
                         </a:rPr>
-                        <a:t>FIX IT ASSISTENCIA E - PORTO ALEGRE / RS</a:t>
+                        <a:t>LUCIANO MUMBACH ELET - CERRO LARGO / RS</a:t>
                       </a:r>
                     </a:p>
                   </a:txBody>
@@ -9481,7 +8351,7 @@
                           </a:solidFill>
                           <a:latin typeface="Calibri"/>
                         </a:rPr>
-                        <a:t>LUCIANO MUMBACH ELET - CERRO LARGO / RS</a:t>
+                        <a:t>INFINITY ASSISTENCIA - JUIZ DE FORA / MG</a:t>
                       </a:r>
                     </a:p>
                   </a:txBody>
@@ -9644,7 +8514,7 @@
                           </a:solidFill>
                           <a:latin typeface="Calibri"/>
                         </a:rPr>
-                        <a:t>COLD SUMMER SOLUCOES - RIO DE JANEIRO / RJ</a:t>
+                        <a:t>BEM ESTAR CLIMATIZAC - TUBARAO / SC</a:t>
                       </a:r>
                     </a:p>
                   </a:txBody>
@@ -9807,7 +8677,7 @@
                           </a:solidFill>
                           <a:latin typeface="Calibri"/>
                         </a:rPr>
-                        <a:t>GMX TECNOLOGIA E SER - RIO DE JANEIRO / RJ</a:t>
+                        <a:t>COLD SUMMER SOLUCOES - RIO DE JANEIRO / RJ</a:t>
                       </a:r>
                     </a:p>
                   </a:txBody>
@@ -9945,7 +8815,7 @@
 </p:sld>
 </file>
 
-<file path=ppt/slides/slide7.xml><?xml version="1.0" encoding="utf-8"?>
+<file path=ppt/slides/slide6.xml><?xml version="1.0" encoding="utf-8"?>
 <p:sld xmlns:a="http://schemas.openxmlformats.org/drawingml/2006/main" xmlns:p="http://schemas.openxmlformats.org/presentationml/2006/main" xmlns:r="http://schemas.openxmlformats.org/officeDocument/2006/relationships">
   <p:cSld>
     <p:bg>

--- a/TECADI_ARMAZENS_GERAIS_LTDA_(I.pptx
+++ b/TECADI_ARMAZENS_GERAIS_LTDA_(I.pptx
@@ -142,10 +142,13 @@
           </c:spPr>
           <c:cat>
             <c:strRef>
-              <c:f>Sheet1!$A$2:$A$2</c:f>
+              <c:f>Sheet1!$A$2:$A$3</c:f>
               <c:strCache>
-                <c:ptCount val="1"/>
+                <c:ptCount val="2"/>
                 <c:pt idx="0">
+                  <c:v>Maio 2026</c:v>
+                </c:pt>
+                <c:pt idx="1">
                   <c:v>Abril 2026</c:v>
                 </c:pt>
               </c:strCache>
@@ -153,11 +156,14 @@
           </c:cat>
           <c:val>
             <c:numRef>
-              <c:f>Sheet1!$B$2:$B$2</c:f>
+              <c:f>Sheet1!$B$2:$B$3</c:f>
               <c:numCache>
                 <c:formatCode>General</c:formatCode>
-                <c:ptCount val="1"/>
+                <c:ptCount val="2"/>
                 <c:pt idx="0">
+                  <c:v>89</c:v>
+                </c:pt>
+                <c:pt idx="1">
                   <c:v>51</c:v>
                 </c:pt>
               </c:numCache>
@@ -185,10 +191,13 @@
           </c:spPr>
           <c:cat>
             <c:strRef>
-              <c:f>Sheet1!$A$2:$A$2</c:f>
+              <c:f>Sheet1!$A$2:$A$3</c:f>
               <c:strCache>
-                <c:ptCount val="1"/>
+                <c:ptCount val="2"/>
                 <c:pt idx="0">
+                  <c:v>Maio 2026</c:v>
+                </c:pt>
+                <c:pt idx="1">
                   <c:v>Abril 2026</c:v>
                 </c:pt>
               </c:strCache>
@@ -196,11 +205,14 @@
           </c:cat>
           <c:val>
             <c:numRef>
-              <c:f>Sheet1!$C$2:$C$2</c:f>
+              <c:f>Sheet1!$C$2:$C$3</c:f>
               <c:numCache>
                 <c:formatCode>General</c:formatCode>
-                <c:ptCount val="1"/>
+                <c:ptCount val="2"/>
                 <c:pt idx="0">
+                  <c:v>5</c:v>
+                </c:pt>
+                <c:pt idx="1">
                   <c:v>0</c:v>
                 </c:pt>
               </c:numCache>
@@ -4141,7 +4153,7 @@
                           </a:solidFill>
                           <a:latin typeface="Calibri"/>
                         </a:rPr>
-                        <a:t>Marco 2026</a:t>
+                        <a:t>Maio 2026</a:t>
                       </a:r>
                     </a:p>
                   </a:txBody>
@@ -4235,7 +4247,7 @@
                           </a:solidFill>
                           <a:latin typeface="Calibri"/>
                         </a:rPr>
-                        <a:t>-</a:t>
+                        <a:t>94</a:t>
                       </a:r>
                     </a:p>
                   </a:txBody>
@@ -4281,7 +4293,7 @@
                           </a:solidFill>
                           <a:latin typeface="Calibri"/>
                         </a:rPr>
-                        <a:t>-</a:t>
+                        <a:t>- 43</a:t>
                       </a:r>
                     </a:p>
                   </a:txBody>
@@ -4329,7 +4341,7 @@
                           </a:solidFill>
                           <a:latin typeface="Calibri"/>
                         </a:rPr>
-                        <a:t>-</a:t>
+                        <a:t>89</a:t>
                       </a:r>
                     </a:p>
                   </a:txBody>
@@ -4375,7 +4387,7 @@
                           </a:solidFill>
                           <a:latin typeface="Calibri"/>
                         </a:rPr>
-                        <a:t>-</a:t>
+                        <a:t>- 38</a:t>
                       </a:r>
                     </a:p>
                   </a:txBody>
@@ -4423,7 +4435,7 @@
                           </a:solidFill>
                           <a:latin typeface="Calibri"/>
                         </a:rPr>
-                        <a:t>-</a:t>
+                        <a:t>5</a:t>
                       </a:r>
                     </a:p>
                   </a:txBody>
@@ -4469,7 +4481,7 @@
                           </a:solidFill>
                           <a:latin typeface="Calibri"/>
                         </a:rPr>
-                        <a:t>-</a:t>
+                        <a:t>- 5</a:t>
                       </a:r>
                     </a:p>
                   </a:txBody>
@@ -4517,7 +4529,7 @@
                           </a:solidFill>
                           <a:latin typeface="Calibri"/>
                         </a:rPr>
-                        <a:t>-</a:t>
+                        <a:t>94.7%</a:t>
                       </a:r>
                     </a:p>
                   </a:txBody>
@@ -4563,7 +4575,7 @@
                           </a:solidFill>
                           <a:latin typeface="Calibri"/>
                         </a:rPr>
-                        <a:t>-</a:t>
+                        <a:t>+ 5.3pp</a:t>
                       </a:r>
                     </a:p>
                   </a:txBody>
@@ -4734,7 +4746,7 @@
         </p:nvGraphicFramePr>
         <p:xfrm>
           <a:off x="7955279" y="2286000"/>
-          <a:ext cx="4480560" cy="877824"/>
+          <a:ext cx="4480560" cy="1316736"/>
         </p:xfrm>
         <a:graphic>
           <a:graphicData uri="http://schemas.openxmlformats.org/drawingml/2006/table">
@@ -4880,13 +4892,130 @@
                           </a:solidFill>
                           <a:latin typeface="Calibri"/>
                         </a:rPr>
+                        <a:t>Maio 2026</a:t>
+                      </a:r>
+                    </a:p>
+                  </a:txBody>
+                  <a:tcPr>
+                    <a:solidFill>
+                      <a:srgbClr val="FFFFFF"/>
+                    </a:solidFill>
+                  </a:tcPr>
+                </a:tc>
+                <a:tc>
+                  <a:txBody>
+                    <a:bodyPr/>
+                    <a:lstStyle/>
+                    <a:p>
+                      <a:pPr algn="l"/>
+                      <a:r>
+                        <a:rPr sz="1000" b="0">
+                          <a:solidFill>
+                            <a:srgbClr val="1D1B43"/>
+                          </a:solidFill>
+                          <a:latin typeface="Calibri"/>
+                        </a:rPr>
+                        <a:t>94</a:t>
+                      </a:r>
+                    </a:p>
+                  </a:txBody>
+                  <a:tcPr>
+                    <a:solidFill>
+                      <a:srgbClr val="FFFFFF"/>
+                    </a:solidFill>
+                  </a:tcPr>
+                </a:tc>
+                <a:tc>
+                  <a:txBody>
+                    <a:bodyPr/>
+                    <a:lstStyle/>
+                    <a:p>
+                      <a:pPr algn="l"/>
+                      <a:r>
+                        <a:rPr sz="1000" b="0">
+                          <a:solidFill>
+                            <a:srgbClr val="1D1B43"/>
+                          </a:solidFill>
+                          <a:latin typeface="Calibri"/>
+                        </a:rPr>
+                        <a:t>89</a:t>
+                      </a:r>
+                    </a:p>
+                  </a:txBody>
+                  <a:tcPr>
+                    <a:solidFill>
+                      <a:srgbClr val="FFFFFF"/>
+                    </a:solidFill>
+                  </a:tcPr>
+                </a:tc>
+                <a:tc>
+                  <a:txBody>
+                    <a:bodyPr/>
+                    <a:lstStyle/>
+                    <a:p>
+                      <a:pPr algn="l"/>
+                      <a:r>
+                        <a:rPr sz="1000" b="0">
+                          <a:solidFill>
+                            <a:srgbClr val="1D1B43"/>
+                          </a:solidFill>
+                          <a:latin typeface="Calibri"/>
+                        </a:rPr>
+                        <a:t>5</a:t>
+                      </a:r>
+                    </a:p>
+                  </a:txBody>
+                  <a:tcPr>
+                    <a:solidFill>
+                      <a:srgbClr val="FFFFFF"/>
+                    </a:solidFill>
+                  </a:tcPr>
+                </a:tc>
+                <a:tc>
+                  <a:txBody>
+                    <a:bodyPr/>
+                    <a:lstStyle/>
+                    <a:p>
+                      <a:pPr algn="l"/>
+                      <a:r>
+                        <a:rPr sz="1000" b="0">
+                          <a:solidFill>
+                            <a:srgbClr val="1D1B43"/>
+                          </a:solidFill>
+                          <a:latin typeface="Calibri"/>
+                        </a:rPr>
+                        <a:t>94.7%</a:t>
+                      </a:r>
+                    </a:p>
+                  </a:txBody>
+                  <a:tcPr>
+                    <a:solidFill>
+                      <a:srgbClr val="FFFFFF"/>
+                    </a:solidFill>
+                  </a:tcPr>
+                </a:tc>
+              </a:tr>
+              <a:tr h="438912">
+                <a:tc>
+                  <a:txBody>
+                    <a:bodyPr/>
+                    <a:lstStyle/>
+                    <a:p>
+                      <a:pPr algn="l"/>
+                      <a:r>
+                        <a:rPr sz="1000" b="0">
+                          <a:solidFill>
+                            <a:srgbClr val="1D1B43"/>
+                          </a:solidFill>
+                          <a:latin typeface="Calibri"/>
+                        </a:rPr>
                         <a:t>Abril 2026</a:t>
                       </a:r>
                     </a:p>
                   </a:txBody>
                   <a:tcPr>
                     <a:solidFill>
-                      <a:srgbClr val="FFFFFF"/>
+                      <a:srgbClr val="F2F2F2"/>
                     </a:solidFill>
                   </a:tcPr>
                 </a:tc>
@@ -4909,7 +5038,7 @@
                   </a:txBody>
                   <a:tcPr>
                     <a:solidFill>
-                      <a:srgbClr val="FFFFFF"/>
+                      <a:srgbClr val="F2F2F2"/>
                     </a:solidFill>
                   </a:tcPr>
                 </a:tc>
@@ -4932,7 +5061,7 @@
                   </a:txBody>
                   <a:tcPr>
                     <a:solidFill>
-                      <a:srgbClr val="FFFFFF"/>
+                      <a:srgbClr val="F2F2F2"/>
                     </a:solidFill>
                   </a:tcPr>
                 </a:tc>
@@ -4955,7 +5084,7 @@
                   </a:txBody>
                   <a:tcPr>
                     <a:solidFill>
-                      <a:srgbClr val="FFFFFF"/>
+                      <a:srgbClr val="F2F2F2"/>
                     </a:solidFill>
                   </a:tcPr>
                 </a:tc>
@@ -4978,7 +5107,7 @@
                   </a:txBody>
                   <a:tcPr>
                     <a:solidFill>
-                      <a:srgbClr val="FFFFFF"/>
+                      <a:srgbClr val="F2F2F2"/>
                     </a:solidFill>
                   </a:tcPr>
                 </a:tc>

--- a/TECADI_ARMAZENS_GERAIS_LTDA_(I.pptx
+++ b/TECADI_ARMAZENS_GERAIS_LTDA_(I.pptx
@@ -161,7 +161,7 @@
                 <c:formatCode>General</c:formatCode>
                 <c:ptCount val="2"/>
                 <c:pt idx="0">
-                  <c:v>89</c:v>
+                  <c:v>110</c:v>
                 </c:pt>
                 <c:pt idx="1">
                   <c:v>51</c:v>
@@ -4247,7 +4247,7 @@
                           </a:solidFill>
                           <a:latin typeface="Calibri"/>
                         </a:rPr>
-                        <a:t>94</a:t>
+                        <a:t>115</a:t>
                       </a:r>
                     </a:p>
                   </a:txBody>
@@ -4293,7 +4293,7 @@
                           </a:solidFill>
                           <a:latin typeface="Calibri"/>
                         </a:rPr>
-                        <a:t>- 43</a:t>
+                        <a:t>- 64</a:t>
                       </a:r>
                     </a:p>
                   </a:txBody>
@@ -4341,7 +4341,7 @@
                           </a:solidFill>
                           <a:latin typeface="Calibri"/>
                         </a:rPr>
-                        <a:t>89</a:t>
+                        <a:t>110</a:t>
                       </a:r>
                     </a:p>
                   </a:txBody>
@@ -4387,7 +4387,7 @@
                           </a:solidFill>
                           <a:latin typeface="Calibri"/>
                         </a:rPr>
-                        <a:t>- 38</a:t>
+                        <a:t>- 59</a:t>
                       </a:r>
                     </a:p>
                   </a:txBody>
@@ -4529,7 +4529,7 @@
                           </a:solidFill>
                           <a:latin typeface="Calibri"/>
                         </a:rPr>
-                        <a:t>94.7%</a:t>
+                        <a:t>95.7%</a:t>
                       </a:r>
                     </a:p>
                   </a:txBody>
@@ -4575,7 +4575,7 @@
                           </a:solidFill>
                           <a:latin typeface="Calibri"/>
                         </a:rPr>
-                        <a:t>+ 5.3pp</a:t>
+                        <a:t>+ 4.3pp</a:t>
                       </a:r>
                     </a:p>
                   </a:txBody>
@@ -4915,7 +4915,7 @@
                           </a:solidFill>
                           <a:latin typeface="Calibri"/>
                         </a:rPr>
-                        <a:t>94</a:t>
+                        <a:t>115</a:t>
                       </a:r>
                     </a:p>
                   </a:txBody>
@@ -4938,7 +4938,7 @@
                           </a:solidFill>
                           <a:latin typeface="Calibri"/>
                         </a:rPr>
-                        <a:t>89</a:t>
+                        <a:t>110</a:t>
                       </a:r>
                     </a:p>
                   </a:txBody>
@@ -4984,7 +4984,7 @@
                           </a:solidFill>
                           <a:latin typeface="Calibri"/>
                         </a:rPr>
-                        <a:t>94.7%</a:t>
+                        <a:t>95.7%</a:t>
                       </a:r>
                     </a:p>
                   </a:txBody>

--- a/TECADI_ARMAZENS_GERAIS_LTDA_(I.pptx
+++ b/TECADI_ARMAZENS_GERAIS_LTDA_(I.pptx
@@ -11,6 +11,7 @@
     <p:sldId id="259" r:id="rId10"/>
     <p:sldId id="260" r:id="rId11"/>
     <p:sldId id="261" r:id="rId12"/>
+    <p:sldId id="262" r:id="rId13"/>
   </p:sldIdLst>
   <p:sldSz cx="12188952" cy="6858000" type="screen4x3"/>
   <p:notesSz cx="6858000" cy="9144000"/>
@@ -146,10 +147,10 @@
               <c:strCache>
                 <c:ptCount val="2"/>
                 <c:pt idx="0">
-                  <c:v>Maio 2026</c:v>
+                  <c:v>Abril 2026</c:v>
                 </c:pt>
                 <c:pt idx="1">
-                  <c:v>Abril 2026</c:v>
+                  <c:v>Maio 2026</c:v>
                 </c:pt>
               </c:strCache>
             </c:strRef>
@@ -161,10 +162,10 @@
                 <c:formatCode>General</c:formatCode>
                 <c:ptCount val="2"/>
                 <c:pt idx="0">
-                  <c:v>110</c:v>
+                  <c:v>51</c:v>
                 </c:pt>
                 <c:pt idx="1">
-                  <c:v>51</c:v>
+                  <c:v>114</c:v>
                 </c:pt>
               </c:numCache>
             </c:numRef>
@@ -195,10 +196,10 @@
               <c:strCache>
                 <c:ptCount val="2"/>
                 <c:pt idx="0">
-                  <c:v>Maio 2026</c:v>
+                  <c:v>Abril 2026</c:v>
                 </c:pt>
                 <c:pt idx="1">
-                  <c:v>Abril 2026</c:v>
+                  <c:v>Maio 2026</c:v>
                 </c:pt>
               </c:strCache>
             </c:strRef>
@@ -210,10 +211,10 @@
                 <c:formatCode>General</c:formatCode>
                 <c:ptCount val="2"/>
                 <c:pt idx="0">
-                  <c:v>5</c:v>
+                  <c:v>0</c:v>
                 </c:pt>
                 <c:pt idx="1">
-                  <c:v>0</c:v>
+                  <c:v>5</c:v>
                 </c:pt>
               </c:numCache>
             </c:numRef>
@@ -3386,7 +3387,7 @@
                 </a:solidFill>
                 <a:latin typeface="Calibri"/>
               </a:rPr>
-              <a:t>INDICADORES ABRIL 2026</a:t>
+              <a:t>INDICADORES MAIO 2026</a:t>
             </a:r>
           </a:p>
         </p:txBody>
@@ -3707,7 +3708,7 @@
                 </a:solidFill>
                 <a:latin typeface="Calibri"/>
               </a:rPr>
-              <a:t>51</a:t>
+              <a:t>119</a:t>
             </a:r>
           </a:p>
         </p:txBody>
@@ -3822,7 +3823,7 @@
                 </a:solidFill>
                 <a:latin typeface="Calibri"/>
               </a:rPr>
-              <a:t>51</a:t>
+              <a:t>114</a:t>
             </a:r>
           </a:p>
         </p:txBody>
@@ -3933,11 +3934,11 @@
             <a:r>
               <a:rPr sz="2800" b="1">
                 <a:solidFill>
-                  <a:srgbClr val="10B981"/>
+                  <a:srgbClr val="EF4444"/>
                 </a:solidFill>
                 <a:latin typeface="Calibri"/>
               </a:rPr>
-              <a:t>0</a:t>
+              <a:t>5</a:t>
             </a:r>
           </a:p>
         </p:txBody>
@@ -4048,11 +4049,11 @@
             <a:r>
               <a:rPr sz="2800" b="1">
                 <a:solidFill>
-                  <a:srgbClr val="10B981"/>
+                  <a:srgbClr val="F59E0B"/>
                 </a:solidFill>
                 <a:latin typeface="Calibri"/>
               </a:rPr>
-              <a:t>100.0%</a:t>
+              <a:t>95.8%</a:t>
             </a:r>
           </a:p>
         </p:txBody>
@@ -4153,30 +4154,30 @@
                           </a:solidFill>
                           <a:latin typeface="Calibri"/>
                         </a:rPr>
+                        <a:t>Abril 2026</a:t>
+                      </a:r>
+                    </a:p>
+                  </a:txBody>
+                  <a:tcPr>
+                    <a:solidFill>
+                      <a:srgbClr val="1D1B43"/>
+                    </a:solidFill>
+                  </a:tcPr>
+                </a:tc>
+                <a:tc>
+                  <a:txBody>
+                    <a:bodyPr/>
+                    <a:lstStyle/>
+                    <a:p>
+                      <a:pPr algn="ctr"/>
+                      <a:r>
+                        <a:rPr sz="1100" b="1">
+                          <a:solidFill>
+                            <a:srgbClr val="FFFFFF"/>
+                          </a:solidFill>
+                          <a:latin typeface="Calibri"/>
+                        </a:rPr>
                         <a:t>Maio 2026</a:t>
-                      </a:r>
-                    </a:p>
-                  </a:txBody>
-                  <a:tcPr>
-                    <a:solidFill>
-                      <a:srgbClr val="1D1B43"/>
-                    </a:solidFill>
-                  </a:tcPr>
-                </a:tc>
-                <a:tc>
-                  <a:txBody>
-                    <a:bodyPr/>
-                    <a:lstStyle/>
-                    <a:p>
-                      <a:pPr algn="ctr"/>
-                      <a:r>
-                        <a:rPr sz="1100" b="1">
-                          <a:solidFill>
-                            <a:srgbClr val="FFFFFF"/>
-                          </a:solidFill>
-                          <a:latin typeface="Calibri"/>
-                        </a:rPr>
-                        <a:t>Abril 2026</a:t>
                       </a:r>
                     </a:p>
                   </a:txBody>
@@ -4247,7 +4248,7 @@
                           </a:solidFill>
                           <a:latin typeface="Calibri"/>
                         </a:rPr>
-                        <a:t>115</a:t>
+                        <a:t>51</a:t>
                       </a:r>
                     </a:p>
                   </a:txBody>
@@ -4270,7 +4271,7 @@
                           </a:solidFill>
                           <a:latin typeface="Calibri"/>
                         </a:rPr>
-                        <a:t>51</a:t>
+                        <a:t>119</a:t>
                       </a:r>
                     </a:p>
                   </a:txBody>
@@ -4293,7 +4294,7 @@
                           </a:solidFill>
                           <a:latin typeface="Calibri"/>
                         </a:rPr>
-                        <a:t>- 64</a:t>
+                        <a:t>+ 68</a:t>
                       </a:r>
                     </a:p>
                   </a:txBody>
@@ -4341,7 +4342,7 @@
                           </a:solidFill>
                           <a:latin typeface="Calibri"/>
                         </a:rPr>
-                        <a:t>110</a:t>
+                        <a:t>51</a:t>
                       </a:r>
                     </a:p>
                   </a:txBody>
@@ -4364,7 +4365,7 @@
                           </a:solidFill>
                           <a:latin typeface="Calibri"/>
                         </a:rPr>
-                        <a:t>51</a:t>
+                        <a:t>114</a:t>
                       </a:r>
                     </a:p>
                   </a:txBody>
@@ -4387,7 +4388,7 @@
                           </a:solidFill>
                           <a:latin typeface="Calibri"/>
                         </a:rPr>
-                        <a:t>- 59</a:t>
+                        <a:t>+ 63</a:t>
                       </a:r>
                     </a:p>
                   </a:txBody>
@@ -4435,6 +4436,29 @@
                           </a:solidFill>
                           <a:latin typeface="Calibri"/>
                         </a:rPr>
+                        <a:t>-</a:t>
+                      </a:r>
+                    </a:p>
+                  </a:txBody>
+                  <a:tcPr>
+                    <a:solidFill>
+                      <a:srgbClr val="FFFFFF"/>
+                    </a:solidFill>
+                  </a:tcPr>
+                </a:tc>
+                <a:tc>
+                  <a:txBody>
+                    <a:bodyPr/>
+                    <a:lstStyle/>
+                    <a:p>
+                      <a:pPr algn="l"/>
+                      <a:r>
+                        <a:rPr sz="1000" b="0">
+                          <a:solidFill>
+                            <a:srgbClr val="1D1B43"/>
+                          </a:solidFill>
+                          <a:latin typeface="Calibri"/>
+                        </a:rPr>
                         <a:t>5</a:t>
                       </a:r>
                     </a:p>
@@ -4458,30 +4482,7 @@
                           </a:solidFill>
                           <a:latin typeface="Calibri"/>
                         </a:rPr>
-                        <a:t>0</a:t>
-                      </a:r>
-                    </a:p>
-                  </a:txBody>
-                  <a:tcPr>
-                    <a:solidFill>
-                      <a:srgbClr val="FFFFFF"/>
-                    </a:solidFill>
-                  </a:tcPr>
-                </a:tc>
-                <a:tc>
-                  <a:txBody>
-                    <a:bodyPr/>
-                    <a:lstStyle/>
-                    <a:p>
-                      <a:pPr algn="l"/>
-                      <a:r>
-                        <a:rPr sz="1000" b="0">
-                          <a:solidFill>
-                            <a:srgbClr val="1D1B43"/>
-                          </a:solidFill>
-                          <a:latin typeface="Calibri"/>
-                        </a:rPr>
-                        <a:t>- 5</a:t>
+                        <a:t>-</a:t>
                       </a:r>
                     </a:p>
                   </a:txBody>
@@ -4529,7 +4530,7 @@
                           </a:solidFill>
                           <a:latin typeface="Calibri"/>
                         </a:rPr>
-                        <a:t>95.7%</a:t>
+                        <a:t>100.0%</a:t>
                       </a:r>
                     </a:p>
                   </a:txBody>
@@ -4552,7 +4553,7 @@
                           </a:solidFill>
                           <a:latin typeface="Calibri"/>
                         </a:rPr>
-                        <a:t>100.0%</a:t>
+                        <a:t>95.8%</a:t>
                       </a:r>
                     </a:p>
                   </a:txBody>
@@ -4575,7 +4576,7 @@
                           </a:solidFill>
                           <a:latin typeface="Calibri"/>
                         </a:rPr>
-                        <a:t>+ 4.3pp</a:t>
+                        <a:t>- 4.2pp</a:t>
                       </a:r>
                     </a:p>
                   </a:txBody>
@@ -4892,7 +4893,7 @@
                           </a:solidFill>
                           <a:latin typeface="Calibri"/>
                         </a:rPr>
-                        <a:t>Maio 2026</a:t>
+                        <a:t>Abril 2026</a:t>
                       </a:r>
                     </a:p>
                   </a:txBody>
@@ -4915,7 +4916,7 @@
                           </a:solidFill>
                           <a:latin typeface="Calibri"/>
                         </a:rPr>
-                        <a:t>115</a:t>
+                        <a:t>51</a:t>
                       </a:r>
                     </a:p>
                   </a:txBody>
@@ -4938,7 +4939,7 @@
                           </a:solidFill>
                           <a:latin typeface="Calibri"/>
                         </a:rPr>
-                        <a:t>110</a:t>
+                        <a:t>51</a:t>
                       </a:r>
                     </a:p>
                   </a:txBody>
@@ -4961,7 +4962,7 @@
                           </a:solidFill>
                           <a:latin typeface="Calibri"/>
                         </a:rPr>
-                        <a:t>5</a:t>
+                        <a:t>0</a:t>
                       </a:r>
                     </a:p>
                   </a:txBody>
@@ -4984,7 +4985,7 @@
                           </a:solidFill>
                           <a:latin typeface="Calibri"/>
                         </a:rPr>
-                        <a:t>95.7%</a:t>
+                        <a:t>100.0%</a:t>
                       </a:r>
                     </a:p>
                   </a:txBody>
@@ -5009,7 +5010,7 @@
                           </a:solidFill>
                           <a:latin typeface="Calibri"/>
                         </a:rPr>
-                        <a:t>Abril 2026</a:t>
+                        <a:t>Maio 2026</a:t>
                       </a:r>
                     </a:p>
                   </a:txBody>
@@ -5032,7 +5033,7 @@
                           </a:solidFill>
                           <a:latin typeface="Calibri"/>
                         </a:rPr>
-                        <a:t>51</a:t>
+                        <a:t>119</a:t>
                       </a:r>
                     </a:p>
                   </a:txBody>
@@ -5055,7 +5056,7 @@
                           </a:solidFill>
                           <a:latin typeface="Calibri"/>
                         </a:rPr>
-                        <a:t>51</a:t>
+                        <a:t>114</a:t>
                       </a:r>
                     </a:p>
                   </a:txBody>
@@ -5078,7 +5079,7 @@
                           </a:solidFill>
                           <a:latin typeface="Calibri"/>
                         </a:rPr>
-                        <a:t>0</a:t>
+                        <a:t>5</a:t>
                       </a:r>
                     </a:p>
                   </a:txBody>
@@ -5101,7 +5102,7 @@
                           </a:solidFill>
                           <a:latin typeface="Calibri"/>
                         </a:rPr>
-                        <a:t>100.0%</a:t>
+                        <a:t>95.8%</a:t>
                       </a:r>
                     </a:p>
                   </a:txBody>
@@ -5189,7 +5190,7 @@
                 </a:solidFill>
                 <a:latin typeface="Calibri"/>
               </a:rPr>
-              <a:t>PERFORMANCE: 100.0% - EXCELENTE</a:t>
+              <a:t>PERFORMANCE: 95.8% - REGULAR</a:t>
             </a:r>
           </a:p>
         </p:txBody>
@@ -5253,7 +5254,7 @@
         <p:spPr>
           <a:xfrm>
             <a:off x="749808" y="502920"/>
-            <a:ext cx="9144000" cy="914400"/>
+            <a:ext cx="10058400" cy="914400"/>
           </a:xfrm>
           <a:prstGeom prst="rect">
             <a:avLst/>
@@ -5268,13 +5269,13 @@
           <a:p>
             <a:pPr algn="l"/>
             <a:r>
-              <a:rPr sz="4000" b="1">
+              <a:rPr sz="3200" b="1">
                 <a:solidFill>
                   <a:srgbClr val="F97316"/>
                 </a:solidFill>
                 <a:latin typeface="Calibri"/>
               </a:rPr>
-              <a:t>PERFORMANCE POR UF</a:t>
+              <a:t>OCORRENCIAS FORA DO PRAZO (5)</a:t>
             </a:r>
           </a:p>
         </p:txBody>
@@ -5287,7 +5288,7 @@
         </p:nvSpPr>
         <p:spPr>
           <a:xfrm>
-            <a:off x="749808" y="1719072"/>
+            <a:off x="749808" y="1600200"/>
             <a:ext cx="10424160" cy="36576"/>
           </a:xfrm>
           <a:prstGeom prst="rect">
@@ -5331,8 +5332,8 @@
           <p:nvPr/>
         </p:nvGraphicFramePr>
         <p:xfrm>
-          <a:off x="731520" y="1920240"/>
-          <a:ext cx="10698480" cy="3200400"/>
+          <a:off x="457200" y="1828800"/>
+          <a:ext cx="11429999" cy="2304288"/>
         </p:xfrm>
         <a:graphic>
           <a:graphicData uri="http://schemas.openxmlformats.org/drawingml/2006/table">
@@ -5341,14 +5342,13 @@
                 <a:tableStyleId>{5C22544A-7EE6-4342-B048-85BDC9FD1C3A}</a:tableStyleId>
               </a:tblPr>
               <a:tblGrid>
-                <a:gridCol w="1097280"/>
-                <a:gridCol w="1645920"/>
-                <a:gridCol w="1645920"/>
-                <a:gridCol w="1645920"/>
+                <a:gridCol w="1280160"/>
+                <a:gridCol w="3749039"/>
+                <a:gridCol w="2103120"/>
                 <a:gridCol w="1554480"/>
-                <a:gridCol w="3108960"/>
+                <a:gridCol w="2743200"/>
               </a:tblGrid>
-              <a:tr h="457200">
+              <a:tr h="384048">
                 <a:tc>
                   <a:txBody>
                     <a:bodyPr/>
@@ -5362,7 +5362,7 @@
                           </a:solidFill>
                           <a:latin typeface="Calibri"/>
                         </a:rPr>
-                        <a:t>UF</a:t>
+                        <a:t>MD</a:t>
                       </a:r>
                     </a:p>
                   </a:txBody>
@@ -5385,7 +5385,7 @@
                           </a:solidFill>
                           <a:latin typeface="Calibri"/>
                         </a:rPr>
-                        <a:t>TOTAL</a:t>
+                        <a:t>DESTINATARIO</a:t>
                       </a:r>
                     </a:p>
                   </a:txBody>
@@ -5408,7 +5408,7 @@
                           </a:solidFill>
                           <a:latin typeface="Calibri"/>
                         </a:rPr>
-                        <a:t>NO PRAZO</a:t>
+                        <a:t>CIDADE/UF</a:t>
                       </a:r>
                     </a:p>
                   </a:txBody>
@@ -5431,7 +5431,7 @@
                           </a:solidFill>
                           <a:latin typeface="Calibri"/>
                         </a:rPr>
-                        <a:t>FORA</a:t>
+                        <a:t>PREV. ENTREGA</a:t>
                       </a:r>
                     </a:p>
                   </a:txBody>
@@ -5454,7 +5454,7 @@
                           </a:solidFill>
                           <a:latin typeface="Calibri"/>
                         </a:rPr>
-                        <a:t>TAXA</a:t>
+                        <a:t>STATUS</a:t>
                       </a:r>
                     </a:p>
                   </a:txBody>
@@ -5464,45 +5464,22 @@
                     </a:solidFill>
                   </a:tcPr>
                 </a:tc>
-                <a:tc>
-                  <a:txBody>
-                    <a:bodyPr/>
-                    <a:lstStyle/>
-                    <a:p>
-                      <a:pPr algn="ctr"/>
-                      <a:r>
-                        <a:rPr sz="1100" b="1">
-                          <a:solidFill>
-                            <a:srgbClr val="FFFFFF"/>
-                          </a:solidFill>
-                          <a:latin typeface="Calibri"/>
-                        </a:rPr>
-                        <a:t>STATUS</a:t>
-                      </a:r>
-                    </a:p>
-                  </a:txBody>
-                  <a:tcPr>
-                    <a:solidFill>
-                      <a:srgbClr val="1D1B43"/>
-                    </a:solidFill>
-                  </a:tcPr>
-                </a:tc>
               </a:tr>
-              <a:tr h="457200">
-                <a:tc>
-                  <a:txBody>
-                    <a:bodyPr/>
-                    <a:lstStyle/>
-                    <a:p>
-                      <a:pPr algn="l"/>
-                      <a:r>
-                        <a:rPr sz="1000" b="0">
-                          <a:solidFill>
-                            <a:srgbClr val="1D1B43"/>
-                          </a:solidFill>
-                          <a:latin typeface="Calibri"/>
-                        </a:rPr>
-                        <a:t>MG</a:t>
+              <a:tr h="384048">
+                <a:tc>
+                  <a:txBody>
+                    <a:bodyPr/>
+                    <a:lstStyle/>
+                    <a:p>
+                      <a:pPr algn="l"/>
+                      <a:r>
+                        <a:rPr sz="1000" b="0">
+                          <a:solidFill>
+                            <a:srgbClr val="1D1B43"/>
+                          </a:solidFill>
+                          <a:latin typeface="Calibri"/>
+                        </a:rPr>
+                        <a:t>282649</a:t>
                       </a:r>
                     </a:p>
                   </a:txBody>
@@ -5525,7 +5502,7 @@
                           </a:solidFill>
                           <a:latin typeface="Calibri"/>
                         </a:rPr>
-                        <a:t>16</a:t>
+                        <a:t>ABECOM ROLAMENTOS E - SAO PAULO / SP</a:t>
                       </a:r>
                     </a:p>
                   </a:txBody>
@@ -5548,7 +5525,7 @@
                           </a:solidFill>
                           <a:latin typeface="Calibri"/>
                         </a:rPr>
-                        <a:t>16</a:t>
+                        <a:t>SAO PAULO/SP</a:t>
                       </a:r>
                     </a:p>
                   </a:txBody>
@@ -5571,7 +5548,7 @@
                           </a:solidFill>
                           <a:latin typeface="Calibri"/>
                         </a:rPr>
-                        <a:t>0</a:t>
+                        <a:t>13/05/2026</a:t>
                       </a:r>
                     </a:p>
                   </a:txBody>
@@ -5594,7 +5571,7 @@
                           </a:solidFill>
                           <a:latin typeface="Calibri"/>
                         </a:rPr>
-                        <a:t>100.0%</a:t>
+                        <a:t>ENTREGUE FORA DO PRAZO</a:t>
                       </a:r>
                     </a:p>
                   </a:txBody>
@@ -5604,20 +5581,139 @@
                     </a:solidFill>
                   </a:tcPr>
                 </a:tc>
-                <a:tc>
-                  <a:txBody>
-                    <a:bodyPr/>
-                    <a:lstStyle/>
-                    <a:p>
-                      <a:pPr algn="l"/>
-                      <a:r>
-                        <a:rPr sz="1000" b="0">
-                          <a:solidFill>
-                            <a:srgbClr val="1D1B43"/>
-                          </a:solidFill>
-                          <a:latin typeface="Calibri"/>
-                        </a:rPr>
-                        <a:t>Excelente</a:t>
+              </a:tr>
+              <a:tr h="384048">
+                <a:tc>
+                  <a:txBody>
+                    <a:bodyPr/>
+                    <a:lstStyle/>
+                    <a:p>
+                      <a:pPr algn="l"/>
+                      <a:r>
+                        <a:rPr sz="1000" b="0">
+                          <a:solidFill>
+                            <a:srgbClr val="1D1B43"/>
+                          </a:solidFill>
+                          <a:latin typeface="Calibri"/>
+                        </a:rPr>
+                        <a:t>282680</a:t>
+                      </a:r>
+                    </a:p>
+                  </a:txBody>
+                  <a:tcPr>
+                    <a:solidFill>
+                      <a:srgbClr val="F2F2F2"/>
+                    </a:solidFill>
+                  </a:tcPr>
+                </a:tc>
+                <a:tc>
+                  <a:txBody>
+                    <a:bodyPr/>
+                    <a:lstStyle/>
+                    <a:p>
+                      <a:pPr algn="l"/>
+                      <a:r>
+                        <a:rPr sz="1000" b="0">
+                          <a:solidFill>
+                            <a:srgbClr val="1D1B43"/>
+                          </a:solidFill>
+                          <a:latin typeface="Calibri"/>
+                        </a:rPr>
+                        <a:t>IRSA ROLAMENTOS S/A - SANTO ANDRE / SP</a:t>
+                      </a:r>
+                    </a:p>
+                  </a:txBody>
+                  <a:tcPr>
+                    <a:solidFill>
+                      <a:srgbClr val="F2F2F2"/>
+                    </a:solidFill>
+                  </a:tcPr>
+                </a:tc>
+                <a:tc>
+                  <a:txBody>
+                    <a:bodyPr/>
+                    <a:lstStyle/>
+                    <a:p>
+                      <a:pPr algn="l"/>
+                      <a:r>
+                        <a:rPr sz="1000" b="0">
+                          <a:solidFill>
+                            <a:srgbClr val="1D1B43"/>
+                          </a:solidFill>
+                          <a:latin typeface="Calibri"/>
+                        </a:rPr>
+                        <a:t>SANTO ANDRE/SP</a:t>
+                      </a:r>
+                    </a:p>
+                  </a:txBody>
+                  <a:tcPr>
+                    <a:solidFill>
+                      <a:srgbClr val="F2F2F2"/>
+                    </a:solidFill>
+                  </a:tcPr>
+                </a:tc>
+                <a:tc>
+                  <a:txBody>
+                    <a:bodyPr/>
+                    <a:lstStyle/>
+                    <a:p>
+                      <a:pPr algn="l"/>
+                      <a:r>
+                        <a:rPr sz="1000" b="0">
+                          <a:solidFill>
+                            <a:srgbClr val="1D1B43"/>
+                          </a:solidFill>
+                          <a:latin typeface="Calibri"/>
+                        </a:rPr>
+                        <a:t>13/05/2026</a:t>
+                      </a:r>
+                    </a:p>
+                  </a:txBody>
+                  <a:tcPr>
+                    <a:solidFill>
+                      <a:srgbClr val="F2F2F2"/>
+                    </a:solidFill>
+                  </a:tcPr>
+                </a:tc>
+                <a:tc>
+                  <a:txBody>
+                    <a:bodyPr/>
+                    <a:lstStyle/>
+                    <a:p>
+                      <a:pPr algn="l"/>
+                      <a:r>
+                        <a:rPr sz="1000" b="0">
+                          <a:solidFill>
+                            <a:srgbClr val="1D1B43"/>
+                          </a:solidFill>
+                          <a:latin typeface="Calibri"/>
+                        </a:rPr>
+                        <a:t>ENTREGUE FORA DO PRAZO</a:t>
+                      </a:r>
+                    </a:p>
+                  </a:txBody>
+                  <a:tcPr>
+                    <a:solidFill>
+                      <a:srgbClr val="F2F2F2"/>
+                    </a:solidFill>
+                  </a:tcPr>
+                </a:tc>
+              </a:tr>
+              <a:tr h="384048">
+                <a:tc>
+                  <a:txBody>
+                    <a:bodyPr/>
+                    <a:lstStyle/>
+                    <a:p>
+                      <a:pPr algn="l"/>
+                      <a:r>
+                        <a:rPr sz="1000" b="0">
+                          <a:solidFill>
+                            <a:srgbClr val="1D1B43"/>
+                          </a:solidFill>
+                          <a:latin typeface="Calibri"/>
+                        </a:rPr>
+                        <a:t>282683</a:t>
                       </a:r>
                     </a:p>
                   </a:txBody>
@@ -5627,22 +5723,114 @@
                     </a:solidFill>
                   </a:tcPr>
                 </a:tc>
+                <a:tc>
+                  <a:txBody>
+                    <a:bodyPr/>
+                    <a:lstStyle/>
+                    <a:p>
+                      <a:pPr algn="l"/>
+                      <a:r>
+                        <a:rPr sz="1000" b="0">
+                          <a:solidFill>
+                            <a:srgbClr val="1D1B43"/>
+                          </a:solidFill>
+                          <a:latin typeface="Calibri"/>
+                        </a:rPr>
+                        <a:t>ENCOPEL COMERCIO DE - SAO PAULO / SP</a:t>
+                      </a:r>
+                    </a:p>
+                  </a:txBody>
+                  <a:tcPr>
+                    <a:solidFill>
+                      <a:srgbClr val="FFFFFF"/>
+                    </a:solidFill>
+                  </a:tcPr>
+                </a:tc>
+                <a:tc>
+                  <a:txBody>
+                    <a:bodyPr/>
+                    <a:lstStyle/>
+                    <a:p>
+                      <a:pPr algn="l"/>
+                      <a:r>
+                        <a:rPr sz="1000" b="0">
+                          <a:solidFill>
+                            <a:srgbClr val="1D1B43"/>
+                          </a:solidFill>
+                          <a:latin typeface="Calibri"/>
+                        </a:rPr>
+                        <a:t>SAO PAULO/SP</a:t>
+                      </a:r>
+                    </a:p>
+                  </a:txBody>
+                  <a:tcPr>
+                    <a:solidFill>
+                      <a:srgbClr val="FFFFFF"/>
+                    </a:solidFill>
+                  </a:tcPr>
+                </a:tc>
+                <a:tc>
+                  <a:txBody>
+                    <a:bodyPr/>
+                    <a:lstStyle/>
+                    <a:p>
+                      <a:pPr algn="l"/>
+                      <a:r>
+                        <a:rPr sz="1000" b="0">
+                          <a:solidFill>
+                            <a:srgbClr val="1D1B43"/>
+                          </a:solidFill>
+                          <a:latin typeface="Calibri"/>
+                        </a:rPr>
+                        <a:t>13/05/2026</a:t>
+                      </a:r>
+                    </a:p>
+                  </a:txBody>
+                  <a:tcPr>
+                    <a:solidFill>
+                      <a:srgbClr val="FFFFFF"/>
+                    </a:solidFill>
+                  </a:tcPr>
+                </a:tc>
+                <a:tc>
+                  <a:txBody>
+                    <a:bodyPr/>
+                    <a:lstStyle/>
+                    <a:p>
+                      <a:pPr algn="l"/>
+                      <a:r>
+                        <a:rPr sz="1000" b="0">
+                          <a:solidFill>
+                            <a:srgbClr val="1D1B43"/>
+                          </a:solidFill>
+                          <a:latin typeface="Calibri"/>
+                        </a:rPr>
+                        <a:t>ENTREGUE FORA DO PRAZO</a:t>
+                      </a:r>
+                    </a:p>
+                  </a:txBody>
+                  <a:tcPr>
+                    <a:solidFill>
+                      <a:srgbClr val="FFFFFF"/>
+                    </a:solidFill>
+                  </a:tcPr>
+                </a:tc>
               </a:tr>
-              <a:tr h="457200">
-                <a:tc>
-                  <a:txBody>
-                    <a:bodyPr/>
-                    <a:lstStyle/>
-                    <a:p>
-                      <a:pPr algn="l"/>
-                      <a:r>
-                        <a:rPr sz="1000" b="0">
-                          <a:solidFill>
-                            <a:srgbClr val="1D1B43"/>
-                          </a:solidFill>
-                          <a:latin typeface="Calibri"/>
-                        </a:rPr>
-                        <a:t>PR</a:t>
+              <a:tr h="384048">
+                <a:tc>
+                  <a:txBody>
+                    <a:bodyPr/>
+                    <a:lstStyle/>
+                    <a:p>
+                      <a:pPr algn="l"/>
+                      <a:r>
+                        <a:rPr sz="1000" b="0">
+                          <a:solidFill>
+                            <a:srgbClr val="1D1B43"/>
+                          </a:solidFill>
+                          <a:latin typeface="Calibri"/>
+                        </a:rPr>
+                        <a:t>282987</a:t>
                       </a:r>
                     </a:p>
                   </a:txBody>
@@ -5665,7 +5853,7 @@
                           </a:solidFill>
                           <a:latin typeface="Calibri"/>
                         </a:rPr>
-                        <a:t>13</a:t>
+                        <a:t>ENCOPEL COMERCIO DE - SAO PAULO / SP</a:t>
                       </a:r>
                     </a:p>
                   </a:txBody>
@@ -5688,7 +5876,7 @@
                           </a:solidFill>
                           <a:latin typeface="Calibri"/>
                         </a:rPr>
-                        <a:t>13</a:t>
+                        <a:t>SAO PAULO/SP</a:t>
                       </a:r>
                     </a:p>
                   </a:txBody>
@@ -5711,7 +5899,7 @@
                           </a:solidFill>
                           <a:latin typeface="Calibri"/>
                         </a:rPr>
-                        <a:t>0</a:t>
+                        <a:t>15/05/2026</a:t>
                       </a:r>
                     </a:p>
                   </a:txBody>
@@ -5734,7 +5922,7 @@
                           </a:solidFill>
                           <a:latin typeface="Calibri"/>
                         </a:rPr>
-                        <a:t>100.0%</a:t>
+                        <a:t>ENTREGUE FORA DO PRAZO</a:t>
                       </a:r>
                     </a:p>
                   </a:txBody>
@@ -5744,45 +5932,22 @@
                     </a:solidFill>
                   </a:tcPr>
                 </a:tc>
-                <a:tc>
-                  <a:txBody>
-                    <a:bodyPr/>
-                    <a:lstStyle/>
-                    <a:p>
-                      <a:pPr algn="l"/>
-                      <a:r>
-                        <a:rPr sz="1000" b="0">
-                          <a:solidFill>
-                            <a:srgbClr val="1D1B43"/>
-                          </a:solidFill>
-                          <a:latin typeface="Calibri"/>
-                        </a:rPr>
-                        <a:t>Excelente</a:t>
-                      </a:r>
-                    </a:p>
-                  </a:txBody>
-                  <a:tcPr>
-                    <a:solidFill>
-                      <a:srgbClr val="F2F2F2"/>
-                    </a:solidFill>
-                  </a:tcPr>
-                </a:tc>
               </a:tr>
-              <a:tr h="457200">
-                <a:tc>
-                  <a:txBody>
-                    <a:bodyPr/>
-                    <a:lstStyle/>
-                    <a:p>
-                      <a:pPr algn="l"/>
-                      <a:r>
-                        <a:rPr sz="1000" b="0">
-                          <a:solidFill>
-                            <a:srgbClr val="1D1B43"/>
-                          </a:solidFill>
-                          <a:latin typeface="Calibri"/>
-                        </a:rPr>
-                        <a:t>RJ</a:t>
+              <a:tr h="384048">
+                <a:tc>
+                  <a:txBody>
+                    <a:bodyPr/>
+                    <a:lstStyle/>
+                    <a:p>
+                      <a:pPr algn="l"/>
+                      <a:r>
+                        <a:rPr sz="1000" b="0">
+                          <a:solidFill>
+                            <a:srgbClr val="1D1B43"/>
+                          </a:solidFill>
+                          <a:latin typeface="Calibri"/>
+                        </a:rPr>
+                        <a:t>284275</a:t>
                       </a:r>
                     </a:p>
                   </a:txBody>
@@ -5805,7 +5970,7 @@
                           </a:solidFill>
                           <a:latin typeface="Calibri"/>
                         </a:rPr>
-                        <a:t>8</a:t>
+                        <a:t>RAFAELA PARISI KNOLL - JOINVILLE / SC</a:t>
                       </a:r>
                     </a:p>
                   </a:txBody>
@@ -5828,7 +5993,7 @@
                           </a:solidFill>
                           <a:latin typeface="Calibri"/>
                         </a:rPr>
-                        <a:t>8</a:t>
+                        <a:t>JOINVILLE/SC</a:t>
                       </a:r>
                     </a:p>
                   </a:txBody>
@@ -5851,7 +6016,7 @@
                           </a:solidFill>
                           <a:latin typeface="Calibri"/>
                         </a:rPr>
-                        <a:t>0</a:t>
+                        <a:t>26/05/2026</a:t>
                       </a:r>
                     </a:p>
                   </a:txBody>
@@ -5874,456 +6039,13 @@
                           </a:solidFill>
                           <a:latin typeface="Calibri"/>
                         </a:rPr>
-                        <a:t>100.0%</a:t>
+                        <a:t>ENTREGUE FORA DO PRAZO</a:t>
                       </a:r>
                     </a:p>
                   </a:txBody>
                   <a:tcPr>
                     <a:solidFill>
                       <a:srgbClr val="FFFFFF"/>
-                    </a:solidFill>
-                  </a:tcPr>
-                </a:tc>
-                <a:tc>
-                  <a:txBody>
-                    <a:bodyPr/>
-                    <a:lstStyle/>
-                    <a:p>
-                      <a:pPr algn="l"/>
-                      <a:r>
-                        <a:rPr sz="1000" b="0">
-                          <a:solidFill>
-                            <a:srgbClr val="1D1B43"/>
-                          </a:solidFill>
-                          <a:latin typeface="Calibri"/>
-                        </a:rPr>
-                        <a:t>Excelente</a:t>
-                      </a:r>
-                    </a:p>
-                  </a:txBody>
-                  <a:tcPr>
-                    <a:solidFill>
-                      <a:srgbClr val="FFFFFF"/>
-                    </a:solidFill>
-                  </a:tcPr>
-                </a:tc>
-              </a:tr>
-              <a:tr h="457200">
-                <a:tc>
-                  <a:txBody>
-                    <a:bodyPr/>
-                    <a:lstStyle/>
-                    <a:p>
-                      <a:pPr algn="l"/>
-                      <a:r>
-                        <a:rPr sz="1000" b="0">
-                          <a:solidFill>
-                            <a:srgbClr val="1D1B43"/>
-                          </a:solidFill>
-                          <a:latin typeface="Calibri"/>
-                        </a:rPr>
-                        <a:t>RS</a:t>
-                      </a:r>
-                    </a:p>
-                  </a:txBody>
-                  <a:tcPr>
-                    <a:solidFill>
-                      <a:srgbClr val="F2F2F2"/>
-                    </a:solidFill>
-                  </a:tcPr>
-                </a:tc>
-                <a:tc>
-                  <a:txBody>
-                    <a:bodyPr/>
-                    <a:lstStyle/>
-                    <a:p>
-                      <a:pPr algn="l"/>
-                      <a:r>
-                        <a:rPr sz="1000" b="0">
-                          <a:solidFill>
-                            <a:srgbClr val="1D1B43"/>
-                          </a:solidFill>
-                          <a:latin typeface="Calibri"/>
-                        </a:rPr>
-                        <a:t>6</a:t>
-                      </a:r>
-                    </a:p>
-                  </a:txBody>
-                  <a:tcPr>
-                    <a:solidFill>
-                      <a:srgbClr val="F2F2F2"/>
-                    </a:solidFill>
-                  </a:tcPr>
-                </a:tc>
-                <a:tc>
-                  <a:txBody>
-                    <a:bodyPr/>
-                    <a:lstStyle/>
-                    <a:p>
-                      <a:pPr algn="l"/>
-                      <a:r>
-                        <a:rPr sz="1000" b="0">
-                          <a:solidFill>
-                            <a:srgbClr val="1D1B43"/>
-                          </a:solidFill>
-                          <a:latin typeface="Calibri"/>
-                        </a:rPr>
-                        <a:t>6</a:t>
-                      </a:r>
-                    </a:p>
-                  </a:txBody>
-                  <a:tcPr>
-                    <a:solidFill>
-                      <a:srgbClr val="F2F2F2"/>
-                    </a:solidFill>
-                  </a:tcPr>
-                </a:tc>
-                <a:tc>
-                  <a:txBody>
-                    <a:bodyPr/>
-                    <a:lstStyle/>
-                    <a:p>
-                      <a:pPr algn="l"/>
-                      <a:r>
-                        <a:rPr sz="1000" b="0">
-                          <a:solidFill>
-                            <a:srgbClr val="1D1B43"/>
-                          </a:solidFill>
-                          <a:latin typeface="Calibri"/>
-                        </a:rPr>
-                        <a:t>0</a:t>
-                      </a:r>
-                    </a:p>
-                  </a:txBody>
-                  <a:tcPr>
-                    <a:solidFill>
-                      <a:srgbClr val="F2F2F2"/>
-                    </a:solidFill>
-                  </a:tcPr>
-                </a:tc>
-                <a:tc>
-                  <a:txBody>
-                    <a:bodyPr/>
-                    <a:lstStyle/>
-                    <a:p>
-                      <a:pPr algn="l"/>
-                      <a:r>
-                        <a:rPr sz="1000" b="0">
-                          <a:solidFill>
-                            <a:srgbClr val="1D1B43"/>
-                          </a:solidFill>
-                          <a:latin typeface="Calibri"/>
-                        </a:rPr>
-                        <a:t>100.0%</a:t>
-                      </a:r>
-                    </a:p>
-                  </a:txBody>
-                  <a:tcPr>
-                    <a:solidFill>
-                      <a:srgbClr val="F2F2F2"/>
-                    </a:solidFill>
-                  </a:tcPr>
-                </a:tc>
-                <a:tc>
-                  <a:txBody>
-                    <a:bodyPr/>
-                    <a:lstStyle/>
-                    <a:p>
-                      <a:pPr algn="l"/>
-                      <a:r>
-                        <a:rPr sz="1000" b="0">
-                          <a:solidFill>
-                            <a:srgbClr val="1D1B43"/>
-                          </a:solidFill>
-                          <a:latin typeface="Calibri"/>
-                        </a:rPr>
-                        <a:t>Excelente</a:t>
-                      </a:r>
-                    </a:p>
-                  </a:txBody>
-                  <a:tcPr>
-                    <a:solidFill>
-                      <a:srgbClr val="F2F2F2"/>
-                    </a:solidFill>
-                  </a:tcPr>
-                </a:tc>
-              </a:tr>
-              <a:tr h="457200">
-                <a:tc>
-                  <a:txBody>
-                    <a:bodyPr/>
-                    <a:lstStyle/>
-                    <a:p>
-                      <a:pPr algn="l"/>
-                      <a:r>
-                        <a:rPr sz="1000" b="0">
-                          <a:solidFill>
-                            <a:srgbClr val="1D1B43"/>
-                          </a:solidFill>
-                          <a:latin typeface="Calibri"/>
-                        </a:rPr>
-                        <a:t>SC</a:t>
-                      </a:r>
-                    </a:p>
-                  </a:txBody>
-                  <a:tcPr>
-                    <a:solidFill>
-                      <a:srgbClr val="FFFFFF"/>
-                    </a:solidFill>
-                  </a:tcPr>
-                </a:tc>
-                <a:tc>
-                  <a:txBody>
-                    <a:bodyPr/>
-                    <a:lstStyle/>
-                    <a:p>
-                      <a:pPr algn="l"/>
-                      <a:r>
-                        <a:rPr sz="1000" b="0">
-                          <a:solidFill>
-                            <a:srgbClr val="1D1B43"/>
-                          </a:solidFill>
-                          <a:latin typeface="Calibri"/>
-                        </a:rPr>
-                        <a:t>6</a:t>
-                      </a:r>
-                    </a:p>
-                  </a:txBody>
-                  <a:tcPr>
-                    <a:solidFill>
-                      <a:srgbClr val="FFFFFF"/>
-                    </a:solidFill>
-                  </a:tcPr>
-                </a:tc>
-                <a:tc>
-                  <a:txBody>
-                    <a:bodyPr/>
-                    <a:lstStyle/>
-                    <a:p>
-                      <a:pPr algn="l"/>
-                      <a:r>
-                        <a:rPr sz="1000" b="0">
-                          <a:solidFill>
-                            <a:srgbClr val="1D1B43"/>
-                          </a:solidFill>
-                          <a:latin typeface="Calibri"/>
-                        </a:rPr>
-                        <a:t>6</a:t>
-                      </a:r>
-                    </a:p>
-                  </a:txBody>
-                  <a:tcPr>
-                    <a:solidFill>
-                      <a:srgbClr val="FFFFFF"/>
-                    </a:solidFill>
-                  </a:tcPr>
-                </a:tc>
-                <a:tc>
-                  <a:txBody>
-                    <a:bodyPr/>
-                    <a:lstStyle/>
-                    <a:p>
-                      <a:pPr algn="l"/>
-                      <a:r>
-                        <a:rPr sz="1000" b="0">
-                          <a:solidFill>
-                            <a:srgbClr val="1D1B43"/>
-                          </a:solidFill>
-                          <a:latin typeface="Calibri"/>
-                        </a:rPr>
-                        <a:t>0</a:t>
-                      </a:r>
-                    </a:p>
-                  </a:txBody>
-                  <a:tcPr>
-                    <a:solidFill>
-                      <a:srgbClr val="FFFFFF"/>
-                    </a:solidFill>
-                  </a:tcPr>
-                </a:tc>
-                <a:tc>
-                  <a:txBody>
-                    <a:bodyPr/>
-                    <a:lstStyle/>
-                    <a:p>
-                      <a:pPr algn="l"/>
-                      <a:r>
-                        <a:rPr sz="1000" b="0">
-                          <a:solidFill>
-                            <a:srgbClr val="1D1B43"/>
-                          </a:solidFill>
-                          <a:latin typeface="Calibri"/>
-                        </a:rPr>
-                        <a:t>100.0%</a:t>
-                      </a:r>
-                    </a:p>
-                  </a:txBody>
-                  <a:tcPr>
-                    <a:solidFill>
-                      <a:srgbClr val="FFFFFF"/>
-                    </a:solidFill>
-                  </a:tcPr>
-                </a:tc>
-                <a:tc>
-                  <a:txBody>
-                    <a:bodyPr/>
-                    <a:lstStyle/>
-                    <a:p>
-                      <a:pPr algn="l"/>
-                      <a:r>
-                        <a:rPr sz="1000" b="0">
-                          <a:solidFill>
-                            <a:srgbClr val="1D1B43"/>
-                          </a:solidFill>
-                          <a:latin typeface="Calibri"/>
-                        </a:rPr>
-                        <a:t>Excelente</a:t>
-                      </a:r>
-                    </a:p>
-                  </a:txBody>
-                  <a:tcPr>
-                    <a:solidFill>
-                      <a:srgbClr val="FFFFFF"/>
-                    </a:solidFill>
-                  </a:tcPr>
-                </a:tc>
-              </a:tr>
-              <a:tr h="457200">
-                <a:tc>
-                  <a:txBody>
-                    <a:bodyPr/>
-                    <a:lstStyle/>
-                    <a:p>
-                      <a:pPr algn="l"/>
-                      <a:r>
-                        <a:rPr sz="1000" b="0">
-                          <a:solidFill>
-                            <a:srgbClr val="1D1B43"/>
-                          </a:solidFill>
-                          <a:latin typeface="Calibri"/>
-                        </a:rPr>
-                        <a:t>ES</a:t>
-                      </a:r>
-                    </a:p>
-                  </a:txBody>
-                  <a:tcPr>
-                    <a:solidFill>
-                      <a:srgbClr val="F2F2F2"/>
-                    </a:solidFill>
-                  </a:tcPr>
-                </a:tc>
-                <a:tc>
-                  <a:txBody>
-                    <a:bodyPr/>
-                    <a:lstStyle/>
-                    <a:p>
-                      <a:pPr algn="l"/>
-                      <a:r>
-                        <a:rPr sz="1000" b="0">
-                          <a:solidFill>
-                            <a:srgbClr val="1D1B43"/>
-                          </a:solidFill>
-                          <a:latin typeface="Calibri"/>
-                        </a:rPr>
-                        <a:t>2</a:t>
-                      </a:r>
-                    </a:p>
-                  </a:txBody>
-                  <a:tcPr>
-                    <a:solidFill>
-                      <a:srgbClr val="F2F2F2"/>
-                    </a:solidFill>
-                  </a:tcPr>
-                </a:tc>
-                <a:tc>
-                  <a:txBody>
-                    <a:bodyPr/>
-                    <a:lstStyle/>
-                    <a:p>
-                      <a:pPr algn="l"/>
-                      <a:r>
-                        <a:rPr sz="1000" b="0">
-                          <a:solidFill>
-                            <a:srgbClr val="1D1B43"/>
-                          </a:solidFill>
-                          <a:latin typeface="Calibri"/>
-                        </a:rPr>
-                        <a:t>2</a:t>
-                      </a:r>
-                    </a:p>
-                  </a:txBody>
-                  <a:tcPr>
-                    <a:solidFill>
-                      <a:srgbClr val="F2F2F2"/>
-                    </a:solidFill>
-                  </a:tcPr>
-                </a:tc>
-                <a:tc>
-                  <a:txBody>
-                    <a:bodyPr/>
-                    <a:lstStyle/>
-                    <a:p>
-                      <a:pPr algn="l"/>
-                      <a:r>
-                        <a:rPr sz="1000" b="0">
-                          <a:solidFill>
-                            <a:srgbClr val="1D1B43"/>
-                          </a:solidFill>
-                          <a:latin typeface="Calibri"/>
-                        </a:rPr>
-                        <a:t>0</a:t>
-                      </a:r>
-                    </a:p>
-                  </a:txBody>
-                  <a:tcPr>
-                    <a:solidFill>
-                      <a:srgbClr val="F2F2F2"/>
-                    </a:solidFill>
-                  </a:tcPr>
-                </a:tc>
-                <a:tc>
-                  <a:txBody>
-                    <a:bodyPr/>
-                    <a:lstStyle/>
-                    <a:p>
-                      <a:pPr algn="l"/>
-                      <a:r>
-                        <a:rPr sz="1000" b="0">
-                          <a:solidFill>
-                            <a:srgbClr val="1D1B43"/>
-                          </a:solidFill>
-                          <a:latin typeface="Calibri"/>
-                        </a:rPr>
-                        <a:t>100.0%</a:t>
-                      </a:r>
-                    </a:p>
-                  </a:txBody>
-                  <a:tcPr>
-                    <a:solidFill>
-                      <a:srgbClr val="F2F2F2"/>
-                    </a:solidFill>
-                  </a:tcPr>
-                </a:tc>
-                <a:tc>
-                  <a:txBody>
-                    <a:bodyPr/>
-                    <a:lstStyle/>
-                    <a:p>
-                      <a:pPr algn="l"/>
-                      <a:r>
-                        <a:rPr sz="1000" b="0">
-                          <a:solidFill>
-                            <a:srgbClr val="1D1B43"/>
-                          </a:solidFill>
-                          <a:latin typeface="Calibri"/>
-                        </a:rPr>
-                        <a:t>Excelente</a:t>
-                      </a:r>
-                    </a:p>
-                  </a:txBody>
-                  <a:tcPr>
-                    <a:solidFill>
-                      <a:srgbClr val="F2F2F2"/>
                     </a:solidFill>
                   </a:tcPr>
                 </a:tc>
@@ -6391,6 +6113,1284 @@
         <p:spPr>
           <a:xfrm>
             <a:off x="749808" y="502920"/>
+            <a:ext cx="9144000" cy="914400"/>
+          </a:xfrm>
+          <a:prstGeom prst="rect">
+            <a:avLst/>
+          </a:prstGeom>
+          <a:noFill/>
+        </p:spPr>
+        <p:txBody>
+          <a:bodyPr wrap="square">
+            <a:spAutoFit/>
+          </a:bodyPr>
+          <a:lstStyle/>
+          <a:p>
+            <a:pPr algn="l"/>
+            <a:r>
+              <a:rPr sz="4000" b="1">
+                <a:solidFill>
+                  <a:srgbClr val="F97316"/>
+                </a:solidFill>
+                <a:latin typeface="Calibri"/>
+              </a:rPr>
+              <a:t>PERFORMANCE POR UF</a:t>
+            </a:r>
+          </a:p>
+        </p:txBody>
+      </p:sp>
+      <p:sp>
+        <p:nvSpPr>
+          <p:cNvPr id="4" name="Rectangle 3"/>
+          <p:cNvSpPr/>
+          <p:nvPr/>
+        </p:nvSpPr>
+        <p:spPr>
+          <a:xfrm>
+            <a:off x="749808" y="1719072"/>
+            <a:ext cx="10424160" cy="36576"/>
+          </a:xfrm>
+          <a:prstGeom prst="rect">
+            <a:avLst/>
+          </a:prstGeom>
+          <a:solidFill>
+            <a:srgbClr val="F97316"/>
+          </a:solidFill>
+          <a:ln>
+            <a:noFill/>
+          </a:ln>
+        </p:spPr>
+        <p:style>
+          <a:lnRef idx="1">
+            <a:schemeClr val="accent1"/>
+          </a:lnRef>
+          <a:fillRef idx="3">
+            <a:schemeClr val="accent1"/>
+          </a:fillRef>
+          <a:effectRef idx="2">
+            <a:schemeClr val="accent1"/>
+          </a:effectRef>
+          <a:fontRef idx="minor">
+            <a:schemeClr val="lt1"/>
+          </a:fontRef>
+        </p:style>
+        <p:txBody>
+          <a:bodyPr rtlCol="0" anchor="ctr"/>
+          <a:lstStyle/>
+          <a:p>
+            <a:pPr algn="ctr"/>
+          </a:p>
+        </p:txBody>
+      </p:sp>
+      <p:graphicFrame>
+        <p:nvGraphicFramePr>
+          <p:cNvPr id="5" name="Table 4"/>
+          <p:cNvGraphicFramePr>
+            <a:graphicFrameLocks noGrp="1"/>
+          </p:cNvGraphicFramePr>
+          <p:nvPr/>
+        </p:nvGraphicFramePr>
+        <p:xfrm>
+          <a:off x="731520" y="1920240"/>
+          <a:ext cx="10698480" cy="3657600"/>
+        </p:xfrm>
+        <a:graphic>
+          <a:graphicData uri="http://schemas.openxmlformats.org/drawingml/2006/table">
+            <a:tbl>
+              <a:tblPr firstRow="1" bandRow="1">
+                <a:tableStyleId>{5C22544A-7EE6-4342-B048-85BDC9FD1C3A}</a:tableStyleId>
+              </a:tblPr>
+              <a:tblGrid>
+                <a:gridCol w="1097280"/>
+                <a:gridCol w="1645920"/>
+                <a:gridCol w="1645920"/>
+                <a:gridCol w="1645920"/>
+                <a:gridCol w="1554480"/>
+                <a:gridCol w="3108960"/>
+              </a:tblGrid>
+              <a:tr h="457200">
+                <a:tc>
+                  <a:txBody>
+                    <a:bodyPr/>
+                    <a:lstStyle/>
+                    <a:p>
+                      <a:pPr algn="ctr"/>
+                      <a:r>
+                        <a:rPr sz="1100" b="1">
+                          <a:solidFill>
+                            <a:srgbClr val="FFFFFF"/>
+                          </a:solidFill>
+                          <a:latin typeface="Calibri"/>
+                        </a:rPr>
+                        <a:t>UF</a:t>
+                      </a:r>
+                    </a:p>
+                  </a:txBody>
+                  <a:tcPr>
+                    <a:solidFill>
+                      <a:srgbClr val="1D1B43"/>
+                    </a:solidFill>
+                  </a:tcPr>
+                </a:tc>
+                <a:tc>
+                  <a:txBody>
+                    <a:bodyPr/>
+                    <a:lstStyle/>
+                    <a:p>
+                      <a:pPr algn="ctr"/>
+                      <a:r>
+                        <a:rPr sz="1100" b="1">
+                          <a:solidFill>
+                            <a:srgbClr val="FFFFFF"/>
+                          </a:solidFill>
+                          <a:latin typeface="Calibri"/>
+                        </a:rPr>
+                        <a:t>TOTAL</a:t>
+                      </a:r>
+                    </a:p>
+                  </a:txBody>
+                  <a:tcPr>
+                    <a:solidFill>
+                      <a:srgbClr val="1D1B43"/>
+                    </a:solidFill>
+                  </a:tcPr>
+                </a:tc>
+                <a:tc>
+                  <a:txBody>
+                    <a:bodyPr/>
+                    <a:lstStyle/>
+                    <a:p>
+                      <a:pPr algn="ctr"/>
+                      <a:r>
+                        <a:rPr sz="1100" b="1">
+                          <a:solidFill>
+                            <a:srgbClr val="FFFFFF"/>
+                          </a:solidFill>
+                          <a:latin typeface="Calibri"/>
+                        </a:rPr>
+                        <a:t>NO PRAZO</a:t>
+                      </a:r>
+                    </a:p>
+                  </a:txBody>
+                  <a:tcPr>
+                    <a:solidFill>
+                      <a:srgbClr val="1D1B43"/>
+                    </a:solidFill>
+                  </a:tcPr>
+                </a:tc>
+                <a:tc>
+                  <a:txBody>
+                    <a:bodyPr/>
+                    <a:lstStyle/>
+                    <a:p>
+                      <a:pPr algn="ctr"/>
+                      <a:r>
+                        <a:rPr sz="1100" b="1">
+                          <a:solidFill>
+                            <a:srgbClr val="FFFFFF"/>
+                          </a:solidFill>
+                          <a:latin typeface="Calibri"/>
+                        </a:rPr>
+                        <a:t>FORA</a:t>
+                      </a:r>
+                    </a:p>
+                  </a:txBody>
+                  <a:tcPr>
+                    <a:solidFill>
+                      <a:srgbClr val="1D1B43"/>
+                    </a:solidFill>
+                  </a:tcPr>
+                </a:tc>
+                <a:tc>
+                  <a:txBody>
+                    <a:bodyPr/>
+                    <a:lstStyle/>
+                    <a:p>
+                      <a:pPr algn="ctr"/>
+                      <a:r>
+                        <a:rPr sz="1100" b="1">
+                          <a:solidFill>
+                            <a:srgbClr val="FFFFFF"/>
+                          </a:solidFill>
+                          <a:latin typeface="Calibri"/>
+                        </a:rPr>
+                        <a:t>TAXA</a:t>
+                      </a:r>
+                    </a:p>
+                  </a:txBody>
+                  <a:tcPr>
+                    <a:solidFill>
+                      <a:srgbClr val="1D1B43"/>
+                    </a:solidFill>
+                  </a:tcPr>
+                </a:tc>
+                <a:tc>
+                  <a:txBody>
+                    <a:bodyPr/>
+                    <a:lstStyle/>
+                    <a:p>
+                      <a:pPr algn="ctr"/>
+                      <a:r>
+                        <a:rPr sz="1100" b="1">
+                          <a:solidFill>
+                            <a:srgbClr val="FFFFFF"/>
+                          </a:solidFill>
+                          <a:latin typeface="Calibri"/>
+                        </a:rPr>
+                        <a:t>STATUS</a:t>
+                      </a:r>
+                    </a:p>
+                  </a:txBody>
+                  <a:tcPr>
+                    <a:solidFill>
+                      <a:srgbClr val="1D1B43"/>
+                    </a:solidFill>
+                  </a:tcPr>
+                </a:tc>
+              </a:tr>
+              <a:tr h="457200">
+                <a:tc>
+                  <a:txBody>
+                    <a:bodyPr/>
+                    <a:lstStyle/>
+                    <a:p>
+                      <a:pPr algn="l"/>
+                      <a:r>
+                        <a:rPr sz="1000" b="0">
+                          <a:solidFill>
+                            <a:srgbClr val="1D1B43"/>
+                          </a:solidFill>
+                          <a:latin typeface="Calibri"/>
+                        </a:rPr>
+                        <a:t>SP</a:t>
+                      </a:r>
+                    </a:p>
+                  </a:txBody>
+                  <a:tcPr>
+                    <a:solidFill>
+                      <a:srgbClr val="FFFFFF"/>
+                    </a:solidFill>
+                  </a:tcPr>
+                </a:tc>
+                <a:tc>
+                  <a:txBody>
+                    <a:bodyPr/>
+                    <a:lstStyle/>
+                    <a:p>
+                      <a:pPr algn="l"/>
+                      <a:r>
+                        <a:rPr sz="1000" b="0">
+                          <a:solidFill>
+                            <a:srgbClr val="1D1B43"/>
+                          </a:solidFill>
+                          <a:latin typeface="Calibri"/>
+                        </a:rPr>
+                        <a:t>67</a:t>
+                      </a:r>
+                    </a:p>
+                  </a:txBody>
+                  <a:tcPr>
+                    <a:solidFill>
+                      <a:srgbClr val="FFFFFF"/>
+                    </a:solidFill>
+                  </a:tcPr>
+                </a:tc>
+                <a:tc>
+                  <a:txBody>
+                    <a:bodyPr/>
+                    <a:lstStyle/>
+                    <a:p>
+                      <a:pPr algn="l"/>
+                      <a:r>
+                        <a:rPr sz="1000" b="0">
+                          <a:solidFill>
+                            <a:srgbClr val="1D1B43"/>
+                          </a:solidFill>
+                          <a:latin typeface="Calibri"/>
+                        </a:rPr>
+                        <a:t>63</a:t>
+                      </a:r>
+                    </a:p>
+                  </a:txBody>
+                  <a:tcPr>
+                    <a:solidFill>
+                      <a:srgbClr val="FFFFFF"/>
+                    </a:solidFill>
+                  </a:tcPr>
+                </a:tc>
+                <a:tc>
+                  <a:txBody>
+                    <a:bodyPr/>
+                    <a:lstStyle/>
+                    <a:p>
+                      <a:pPr algn="l"/>
+                      <a:r>
+                        <a:rPr sz="1000" b="0">
+                          <a:solidFill>
+                            <a:srgbClr val="1D1B43"/>
+                          </a:solidFill>
+                          <a:latin typeface="Calibri"/>
+                        </a:rPr>
+                        <a:t>4</a:t>
+                      </a:r>
+                    </a:p>
+                  </a:txBody>
+                  <a:tcPr>
+                    <a:solidFill>
+                      <a:srgbClr val="FFFFFF"/>
+                    </a:solidFill>
+                  </a:tcPr>
+                </a:tc>
+                <a:tc>
+                  <a:txBody>
+                    <a:bodyPr/>
+                    <a:lstStyle/>
+                    <a:p>
+                      <a:pPr algn="l"/>
+                      <a:r>
+                        <a:rPr sz="1000" b="0">
+                          <a:solidFill>
+                            <a:srgbClr val="1D1B43"/>
+                          </a:solidFill>
+                          <a:latin typeface="Calibri"/>
+                        </a:rPr>
+                        <a:t>94.0%</a:t>
+                      </a:r>
+                    </a:p>
+                  </a:txBody>
+                  <a:tcPr>
+                    <a:solidFill>
+                      <a:srgbClr val="FFFFFF"/>
+                    </a:solidFill>
+                  </a:tcPr>
+                </a:tc>
+                <a:tc>
+                  <a:txBody>
+                    <a:bodyPr/>
+                    <a:lstStyle/>
+                    <a:p>
+                      <a:pPr algn="l"/>
+                      <a:r>
+                        <a:rPr sz="1000" b="0">
+                          <a:solidFill>
+                            <a:srgbClr val="1D1B43"/>
+                          </a:solidFill>
+                          <a:latin typeface="Calibri"/>
+                        </a:rPr>
+                        <a:t>Regular</a:t>
+                      </a:r>
+                    </a:p>
+                  </a:txBody>
+                  <a:tcPr>
+                    <a:solidFill>
+                      <a:srgbClr val="FFFFFF"/>
+                    </a:solidFill>
+                  </a:tcPr>
+                </a:tc>
+              </a:tr>
+              <a:tr h="457200">
+                <a:tc>
+                  <a:txBody>
+                    <a:bodyPr/>
+                    <a:lstStyle/>
+                    <a:p>
+                      <a:pPr algn="l"/>
+                      <a:r>
+                        <a:rPr sz="1000" b="0">
+                          <a:solidFill>
+                            <a:srgbClr val="1D1B43"/>
+                          </a:solidFill>
+                          <a:latin typeface="Calibri"/>
+                        </a:rPr>
+                        <a:t>PR</a:t>
+                      </a:r>
+                    </a:p>
+                  </a:txBody>
+                  <a:tcPr>
+                    <a:solidFill>
+                      <a:srgbClr val="F2F2F2"/>
+                    </a:solidFill>
+                  </a:tcPr>
+                </a:tc>
+                <a:tc>
+                  <a:txBody>
+                    <a:bodyPr/>
+                    <a:lstStyle/>
+                    <a:p>
+                      <a:pPr algn="l"/>
+                      <a:r>
+                        <a:rPr sz="1000" b="0">
+                          <a:solidFill>
+                            <a:srgbClr val="1D1B43"/>
+                          </a:solidFill>
+                          <a:latin typeface="Calibri"/>
+                        </a:rPr>
+                        <a:t>15</a:t>
+                      </a:r>
+                    </a:p>
+                  </a:txBody>
+                  <a:tcPr>
+                    <a:solidFill>
+                      <a:srgbClr val="F2F2F2"/>
+                    </a:solidFill>
+                  </a:tcPr>
+                </a:tc>
+                <a:tc>
+                  <a:txBody>
+                    <a:bodyPr/>
+                    <a:lstStyle/>
+                    <a:p>
+                      <a:pPr algn="l"/>
+                      <a:r>
+                        <a:rPr sz="1000" b="0">
+                          <a:solidFill>
+                            <a:srgbClr val="1D1B43"/>
+                          </a:solidFill>
+                          <a:latin typeface="Calibri"/>
+                        </a:rPr>
+                        <a:t>15</a:t>
+                      </a:r>
+                    </a:p>
+                  </a:txBody>
+                  <a:tcPr>
+                    <a:solidFill>
+                      <a:srgbClr val="F2F2F2"/>
+                    </a:solidFill>
+                  </a:tcPr>
+                </a:tc>
+                <a:tc>
+                  <a:txBody>
+                    <a:bodyPr/>
+                    <a:lstStyle/>
+                    <a:p>
+                      <a:pPr algn="l"/>
+                      <a:r>
+                        <a:rPr sz="1000" b="0">
+                          <a:solidFill>
+                            <a:srgbClr val="1D1B43"/>
+                          </a:solidFill>
+                          <a:latin typeface="Calibri"/>
+                        </a:rPr>
+                        <a:t>0</a:t>
+                      </a:r>
+                    </a:p>
+                  </a:txBody>
+                  <a:tcPr>
+                    <a:solidFill>
+                      <a:srgbClr val="F2F2F2"/>
+                    </a:solidFill>
+                  </a:tcPr>
+                </a:tc>
+                <a:tc>
+                  <a:txBody>
+                    <a:bodyPr/>
+                    <a:lstStyle/>
+                    <a:p>
+                      <a:pPr algn="l"/>
+                      <a:r>
+                        <a:rPr sz="1000" b="0">
+                          <a:solidFill>
+                            <a:srgbClr val="1D1B43"/>
+                          </a:solidFill>
+                          <a:latin typeface="Calibri"/>
+                        </a:rPr>
+                        <a:t>100.0%</a:t>
+                      </a:r>
+                    </a:p>
+                  </a:txBody>
+                  <a:tcPr>
+                    <a:solidFill>
+                      <a:srgbClr val="F2F2F2"/>
+                    </a:solidFill>
+                  </a:tcPr>
+                </a:tc>
+                <a:tc>
+                  <a:txBody>
+                    <a:bodyPr/>
+                    <a:lstStyle/>
+                    <a:p>
+                      <a:pPr algn="l"/>
+                      <a:r>
+                        <a:rPr sz="1000" b="0">
+                          <a:solidFill>
+                            <a:srgbClr val="1D1B43"/>
+                          </a:solidFill>
+                          <a:latin typeface="Calibri"/>
+                        </a:rPr>
+                        <a:t>Excelente</a:t>
+                      </a:r>
+                    </a:p>
+                  </a:txBody>
+                  <a:tcPr>
+                    <a:solidFill>
+                      <a:srgbClr val="F2F2F2"/>
+                    </a:solidFill>
+                  </a:tcPr>
+                </a:tc>
+              </a:tr>
+              <a:tr h="457200">
+                <a:tc>
+                  <a:txBody>
+                    <a:bodyPr/>
+                    <a:lstStyle/>
+                    <a:p>
+                      <a:pPr algn="l"/>
+                      <a:r>
+                        <a:rPr sz="1000" b="0">
+                          <a:solidFill>
+                            <a:srgbClr val="1D1B43"/>
+                          </a:solidFill>
+                          <a:latin typeface="Calibri"/>
+                        </a:rPr>
+                        <a:t>MG</a:t>
+                      </a:r>
+                    </a:p>
+                  </a:txBody>
+                  <a:tcPr>
+                    <a:solidFill>
+                      <a:srgbClr val="FFFFFF"/>
+                    </a:solidFill>
+                  </a:tcPr>
+                </a:tc>
+                <a:tc>
+                  <a:txBody>
+                    <a:bodyPr/>
+                    <a:lstStyle/>
+                    <a:p>
+                      <a:pPr algn="l"/>
+                      <a:r>
+                        <a:rPr sz="1000" b="0">
+                          <a:solidFill>
+                            <a:srgbClr val="1D1B43"/>
+                          </a:solidFill>
+                          <a:latin typeface="Calibri"/>
+                        </a:rPr>
+                        <a:t>15</a:t>
+                      </a:r>
+                    </a:p>
+                  </a:txBody>
+                  <a:tcPr>
+                    <a:solidFill>
+                      <a:srgbClr val="FFFFFF"/>
+                    </a:solidFill>
+                  </a:tcPr>
+                </a:tc>
+                <a:tc>
+                  <a:txBody>
+                    <a:bodyPr/>
+                    <a:lstStyle/>
+                    <a:p>
+                      <a:pPr algn="l"/>
+                      <a:r>
+                        <a:rPr sz="1000" b="0">
+                          <a:solidFill>
+                            <a:srgbClr val="1D1B43"/>
+                          </a:solidFill>
+                          <a:latin typeface="Calibri"/>
+                        </a:rPr>
+                        <a:t>15</a:t>
+                      </a:r>
+                    </a:p>
+                  </a:txBody>
+                  <a:tcPr>
+                    <a:solidFill>
+                      <a:srgbClr val="FFFFFF"/>
+                    </a:solidFill>
+                  </a:tcPr>
+                </a:tc>
+                <a:tc>
+                  <a:txBody>
+                    <a:bodyPr/>
+                    <a:lstStyle/>
+                    <a:p>
+                      <a:pPr algn="l"/>
+                      <a:r>
+                        <a:rPr sz="1000" b="0">
+                          <a:solidFill>
+                            <a:srgbClr val="1D1B43"/>
+                          </a:solidFill>
+                          <a:latin typeface="Calibri"/>
+                        </a:rPr>
+                        <a:t>0</a:t>
+                      </a:r>
+                    </a:p>
+                  </a:txBody>
+                  <a:tcPr>
+                    <a:solidFill>
+                      <a:srgbClr val="FFFFFF"/>
+                    </a:solidFill>
+                  </a:tcPr>
+                </a:tc>
+                <a:tc>
+                  <a:txBody>
+                    <a:bodyPr/>
+                    <a:lstStyle/>
+                    <a:p>
+                      <a:pPr algn="l"/>
+                      <a:r>
+                        <a:rPr sz="1000" b="0">
+                          <a:solidFill>
+                            <a:srgbClr val="1D1B43"/>
+                          </a:solidFill>
+                          <a:latin typeface="Calibri"/>
+                        </a:rPr>
+                        <a:t>100.0%</a:t>
+                      </a:r>
+                    </a:p>
+                  </a:txBody>
+                  <a:tcPr>
+                    <a:solidFill>
+                      <a:srgbClr val="FFFFFF"/>
+                    </a:solidFill>
+                  </a:tcPr>
+                </a:tc>
+                <a:tc>
+                  <a:txBody>
+                    <a:bodyPr/>
+                    <a:lstStyle/>
+                    <a:p>
+                      <a:pPr algn="l"/>
+                      <a:r>
+                        <a:rPr sz="1000" b="0">
+                          <a:solidFill>
+                            <a:srgbClr val="1D1B43"/>
+                          </a:solidFill>
+                          <a:latin typeface="Calibri"/>
+                        </a:rPr>
+                        <a:t>Excelente</a:t>
+                      </a:r>
+                    </a:p>
+                  </a:txBody>
+                  <a:tcPr>
+                    <a:solidFill>
+                      <a:srgbClr val="FFFFFF"/>
+                    </a:solidFill>
+                  </a:tcPr>
+                </a:tc>
+              </a:tr>
+              <a:tr h="457200">
+                <a:tc>
+                  <a:txBody>
+                    <a:bodyPr/>
+                    <a:lstStyle/>
+                    <a:p>
+                      <a:pPr algn="l"/>
+                      <a:r>
+                        <a:rPr sz="1000" b="0">
+                          <a:solidFill>
+                            <a:srgbClr val="1D1B43"/>
+                          </a:solidFill>
+                          <a:latin typeface="Calibri"/>
+                        </a:rPr>
+                        <a:t>RJ</a:t>
+                      </a:r>
+                    </a:p>
+                  </a:txBody>
+                  <a:tcPr>
+                    <a:solidFill>
+                      <a:srgbClr val="F2F2F2"/>
+                    </a:solidFill>
+                  </a:tcPr>
+                </a:tc>
+                <a:tc>
+                  <a:txBody>
+                    <a:bodyPr/>
+                    <a:lstStyle/>
+                    <a:p>
+                      <a:pPr algn="l"/>
+                      <a:r>
+                        <a:rPr sz="1000" b="0">
+                          <a:solidFill>
+                            <a:srgbClr val="1D1B43"/>
+                          </a:solidFill>
+                          <a:latin typeface="Calibri"/>
+                        </a:rPr>
+                        <a:t>9</a:t>
+                      </a:r>
+                    </a:p>
+                  </a:txBody>
+                  <a:tcPr>
+                    <a:solidFill>
+                      <a:srgbClr val="F2F2F2"/>
+                    </a:solidFill>
+                  </a:tcPr>
+                </a:tc>
+                <a:tc>
+                  <a:txBody>
+                    <a:bodyPr/>
+                    <a:lstStyle/>
+                    <a:p>
+                      <a:pPr algn="l"/>
+                      <a:r>
+                        <a:rPr sz="1000" b="0">
+                          <a:solidFill>
+                            <a:srgbClr val="1D1B43"/>
+                          </a:solidFill>
+                          <a:latin typeface="Calibri"/>
+                        </a:rPr>
+                        <a:t>9</a:t>
+                      </a:r>
+                    </a:p>
+                  </a:txBody>
+                  <a:tcPr>
+                    <a:solidFill>
+                      <a:srgbClr val="F2F2F2"/>
+                    </a:solidFill>
+                  </a:tcPr>
+                </a:tc>
+                <a:tc>
+                  <a:txBody>
+                    <a:bodyPr/>
+                    <a:lstStyle/>
+                    <a:p>
+                      <a:pPr algn="l"/>
+                      <a:r>
+                        <a:rPr sz="1000" b="0">
+                          <a:solidFill>
+                            <a:srgbClr val="1D1B43"/>
+                          </a:solidFill>
+                          <a:latin typeface="Calibri"/>
+                        </a:rPr>
+                        <a:t>0</a:t>
+                      </a:r>
+                    </a:p>
+                  </a:txBody>
+                  <a:tcPr>
+                    <a:solidFill>
+                      <a:srgbClr val="F2F2F2"/>
+                    </a:solidFill>
+                  </a:tcPr>
+                </a:tc>
+                <a:tc>
+                  <a:txBody>
+                    <a:bodyPr/>
+                    <a:lstStyle/>
+                    <a:p>
+                      <a:pPr algn="l"/>
+                      <a:r>
+                        <a:rPr sz="1000" b="0">
+                          <a:solidFill>
+                            <a:srgbClr val="1D1B43"/>
+                          </a:solidFill>
+                          <a:latin typeface="Calibri"/>
+                        </a:rPr>
+                        <a:t>100.0%</a:t>
+                      </a:r>
+                    </a:p>
+                  </a:txBody>
+                  <a:tcPr>
+                    <a:solidFill>
+                      <a:srgbClr val="F2F2F2"/>
+                    </a:solidFill>
+                  </a:tcPr>
+                </a:tc>
+                <a:tc>
+                  <a:txBody>
+                    <a:bodyPr/>
+                    <a:lstStyle/>
+                    <a:p>
+                      <a:pPr algn="l"/>
+                      <a:r>
+                        <a:rPr sz="1000" b="0">
+                          <a:solidFill>
+                            <a:srgbClr val="1D1B43"/>
+                          </a:solidFill>
+                          <a:latin typeface="Calibri"/>
+                        </a:rPr>
+                        <a:t>Excelente</a:t>
+                      </a:r>
+                    </a:p>
+                  </a:txBody>
+                  <a:tcPr>
+                    <a:solidFill>
+                      <a:srgbClr val="F2F2F2"/>
+                    </a:solidFill>
+                  </a:tcPr>
+                </a:tc>
+              </a:tr>
+              <a:tr h="457200">
+                <a:tc>
+                  <a:txBody>
+                    <a:bodyPr/>
+                    <a:lstStyle/>
+                    <a:p>
+                      <a:pPr algn="l"/>
+                      <a:r>
+                        <a:rPr sz="1000" b="0">
+                          <a:solidFill>
+                            <a:srgbClr val="1D1B43"/>
+                          </a:solidFill>
+                          <a:latin typeface="Calibri"/>
+                        </a:rPr>
+                        <a:t>RS</a:t>
+                      </a:r>
+                    </a:p>
+                  </a:txBody>
+                  <a:tcPr>
+                    <a:solidFill>
+                      <a:srgbClr val="FFFFFF"/>
+                    </a:solidFill>
+                  </a:tcPr>
+                </a:tc>
+                <a:tc>
+                  <a:txBody>
+                    <a:bodyPr/>
+                    <a:lstStyle/>
+                    <a:p>
+                      <a:pPr algn="l"/>
+                      <a:r>
+                        <a:rPr sz="1000" b="0">
+                          <a:solidFill>
+                            <a:srgbClr val="1D1B43"/>
+                          </a:solidFill>
+                          <a:latin typeface="Calibri"/>
+                        </a:rPr>
+                        <a:t>6</a:t>
+                      </a:r>
+                    </a:p>
+                  </a:txBody>
+                  <a:tcPr>
+                    <a:solidFill>
+                      <a:srgbClr val="FFFFFF"/>
+                    </a:solidFill>
+                  </a:tcPr>
+                </a:tc>
+                <a:tc>
+                  <a:txBody>
+                    <a:bodyPr/>
+                    <a:lstStyle/>
+                    <a:p>
+                      <a:pPr algn="l"/>
+                      <a:r>
+                        <a:rPr sz="1000" b="0">
+                          <a:solidFill>
+                            <a:srgbClr val="1D1B43"/>
+                          </a:solidFill>
+                          <a:latin typeface="Calibri"/>
+                        </a:rPr>
+                        <a:t>6</a:t>
+                      </a:r>
+                    </a:p>
+                  </a:txBody>
+                  <a:tcPr>
+                    <a:solidFill>
+                      <a:srgbClr val="FFFFFF"/>
+                    </a:solidFill>
+                  </a:tcPr>
+                </a:tc>
+                <a:tc>
+                  <a:txBody>
+                    <a:bodyPr/>
+                    <a:lstStyle/>
+                    <a:p>
+                      <a:pPr algn="l"/>
+                      <a:r>
+                        <a:rPr sz="1000" b="0">
+                          <a:solidFill>
+                            <a:srgbClr val="1D1B43"/>
+                          </a:solidFill>
+                          <a:latin typeface="Calibri"/>
+                        </a:rPr>
+                        <a:t>0</a:t>
+                      </a:r>
+                    </a:p>
+                  </a:txBody>
+                  <a:tcPr>
+                    <a:solidFill>
+                      <a:srgbClr val="FFFFFF"/>
+                    </a:solidFill>
+                  </a:tcPr>
+                </a:tc>
+                <a:tc>
+                  <a:txBody>
+                    <a:bodyPr/>
+                    <a:lstStyle/>
+                    <a:p>
+                      <a:pPr algn="l"/>
+                      <a:r>
+                        <a:rPr sz="1000" b="0">
+                          <a:solidFill>
+                            <a:srgbClr val="1D1B43"/>
+                          </a:solidFill>
+                          <a:latin typeface="Calibri"/>
+                        </a:rPr>
+                        <a:t>100.0%</a:t>
+                      </a:r>
+                    </a:p>
+                  </a:txBody>
+                  <a:tcPr>
+                    <a:solidFill>
+                      <a:srgbClr val="FFFFFF"/>
+                    </a:solidFill>
+                  </a:tcPr>
+                </a:tc>
+                <a:tc>
+                  <a:txBody>
+                    <a:bodyPr/>
+                    <a:lstStyle/>
+                    <a:p>
+                      <a:pPr algn="l"/>
+                      <a:r>
+                        <a:rPr sz="1000" b="0">
+                          <a:solidFill>
+                            <a:srgbClr val="1D1B43"/>
+                          </a:solidFill>
+                          <a:latin typeface="Calibri"/>
+                        </a:rPr>
+                        <a:t>Excelente</a:t>
+                      </a:r>
+                    </a:p>
+                  </a:txBody>
+                  <a:tcPr>
+                    <a:solidFill>
+                      <a:srgbClr val="FFFFFF"/>
+                    </a:solidFill>
+                  </a:tcPr>
+                </a:tc>
+              </a:tr>
+              <a:tr h="457200">
+                <a:tc>
+                  <a:txBody>
+                    <a:bodyPr/>
+                    <a:lstStyle/>
+                    <a:p>
+                      <a:pPr algn="l"/>
+                      <a:r>
+                        <a:rPr sz="1000" b="0">
+                          <a:solidFill>
+                            <a:srgbClr val="1D1B43"/>
+                          </a:solidFill>
+                          <a:latin typeface="Calibri"/>
+                        </a:rPr>
+                        <a:t>SC</a:t>
+                      </a:r>
+                    </a:p>
+                  </a:txBody>
+                  <a:tcPr>
+                    <a:solidFill>
+                      <a:srgbClr val="F2F2F2"/>
+                    </a:solidFill>
+                  </a:tcPr>
+                </a:tc>
+                <a:tc>
+                  <a:txBody>
+                    <a:bodyPr/>
+                    <a:lstStyle/>
+                    <a:p>
+                      <a:pPr algn="l"/>
+                      <a:r>
+                        <a:rPr sz="1000" b="0">
+                          <a:solidFill>
+                            <a:srgbClr val="1D1B43"/>
+                          </a:solidFill>
+                          <a:latin typeface="Calibri"/>
+                        </a:rPr>
+                        <a:t>5</a:t>
+                      </a:r>
+                    </a:p>
+                  </a:txBody>
+                  <a:tcPr>
+                    <a:solidFill>
+                      <a:srgbClr val="F2F2F2"/>
+                    </a:solidFill>
+                  </a:tcPr>
+                </a:tc>
+                <a:tc>
+                  <a:txBody>
+                    <a:bodyPr/>
+                    <a:lstStyle/>
+                    <a:p>
+                      <a:pPr algn="l"/>
+                      <a:r>
+                        <a:rPr sz="1000" b="0">
+                          <a:solidFill>
+                            <a:srgbClr val="1D1B43"/>
+                          </a:solidFill>
+                          <a:latin typeface="Calibri"/>
+                        </a:rPr>
+                        <a:t>4</a:t>
+                      </a:r>
+                    </a:p>
+                  </a:txBody>
+                  <a:tcPr>
+                    <a:solidFill>
+                      <a:srgbClr val="F2F2F2"/>
+                    </a:solidFill>
+                  </a:tcPr>
+                </a:tc>
+                <a:tc>
+                  <a:txBody>
+                    <a:bodyPr/>
+                    <a:lstStyle/>
+                    <a:p>
+                      <a:pPr algn="l"/>
+                      <a:r>
+                        <a:rPr sz="1000" b="0">
+                          <a:solidFill>
+                            <a:srgbClr val="1D1B43"/>
+                          </a:solidFill>
+                          <a:latin typeface="Calibri"/>
+                        </a:rPr>
+                        <a:t>1</a:t>
+                      </a:r>
+                    </a:p>
+                  </a:txBody>
+                  <a:tcPr>
+                    <a:solidFill>
+                      <a:srgbClr val="F2F2F2"/>
+                    </a:solidFill>
+                  </a:tcPr>
+                </a:tc>
+                <a:tc>
+                  <a:txBody>
+                    <a:bodyPr/>
+                    <a:lstStyle/>
+                    <a:p>
+                      <a:pPr algn="l"/>
+                      <a:r>
+                        <a:rPr sz="1000" b="0">
+                          <a:solidFill>
+                            <a:srgbClr val="1D1B43"/>
+                          </a:solidFill>
+                          <a:latin typeface="Calibri"/>
+                        </a:rPr>
+                        <a:t>80.0%</a:t>
+                      </a:r>
+                    </a:p>
+                  </a:txBody>
+                  <a:tcPr>
+                    <a:solidFill>
+                      <a:srgbClr val="F2F2F2"/>
+                    </a:solidFill>
+                  </a:tcPr>
+                </a:tc>
+                <a:tc>
+                  <a:txBody>
+                    <a:bodyPr/>
+                    <a:lstStyle/>
+                    <a:p>
+                      <a:pPr algn="l"/>
+                      <a:r>
+                        <a:rPr sz="1000" b="0">
+                          <a:solidFill>
+                            <a:srgbClr val="1D1B43"/>
+                          </a:solidFill>
+                          <a:latin typeface="Calibri"/>
+                        </a:rPr>
+                        <a:t>Atencao</a:t>
+                      </a:r>
+                    </a:p>
+                  </a:txBody>
+                  <a:tcPr>
+                    <a:solidFill>
+                      <a:srgbClr val="F2F2F2"/>
+                    </a:solidFill>
+                  </a:tcPr>
+                </a:tc>
+              </a:tr>
+              <a:tr h="457200">
+                <a:tc>
+                  <a:txBody>
+                    <a:bodyPr/>
+                    <a:lstStyle/>
+                    <a:p>
+                      <a:pPr algn="l"/>
+                      <a:r>
+                        <a:rPr sz="1000" b="0">
+                          <a:solidFill>
+                            <a:srgbClr val="1D1B43"/>
+                          </a:solidFill>
+                          <a:latin typeface="Calibri"/>
+                        </a:rPr>
+                        <a:t>ES</a:t>
+                      </a:r>
+                    </a:p>
+                  </a:txBody>
+                  <a:tcPr>
+                    <a:solidFill>
+                      <a:srgbClr val="FFFFFF"/>
+                    </a:solidFill>
+                  </a:tcPr>
+                </a:tc>
+                <a:tc>
+                  <a:txBody>
+                    <a:bodyPr/>
+                    <a:lstStyle/>
+                    <a:p>
+                      <a:pPr algn="l"/>
+                      <a:r>
+                        <a:rPr sz="1000" b="0">
+                          <a:solidFill>
+                            <a:srgbClr val="1D1B43"/>
+                          </a:solidFill>
+                          <a:latin typeface="Calibri"/>
+                        </a:rPr>
+                        <a:t>2</a:t>
+                      </a:r>
+                    </a:p>
+                  </a:txBody>
+                  <a:tcPr>
+                    <a:solidFill>
+                      <a:srgbClr val="FFFFFF"/>
+                    </a:solidFill>
+                  </a:tcPr>
+                </a:tc>
+                <a:tc>
+                  <a:txBody>
+                    <a:bodyPr/>
+                    <a:lstStyle/>
+                    <a:p>
+                      <a:pPr algn="l"/>
+                      <a:r>
+                        <a:rPr sz="1000" b="0">
+                          <a:solidFill>
+                            <a:srgbClr val="1D1B43"/>
+                          </a:solidFill>
+                          <a:latin typeface="Calibri"/>
+                        </a:rPr>
+                        <a:t>2</a:t>
+                      </a:r>
+                    </a:p>
+                  </a:txBody>
+                  <a:tcPr>
+                    <a:solidFill>
+                      <a:srgbClr val="FFFFFF"/>
+                    </a:solidFill>
+                  </a:tcPr>
+                </a:tc>
+                <a:tc>
+                  <a:txBody>
+                    <a:bodyPr/>
+                    <a:lstStyle/>
+                    <a:p>
+                      <a:pPr algn="l"/>
+                      <a:r>
+                        <a:rPr sz="1000" b="0">
+                          <a:solidFill>
+                            <a:srgbClr val="1D1B43"/>
+                          </a:solidFill>
+                          <a:latin typeface="Calibri"/>
+                        </a:rPr>
+                        <a:t>0</a:t>
+                      </a:r>
+                    </a:p>
+                  </a:txBody>
+                  <a:tcPr>
+                    <a:solidFill>
+                      <a:srgbClr val="FFFFFF"/>
+                    </a:solidFill>
+                  </a:tcPr>
+                </a:tc>
+                <a:tc>
+                  <a:txBody>
+                    <a:bodyPr/>
+                    <a:lstStyle/>
+                    <a:p>
+                      <a:pPr algn="l"/>
+                      <a:r>
+                        <a:rPr sz="1000" b="0">
+                          <a:solidFill>
+                            <a:srgbClr val="1D1B43"/>
+                          </a:solidFill>
+                          <a:latin typeface="Calibri"/>
+                        </a:rPr>
+                        <a:t>100.0%</a:t>
+                      </a:r>
+                    </a:p>
+                  </a:txBody>
+                  <a:tcPr>
+                    <a:solidFill>
+                      <a:srgbClr val="FFFFFF"/>
+                    </a:solidFill>
+                  </a:tcPr>
+                </a:tc>
+                <a:tc>
+                  <a:txBody>
+                    <a:bodyPr/>
+                    <a:lstStyle/>
+                    <a:p>
+                      <a:pPr algn="l"/>
+                      <a:r>
+                        <a:rPr sz="1000" b="0">
+                          <a:solidFill>
+                            <a:srgbClr val="1D1B43"/>
+                          </a:solidFill>
+                          <a:latin typeface="Calibri"/>
+                        </a:rPr>
+                        <a:t>Excelente</a:t>
+                      </a:r>
+                    </a:p>
+                  </a:txBody>
+                  <a:tcPr>
+                    <a:solidFill>
+                      <a:srgbClr val="FFFFFF"/>
+                    </a:solidFill>
+                  </a:tcPr>
+                </a:tc>
+              </a:tr>
+            </a:tbl>
+          </a:graphicData>
+        </a:graphic>
+      </p:graphicFrame>
+    </p:spTree>
+  </p:cSld>
+  <p:clrMapOvr>
+    <a:masterClrMapping/>
+  </p:clrMapOvr>
+</p:sld>
+</file>
+
+<file path=ppt/slides/slide6.xml><?xml version="1.0" encoding="utf-8"?>
+<p:sld xmlns:a="http://schemas.openxmlformats.org/drawingml/2006/main" xmlns:p="http://schemas.openxmlformats.org/presentationml/2006/main" xmlns:r="http://schemas.openxmlformats.org/officeDocument/2006/relationships">
+  <p:cSld>
+    <p:bg>
+      <p:bgPr>
+        <a:solidFill>
+          <a:srgbClr val="FFFFFF"/>
+        </a:solidFill>
+        <a:effectLst/>
+      </p:bgPr>
+    </p:bg>
+    <p:spTree>
+      <p:nvGrpSpPr>
+        <p:cNvPr id="1" name=""/>
+        <p:cNvGrpSpPr/>
+        <p:nvPr/>
+      </p:nvGrpSpPr>
+      <p:grpSpPr/>
+      <p:pic>
+        <p:nvPicPr>
+          <p:cNvPr id="2" name="Picture 1" descr="slide2_img3.png"/>
+          <p:cNvPicPr>
+            <a:picLocks noChangeAspect="1"/>
+          </p:cNvPicPr>
+          <p:nvPr/>
+        </p:nvPicPr>
+        <p:blipFill>
+          <a:blip r:embed="rId2"/>
+          <a:stretch>
+            <a:fillRect/>
+          </a:stretch>
+        </p:blipFill>
+        <p:spPr>
+          <a:xfrm>
+            <a:off x="10661904" y="155448"/>
+            <a:ext cx="1380744" cy="667512"/>
+          </a:xfrm>
+          <a:prstGeom prst="rect">
+            <a:avLst/>
+          </a:prstGeom>
+        </p:spPr>
+      </p:pic>
+      <p:sp>
+        <p:nvSpPr>
+          <p:cNvPr id="3" name="TextBox 2"/>
+          <p:cNvSpPr txBox="1"/>
+          <p:nvPr/>
+        </p:nvSpPr>
+        <p:spPr>
+          <a:xfrm>
+            <a:off x="749808" y="502920"/>
             <a:ext cx="10058400" cy="914400"/>
           </a:xfrm>
           <a:prstGeom prst="rect">
@@ -6412,7 +7412,7 @@
                 </a:solidFill>
                 <a:latin typeface="Calibri"/>
               </a:rPr>
-              <a:t>TOP DESTINATARIOS (19 pontos)</a:t>
+              <a:t>TOP DESTINATARIOS (22 pontos)</a:t>
             </a:r>
           </a:p>
         </p:txBody>
@@ -6687,7 +7687,7 @@
                           </a:solidFill>
                           <a:latin typeface="Calibri"/>
                         </a:rPr>
-                        <a:t>MINASFAST TECNOLOGIA - CONTAGEM / MG</a:t>
+                        <a:t>ABECOM ROLAMENTOS E - SAO PAULO / SP</a:t>
                       </a:r>
                     </a:p>
                   </a:txBody>
@@ -6710,7 +7710,7 @@
                           </a:solidFill>
                           <a:latin typeface="Calibri"/>
                         </a:rPr>
-                        <a:t>6</a:t>
+                        <a:t>25</a:t>
                       </a:r>
                     </a:p>
                   </a:txBody>
@@ -6733,7 +7733,7 @@
                           </a:solidFill>
                           <a:latin typeface="Calibri"/>
                         </a:rPr>
-                        <a:t>6</a:t>
+                        <a:t>24</a:t>
                       </a:r>
                     </a:p>
                   </a:txBody>
@@ -6756,7 +7756,7 @@
                           </a:solidFill>
                           <a:latin typeface="Calibri"/>
                         </a:rPr>
-                        <a:t>0</a:t>
+                        <a:t>1</a:t>
                       </a:r>
                     </a:p>
                   </a:txBody>
@@ -6779,7 +7779,7 @@
                           </a:solidFill>
                           <a:latin typeface="Calibri"/>
                         </a:rPr>
-                        <a:t>100.0%</a:t>
+                        <a:t>96.0%</a:t>
                       </a:r>
                     </a:p>
                   </a:txBody>
@@ -6850,7 +7850,7 @@
                           </a:solidFill>
                           <a:latin typeface="Calibri"/>
                         </a:rPr>
-                        <a:t>GMX TECNOLOGIA E SER - RIO DE JANEIRO / RJ</a:t>
+                        <a:t>ENCOPEL COMERCIO DE - SAO PAULO / SP</a:t>
                       </a:r>
                     </a:p>
                   </a:txBody>
@@ -6873,7 +7873,7 @@
                           </a:solidFill>
                           <a:latin typeface="Calibri"/>
                         </a:rPr>
-                        <a:t>5</a:t>
+                        <a:t>21</a:t>
                       </a:r>
                     </a:p>
                   </a:txBody>
@@ -6896,7 +7896,7 @@
                           </a:solidFill>
                           <a:latin typeface="Calibri"/>
                         </a:rPr>
-                        <a:t>5</a:t>
+                        <a:t>19</a:t>
                       </a:r>
                     </a:p>
                   </a:txBody>
@@ -6919,7 +7919,7 @@
                           </a:solidFill>
                           <a:latin typeface="Calibri"/>
                         </a:rPr>
-                        <a:t>0</a:t>
+                        <a:t>2</a:t>
                       </a:r>
                     </a:p>
                   </a:txBody>
@@ -6942,7 +7942,7 @@
                           </a:solidFill>
                           <a:latin typeface="Calibri"/>
                         </a:rPr>
-                        <a:t>100.0%</a:t>
+                        <a:t>90.5%</a:t>
                       </a:r>
                     </a:p>
                   </a:txBody>
@@ -6965,7 +7965,7 @@
                           </a:solidFill>
                           <a:latin typeface="Calibri"/>
                         </a:rPr>
-                        <a:t>Excelente</a:t>
+                        <a:t>Regular</a:t>
                       </a:r>
                     </a:p>
                   </a:txBody>
@@ -7013,7 +8013,7 @@
                           </a:solidFill>
                           <a:latin typeface="Calibri"/>
                         </a:rPr>
-                        <a:t>BEM ESTAR LONDRINA L - LONDRINA / PR</a:t>
+                        <a:t>IRSA ROLAMENTOS S/A - SANTO ANDRE / SP</a:t>
                       </a:r>
                     </a:p>
                   </a:txBody>
@@ -7036,7 +8036,7 @@
                           </a:solidFill>
                           <a:latin typeface="Calibri"/>
                         </a:rPr>
-                        <a:t>5</a:t>
+                        <a:t>15</a:t>
                       </a:r>
                     </a:p>
                   </a:txBody>
@@ -7059,7 +8059,7 @@
                           </a:solidFill>
                           <a:latin typeface="Calibri"/>
                         </a:rPr>
-                        <a:t>5</a:t>
+                        <a:t>14</a:t>
                       </a:r>
                     </a:p>
                   </a:txBody>
@@ -7082,7 +8082,7 @@
                           </a:solidFill>
                           <a:latin typeface="Calibri"/>
                         </a:rPr>
-                        <a:t>0</a:t>
+                        <a:t>1</a:t>
                       </a:r>
                     </a:p>
                   </a:txBody>
@@ -7105,7 +8105,7 @@
                           </a:solidFill>
                           <a:latin typeface="Calibri"/>
                         </a:rPr>
-                        <a:t>100.0%</a:t>
+                        <a:t>93.3%</a:t>
                       </a:r>
                     </a:p>
                   </a:txBody>
@@ -7128,7 +8128,7 @@
                           </a:solidFill>
                           <a:latin typeface="Calibri"/>
                         </a:rPr>
-                        <a:t>Excelente</a:t>
+                        <a:t>Regular</a:t>
                       </a:r>
                     </a:p>
                   </a:txBody>
@@ -7176,7 +8176,7 @@
                           </a:solidFill>
                           <a:latin typeface="Calibri"/>
                         </a:rPr>
-                        <a:t>VIP REPAIR CENTER AS - CURITIBA / PR</a:t>
+                        <a:t>BEM ESTAR LONDRINA L - LONDRINA / PR</a:t>
                       </a:r>
                     </a:p>
                   </a:txBody>
@@ -7199,7 +8199,7 @@
                           </a:solidFill>
                           <a:latin typeface="Calibri"/>
                         </a:rPr>
-                        <a:t>4</a:t>
+                        <a:t>6</a:t>
                       </a:r>
                     </a:p>
                   </a:txBody>
@@ -7222,7 +8222,7 @@
                           </a:solidFill>
                           <a:latin typeface="Calibri"/>
                         </a:rPr>
-                        <a:t>4</a:t>
+                        <a:t>6</a:t>
                       </a:r>
                     </a:p>
                   </a:txBody>
@@ -7339,7 +8339,7 @@
                           </a:solidFill>
                           <a:latin typeface="Calibri"/>
                         </a:rPr>
-                        <a:t>FIX IT ASSISTENCIA E - PORTO ALEGRE / RS</a:t>
+                        <a:t>NORPEM COMERCIAL LTD - SAO PAULO / SP</a:t>
                       </a:r>
                     </a:p>
                   </a:txBody>
@@ -7362,7 +8362,7 @@
                           </a:solidFill>
                           <a:latin typeface="Calibri"/>
                         </a:rPr>
-                        <a:t>4</a:t>
+                        <a:t>6</a:t>
                       </a:r>
                     </a:p>
                   </a:txBody>
@@ -7385,7 +8385,7 @@
                           </a:solidFill>
                           <a:latin typeface="Calibri"/>
                         </a:rPr>
-                        <a:t>4</a:t>
+                        <a:t>6</a:t>
                       </a:r>
                     </a:p>
                   </a:txBody>
@@ -7502,7 +8502,7 @@
                           </a:solidFill>
                           <a:latin typeface="Calibri"/>
                         </a:rPr>
-                        <a:t>GLOBAL EXPRESS ASSIS - UBERLANDIA / MG</a:t>
+                        <a:t>VIP REPAIR CENTER AS - CURITIBA / PR</a:t>
                       </a:r>
                     </a:p>
                   </a:txBody>
@@ -7525,7 +8525,7 @@
                           </a:solidFill>
                           <a:latin typeface="Calibri"/>
                         </a:rPr>
-                        <a:t>4</a:t>
+                        <a:t>6</a:t>
                       </a:r>
                     </a:p>
                   </a:txBody>
@@ -7548,7 +8548,7 @@
                           </a:solidFill>
                           <a:latin typeface="Calibri"/>
                         </a:rPr>
-                        <a:t>4</a:t>
+                        <a:t>6</a:t>
                       </a:r>
                     </a:p>
                   </a:txBody>
@@ -7665,7 +8665,7 @@
                           </a:solidFill>
                           <a:latin typeface="Calibri"/>
                         </a:rPr>
-                        <a:t>EXCELLENCE ELETRODOM - ARAPONGAS / PR</a:t>
+                        <a:t>INFINITY ASSISTENCIA - JUIZ DE FORA / MG</a:t>
                       </a:r>
                     </a:p>
                   </a:txBody>
@@ -7688,7 +8688,7 @@
                           </a:solidFill>
                           <a:latin typeface="Calibri"/>
                         </a:rPr>
-                        <a:t>4</a:t>
+                        <a:t>5</a:t>
                       </a:r>
                     </a:p>
                   </a:txBody>
@@ -7711,7 +8711,7 @@
                           </a:solidFill>
                           <a:latin typeface="Calibri"/>
                         </a:rPr>
-                        <a:t>4</a:t>
+                        <a:t>5</a:t>
                       </a:r>
                     </a:p>
                   </a:txBody>
@@ -7828,7 +8828,7 @@
                           </a:solidFill>
                           <a:latin typeface="Calibri"/>
                         </a:rPr>
-                        <a:t>ELETRORARO COM DE EL - BELO HORIZONTE / MG</a:t>
+                        <a:t>FIX IT ASSISTENCIA E - PORTO ALEGRE / RS</a:t>
                       </a:r>
                     </a:p>
                   </a:txBody>
@@ -7851,7 +8851,7 @@
                           </a:solidFill>
                           <a:latin typeface="Calibri"/>
                         </a:rPr>
-                        <a:t>3</a:t>
+                        <a:t>4</a:t>
                       </a:r>
                     </a:p>
                   </a:txBody>
@@ -7874,7 +8874,7 @@
                           </a:solidFill>
                           <a:latin typeface="Calibri"/>
                         </a:rPr>
-                        <a:t>3</a:t>
+                        <a:t>4</a:t>
                       </a:r>
                     </a:p>
                   </a:txBody>
@@ -7991,7 +8991,7 @@
                           </a:solidFill>
                           <a:latin typeface="Calibri"/>
                         </a:rPr>
-                        <a:t>KNOLL REPARACAO E MA - FLORIANOPOLIS / SC</a:t>
+                        <a:t>ELETRORARO COM DE EL - BELO HORIZONTE / MG</a:t>
                       </a:r>
                     </a:p>
                   </a:txBody>
@@ -8014,7 +9014,7 @@
                           </a:solidFill>
                           <a:latin typeface="Calibri"/>
                         </a:rPr>
-                        <a:t>3</a:t>
+                        <a:t>4</a:t>
                       </a:r>
                     </a:p>
                   </a:txBody>
@@ -8037,7 +9037,7 @@
                           </a:solidFill>
                           <a:latin typeface="Calibri"/>
                         </a:rPr>
-                        <a:t>3</a:t>
+                        <a:t>4</a:t>
                       </a:r>
                     </a:p>
                   </a:txBody>
@@ -8154,7 +9154,7 @@
                           </a:solidFill>
                           <a:latin typeface="Calibri"/>
                         </a:rPr>
-                        <a:t>V CELL COMERCIO E SE - DUQUE DE CAXIAS / RJ</a:t>
+                        <a:t>GMX TECNOLOGIA E SER - RIO DE JANEIRO / RJ</a:t>
                       </a:r>
                     </a:p>
                   </a:txBody>
@@ -8177,7 +9177,7 @@
                           </a:solidFill>
                           <a:latin typeface="Calibri"/>
                         </a:rPr>
-                        <a:t>2</a:t>
+                        <a:t>4</a:t>
                       </a:r>
                     </a:p>
                   </a:txBody>
@@ -8200,7 +9200,7 @@
                           </a:solidFill>
                           <a:latin typeface="Calibri"/>
                         </a:rPr>
-                        <a:t>2</a:t>
+                        <a:t>4</a:t>
                       </a:r>
                     </a:p>
                   </a:txBody>
@@ -8317,7 +9317,7 @@
                           </a:solidFill>
                           <a:latin typeface="Calibri"/>
                         </a:rPr>
-                        <a:t>LUCIANO MUMBACH ELET - CERRO LARGO / RS</a:t>
+                        <a:t>EXCELLENCE ELETRODOM - ARAPONGAS / PR</a:t>
                       </a:r>
                     </a:p>
                   </a:txBody>
@@ -8340,7 +9340,7 @@
                           </a:solidFill>
                           <a:latin typeface="Calibri"/>
                         </a:rPr>
-                        <a:t>2</a:t>
+                        <a:t>3</a:t>
                       </a:r>
                     </a:p>
                   </a:txBody>
@@ -8363,7 +9363,7 @@
                           </a:solidFill>
                           <a:latin typeface="Calibri"/>
                         </a:rPr>
-                        <a:t>2</a:t>
+                        <a:t>3</a:t>
                       </a:r>
                     </a:p>
                   </a:txBody>
@@ -8480,7 +9480,7 @@
                           </a:solidFill>
                           <a:latin typeface="Calibri"/>
                         </a:rPr>
-                        <a:t>INFINITY ASSISTENCIA - JUIZ DE FORA / MG</a:t>
+                        <a:t>COLD SUMMER SOLUCOES - RIO DE JANEIRO / RJ</a:t>
                       </a:r>
                     </a:p>
                   </a:txBody>
@@ -8503,7 +9503,7 @@
                           </a:solidFill>
                           <a:latin typeface="Calibri"/>
                         </a:rPr>
-                        <a:t>2</a:t>
+                        <a:t>3</a:t>
                       </a:r>
                     </a:p>
                   </a:txBody>
@@ -8526,7 +9526,7 @@
                           </a:solidFill>
                           <a:latin typeface="Calibri"/>
                         </a:rPr>
-                        <a:t>2</a:t>
+                        <a:t>3</a:t>
                       </a:r>
                     </a:p>
                   </a:txBody>
@@ -8643,7 +9643,7 @@
                           </a:solidFill>
                           <a:latin typeface="Calibri"/>
                         </a:rPr>
-                        <a:t>BEM ESTAR CLIMATIZAC - TUBARAO / SC</a:t>
+                        <a:t>MINASFAST TECNOLOGIA - CONTAGEM / MG</a:t>
                       </a:r>
                     </a:p>
                   </a:txBody>
@@ -8666,7 +9666,7 @@
                           </a:solidFill>
                           <a:latin typeface="Calibri"/>
                         </a:rPr>
-                        <a:t>1</a:t>
+                        <a:t>3</a:t>
                       </a:r>
                     </a:p>
                   </a:txBody>
@@ -8689,7 +9689,7 @@
                           </a:solidFill>
                           <a:latin typeface="Calibri"/>
                         </a:rPr>
-                        <a:t>1</a:t>
+                        <a:t>3</a:t>
                       </a:r>
                     </a:p>
                   </a:txBody>
@@ -8806,7 +9806,7 @@
                           </a:solidFill>
                           <a:latin typeface="Calibri"/>
                         </a:rPr>
-                        <a:t>COLD SUMMER SOLUCOES - RIO DE JANEIRO / RJ</a:t>
+                        <a:t>LUCIANO MUMBACH ELET - CERRO LARGO / RS</a:t>
                       </a:r>
                     </a:p>
                   </a:txBody>
@@ -8829,7 +9829,7 @@
                           </a:solidFill>
                           <a:latin typeface="Calibri"/>
                         </a:rPr>
-                        <a:t>1</a:t>
+                        <a:t>2</a:t>
                       </a:r>
                     </a:p>
                   </a:txBody>
@@ -8852,7 +9852,7 @@
                           </a:solidFill>
                           <a:latin typeface="Calibri"/>
                         </a:rPr>
-                        <a:t>1</a:t>
+                        <a:t>2</a:t>
                       </a:r>
                     </a:p>
                   </a:txBody>
@@ -8944,7 +9944,7 @@
 </p:sld>
 </file>
 
-<file path=ppt/slides/slide6.xml><?xml version="1.0" encoding="utf-8"?>
+<file path=ppt/slides/slide7.xml><?xml version="1.0" encoding="utf-8"?>
 <p:sld xmlns:a="http://schemas.openxmlformats.org/drawingml/2006/main" xmlns:p="http://schemas.openxmlformats.org/presentationml/2006/main" xmlns:r="http://schemas.openxmlformats.org/officeDocument/2006/relationships">
   <p:cSld>
     <p:bg>
